--- a/lectures/02/Control Flow and Arrays.pptx
+++ b/lectures/02/Control Flow and Arrays.pptx
@@ -5,7 +5,7 @@
     <p:sldMasterId id="2147483648" r:id="rId1"/>
   </p:sldMasterIdLst>
   <p:notesMasterIdLst>
-    <p:notesMasterId r:id="rId53"/>
+    <p:notesMasterId r:id="rId57"/>
   </p:notesMasterIdLst>
   <p:sldIdLst>
     <p:sldId id="256" r:id="rId2"/>
@@ -42,23 +42,27 @@
     <p:sldId id="283" r:id="rId33"/>
     <p:sldId id="284" r:id="rId34"/>
     <p:sldId id="295" r:id="rId35"/>
-    <p:sldId id="285" r:id="rId36"/>
-    <p:sldId id="290" r:id="rId37"/>
-    <p:sldId id="291" r:id="rId38"/>
-    <p:sldId id="292" r:id="rId39"/>
-    <p:sldId id="293" r:id="rId40"/>
-    <p:sldId id="294" r:id="rId41"/>
-    <p:sldId id="296" r:id="rId42"/>
-    <p:sldId id="297" r:id="rId43"/>
-    <p:sldId id="298" r:id="rId44"/>
-    <p:sldId id="299" r:id="rId45"/>
-    <p:sldId id="300" r:id="rId46"/>
-    <p:sldId id="301" r:id="rId47"/>
-    <p:sldId id="303" r:id="rId48"/>
-    <p:sldId id="302" r:id="rId49"/>
-    <p:sldId id="304" r:id="rId50"/>
-    <p:sldId id="305" r:id="rId51"/>
-    <p:sldId id="306" r:id="rId52"/>
+    <p:sldId id="307" r:id="rId36"/>
+    <p:sldId id="308" r:id="rId37"/>
+    <p:sldId id="309" r:id="rId38"/>
+    <p:sldId id="285" r:id="rId39"/>
+    <p:sldId id="310" r:id="rId40"/>
+    <p:sldId id="290" r:id="rId41"/>
+    <p:sldId id="291" r:id="rId42"/>
+    <p:sldId id="292" r:id="rId43"/>
+    <p:sldId id="293" r:id="rId44"/>
+    <p:sldId id="294" r:id="rId45"/>
+    <p:sldId id="296" r:id="rId46"/>
+    <p:sldId id="297" r:id="rId47"/>
+    <p:sldId id="298" r:id="rId48"/>
+    <p:sldId id="299" r:id="rId49"/>
+    <p:sldId id="300" r:id="rId50"/>
+    <p:sldId id="301" r:id="rId51"/>
+    <p:sldId id="303" r:id="rId52"/>
+    <p:sldId id="302" r:id="rId53"/>
+    <p:sldId id="304" r:id="rId54"/>
+    <p:sldId id="305" r:id="rId55"/>
+    <p:sldId id="306" r:id="rId56"/>
   </p:sldIdLst>
   <p:sldSz cx="12192000" cy="6858000"/>
   <p:notesSz cx="6858000" cy="9144000"/>
@@ -6636,10 +6640,10 @@
           <a:p>
             <a:r>
               <a:rPr lang="ru-RU" dirty="0"/>
-              <a:t>Все три цикла позволяют организовать повторение действий. Разница заключается в удобстве и читаемости. Если основной акцент на условии — часто используют </a:t>
-            </a:r>
-            <a:r>
-              <a:rPr lang="ru-RU" sz="1200" kern="1200" dirty="0" err="1">
+              <a:t>Оператор </a:t>
+            </a:r>
+            <a:r>
+              <a:rPr lang="ru-RU" sz="1200" b="1" kern="1200" dirty="0" err="1">
                 <a:solidFill>
                   <a:schemeClr val="tx1"/>
                 </a:solidFill>
@@ -6647,14 +6651,14 @@
                 <a:ea typeface="+mn-ea"/>
                 <a:cs typeface="+mn-cs"/>
               </a:rPr>
-              <a:t>while</a:t>
-            </a:r>
-            <a:r>
-              <a:rPr lang="ru-RU" dirty="0"/>
-              <a:t>. Если есть счётчик или перебор значений — удобнее </a:t>
-            </a:r>
-            <a:r>
-              <a:rPr lang="ru-RU" sz="1200" kern="1200" dirty="0" err="1">
+              <a:t>break</a:t>
+            </a:r>
+            <a:r>
+              <a:rPr lang="ru-RU" dirty="0"/>
+              <a:t> используется для немедленного выхода из цикла. Как только выполняется </a:t>
+            </a:r>
+            <a:r>
+              <a:rPr lang="ru-RU" sz="1200" b="1" kern="1200" dirty="0" err="1">
                 <a:solidFill>
                   <a:schemeClr val="tx1"/>
                 </a:solidFill>
@@ -6662,14 +6666,14 @@
                 <a:ea typeface="+mn-ea"/>
                 <a:cs typeface="+mn-cs"/>
               </a:rPr>
-              <a:t>for</a:t>
-            </a:r>
-            <a:r>
-              <a:rPr lang="ru-RU" dirty="0"/>
-              <a:t>. Если действие должно быть выполнено хотя бы один раз — подходит </a:t>
-            </a:r>
-            <a:r>
-              <a:rPr lang="ru-RU" sz="1200" kern="1200" dirty="0" err="1">
+              <a:t>break</a:t>
+            </a:r>
+            <a:r>
+              <a:rPr lang="ru-RU" dirty="0"/>
+              <a:t>, цикл полностью прекращается, и выполнение программы продолжается со строки после цикла. В примере цикл должен был выполняться до </a:t>
+            </a:r>
+            <a:r>
+              <a:rPr lang="ru-RU" sz="1200" kern="1200" dirty="0">
                 <a:solidFill>
                   <a:schemeClr val="tx1"/>
                 </a:solidFill>
@@ -6677,11 +6681,66 @@
                 <a:ea typeface="+mn-ea"/>
                 <a:cs typeface="+mn-cs"/>
               </a:rPr>
-              <a:t>do-while</a:t>
-            </a:r>
-            <a:r>
-              <a:rPr lang="ru-RU" dirty="0"/>
-              <a:t>. С точки зрения возможностей языка они эквивалентны, но правильный выбор конструкции делает программу более понятной.</a:t>
+              <a:t>i &lt; 10</a:t>
+            </a:r>
+            <a:r>
+              <a:rPr lang="ru-RU" dirty="0"/>
+              <a:t>, но при </a:t>
+            </a:r>
+            <a:r>
+              <a:rPr lang="ru-RU" sz="1200" kern="1200" dirty="0">
+                <a:solidFill>
+                  <a:schemeClr val="tx1"/>
+                </a:solidFill>
+                <a:latin typeface="+mn-lt"/>
+                <a:ea typeface="+mn-ea"/>
+                <a:cs typeface="+mn-cs"/>
+              </a:rPr>
+              <a:t>i == 5</a:t>
+            </a:r>
+            <a:r>
+              <a:rPr lang="ru-RU" dirty="0"/>
+              <a:t> выполняется </a:t>
+            </a:r>
+            <a:r>
+              <a:rPr lang="ru-RU" sz="1200" b="1" kern="1200" dirty="0" err="1">
+                <a:solidFill>
+                  <a:schemeClr val="tx1"/>
+                </a:solidFill>
+                <a:latin typeface="+mn-lt"/>
+                <a:ea typeface="+mn-ea"/>
+                <a:cs typeface="+mn-cs"/>
+              </a:rPr>
+              <a:t>break</a:t>
+            </a:r>
+            <a:r>
+              <a:rPr lang="ru-RU" dirty="0"/>
+              <a:t>, и цикл завершается досрочно. В результате печатаются числа от 0 до 4.</a:t>
+            </a:r>
+            <a:endParaRPr lang="en-US" dirty="0"/>
+          </a:p>
+          <a:p>
+            <a:endParaRPr lang="ru-RU" dirty="0"/>
+          </a:p>
+          <a:p>
+            <a:r>
+              <a:rPr lang="ru-RU" dirty="0"/>
+              <a:t>Важно понимать, что </a:t>
+            </a:r>
+            <a:r>
+              <a:rPr lang="ru-RU" sz="1200" b="1" kern="1200" dirty="0" err="1">
+                <a:solidFill>
+                  <a:schemeClr val="tx1"/>
+                </a:solidFill>
+                <a:latin typeface="+mn-lt"/>
+                <a:ea typeface="+mn-ea"/>
+                <a:cs typeface="+mn-cs"/>
+              </a:rPr>
+              <a:t>break</a:t>
+            </a:r>
+            <a:r>
+              <a:rPr lang="ru-RU" dirty="0"/>
+              <a:t> завершает только тот цикл, внутри которого он находится. Если циклы вложенные, будет завершён только внутренний. </a:t>
             </a:r>
             <a:endParaRPr lang="en-US" dirty="0"/>
           </a:p>
@@ -6713,7 +6772,7 @@
     </p:spTree>
     <p:extLst>
       <p:ext uri="{BB962C8B-B14F-4D97-AF65-F5344CB8AC3E}">
-        <p14:creationId xmlns:p14="http://schemas.microsoft.com/office/powerpoint/2010/main" val="664971712"/>
+        <p14:creationId xmlns:p14="http://schemas.microsoft.com/office/powerpoint/2010/main" val="2661472049"/>
       </p:ext>
     </p:extLst>
   </p:cSld>
@@ -6767,7 +6826,191 @@
           <a:bodyPr/>
           <a:lstStyle/>
           <a:p>
-            <a:endParaRPr lang="en-US"/>
+            <a:r>
+              <a:rPr lang="ru-RU" dirty="0"/>
+              <a:t>Здесь у нас два вложенных цикла: внешний по </a:t>
+            </a:r>
+            <a:r>
+              <a:rPr lang="ru-RU" sz="1200" kern="1200" dirty="0">
+                <a:solidFill>
+                  <a:schemeClr val="tx1"/>
+                </a:solidFill>
+                <a:latin typeface="+mn-lt"/>
+                <a:ea typeface="+mn-ea"/>
+                <a:cs typeface="+mn-cs"/>
+              </a:rPr>
+              <a:t>i</a:t>
+            </a:r>
+            <a:r>
+              <a:rPr lang="ru-RU" dirty="0"/>
+              <a:t> и внутренний по </a:t>
+            </a:r>
+            <a:r>
+              <a:rPr lang="ru-RU" sz="1200" kern="1200" dirty="0">
+                <a:solidFill>
+                  <a:schemeClr val="tx1"/>
+                </a:solidFill>
+                <a:latin typeface="+mn-lt"/>
+                <a:ea typeface="+mn-ea"/>
+                <a:cs typeface="+mn-cs"/>
+              </a:rPr>
+              <a:t>j</a:t>
+            </a:r>
+            <a:r>
+              <a:rPr lang="ru-RU" dirty="0"/>
+              <a:t>.</a:t>
+            </a:r>
+          </a:p>
+          <a:p>
+            <a:r>
+              <a:rPr lang="ru-RU" dirty="0"/>
+              <a:t>Когда </a:t>
+            </a:r>
+            <a:r>
+              <a:rPr lang="ru-RU" sz="1200" kern="1200" dirty="0">
+                <a:solidFill>
+                  <a:schemeClr val="tx1"/>
+                </a:solidFill>
+                <a:latin typeface="+mn-lt"/>
+                <a:ea typeface="+mn-ea"/>
+                <a:cs typeface="+mn-cs"/>
+              </a:rPr>
+              <a:t>j</a:t>
+            </a:r>
+            <a:r>
+              <a:rPr lang="ru-RU" dirty="0"/>
+              <a:t> становится равным 2, выполняется </a:t>
+            </a:r>
+            <a:r>
+              <a:rPr lang="ru-RU" sz="1200" kern="1200" dirty="0" err="1">
+                <a:solidFill>
+                  <a:schemeClr val="tx1"/>
+                </a:solidFill>
+                <a:latin typeface="+mn-lt"/>
+                <a:ea typeface="+mn-ea"/>
+                <a:cs typeface="+mn-cs"/>
+              </a:rPr>
+              <a:t>break</a:t>
+            </a:r>
+            <a:r>
+              <a:rPr lang="ru-RU" dirty="0"/>
+              <a:t>. Важно понимать, что этот </a:t>
+            </a:r>
+            <a:r>
+              <a:rPr lang="ru-RU" sz="1200" kern="1200" dirty="0" err="1">
+                <a:solidFill>
+                  <a:schemeClr val="tx1"/>
+                </a:solidFill>
+                <a:latin typeface="+mn-lt"/>
+                <a:ea typeface="+mn-ea"/>
+                <a:cs typeface="+mn-cs"/>
+              </a:rPr>
+              <a:t>break</a:t>
+            </a:r>
+            <a:r>
+              <a:rPr lang="ru-RU" dirty="0"/>
+              <a:t> завершает </a:t>
+            </a:r>
+            <a:r>
+              <a:rPr lang="ru-RU" b="1" dirty="0"/>
+              <a:t>только внутренний цикл</a:t>
+            </a:r>
+            <a:r>
+              <a:rPr lang="ru-RU" dirty="0"/>
+              <a:t>, тот, в котором он написан. Внешний цикл продолжает работать.</a:t>
+            </a:r>
+          </a:p>
+          <a:p>
+            <a:r>
+              <a:rPr lang="ru-RU" dirty="0"/>
+              <a:t>То есть при каждом значении </a:t>
+            </a:r>
+            <a:r>
+              <a:rPr lang="ru-RU" sz="1200" kern="1200" dirty="0">
+                <a:solidFill>
+                  <a:schemeClr val="tx1"/>
+                </a:solidFill>
+                <a:latin typeface="+mn-lt"/>
+                <a:ea typeface="+mn-ea"/>
+                <a:cs typeface="+mn-cs"/>
+              </a:rPr>
+              <a:t>i</a:t>
+            </a:r>
+            <a:r>
+              <a:rPr lang="ru-RU" dirty="0"/>
+              <a:t> внутренний цикл выполняется только для </a:t>
+            </a:r>
+            <a:r>
+              <a:rPr lang="ru-RU" sz="1200" kern="1200" dirty="0">
+                <a:solidFill>
+                  <a:schemeClr val="tx1"/>
+                </a:solidFill>
+                <a:latin typeface="+mn-lt"/>
+                <a:ea typeface="+mn-ea"/>
+                <a:cs typeface="+mn-cs"/>
+              </a:rPr>
+              <a:t>j = 0</a:t>
+            </a:r>
+            <a:r>
+              <a:rPr lang="ru-RU" dirty="0"/>
+              <a:t> и </a:t>
+            </a:r>
+            <a:r>
+              <a:rPr lang="ru-RU" sz="1200" kern="1200" dirty="0">
+                <a:solidFill>
+                  <a:schemeClr val="tx1"/>
+                </a:solidFill>
+                <a:latin typeface="+mn-lt"/>
+                <a:ea typeface="+mn-ea"/>
+                <a:cs typeface="+mn-cs"/>
+              </a:rPr>
+              <a:t>j = 1</a:t>
+            </a:r>
+            <a:r>
+              <a:rPr lang="ru-RU" dirty="0"/>
+              <a:t>, затем прерывается, после чего выполнение возвращается во внешний цикл, который увеличивает </a:t>
+            </a:r>
+            <a:r>
+              <a:rPr lang="ru-RU" sz="1200" kern="1200" dirty="0">
+                <a:solidFill>
+                  <a:schemeClr val="tx1"/>
+                </a:solidFill>
+                <a:latin typeface="+mn-lt"/>
+                <a:ea typeface="+mn-ea"/>
+                <a:cs typeface="+mn-cs"/>
+              </a:rPr>
+              <a:t>i</a:t>
+            </a:r>
+            <a:r>
+              <a:rPr lang="ru-RU" dirty="0"/>
+              <a:t> и запускает внутренний цикл снова.</a:t>
+            </a:r>
+          </a:p>
+          <a:p>
+            <a:r>
+              <a:rPr lang="ru-RU" dirty="0"/>
+              <a:t>Это хорошо показывает правило: </a:t>
+            </a:r>
+            <a:r>
+              <a:rPr lang="ru-RU" sz="1200" b="1" kern="1200" dirty="0" err="1">
+                <a:solidFill>
+                  <a:schemeClr val="tx1"/>
+                </a:solidFill>
+                <a:latin typeface="+mn-lt"/>
+                <a:ea typeface="+mn-ea"/>
+                <a:cs typeface="+mn-cs"/>
+              </a:rPr>
+              <a:t>break</a:t>
+            </a:r>
+            <a:r>
+              <a:rPr lang="ru-RU" b="1" dirty="0"/>
+              <a:t> всегда завершает только ближайший цикл</a:t>
+            </a:r>
+            <a:r>
+              <a:rPr lang="ru-RU" dirty="0"/>
+              <a:t>, внутри которого он находится.</a:t>
+            </a:r>
+            <a:endParaRPr lang="en-US" dirty="0"/>
           </a:p>
         </p:txBody>
       </p:sp>
@@ -6797,7 +7040,7 @@
     </p:spTree>
     <p:extLst>
       <p:ext uri="{BB962C8B-B14F-4D97-AF65-F5344CB8AC3E}">
-        <p14:creationId xmlns:p14="http://schemas.microsoft.com/office/powerpoint/2010/main" val="3923793219"/>
+        <p14:creationId xmlns:p14="http://schemas.microsoft.com/office/powerpoint/2010/main" val="818448607"/>
       </p:ext>
     </p:extLst>
   </p:cSld>
@@ -6853,35 +7096,157 @@
           <a:p>
             <a:r>
               <a:rPr lang="ru-RU" dirty="0"/>
-              <a:t>До сих пор мы работали с отдельными переменными. Но если нам нужно хранить десять, сто или тысячу чисел одного типа, объявлять каждую переменную отдельно неудобно и непрактично. Для этого существует массив.</a:t>
-            </a:r>
-            <a:endParaRPr lang="en-US" dirty="0"/>
-          </a:p>
-          <a:p>
-            <a:endParaRPr lang="en-US" b="1" dirty="0"/>
-          </a:p>
-          <a:p>
-            <a:r>
-              <a:rPr lang="ru-RU" b="1" dirty="0"/>
-              <a:t>Массив — это фиксированная последовательность элементов одного типа</a:t>
-            </a:r>
-            <a:r>
-              <a:rPr lang="ru-RU" dirty="0"/>
-              <a:t>, расположенных подряд в памяти. Он позволяет обращаться к данным по индексу, а не по имени каждой переменной. Это делает программы компактнее и </a:t>
-            </a:r>
-            <a:r>
-              <a:rPr lang="ru-RU" dirty="0" err="1"/>
-              <a:t>структурированнее</a:t>
-            </a:r>
-            <a:r>
-              <a:rPr lang="ru-RU" dirty="0"/>
-              <a:t>.</a:t>
-            </a:r>
-          </a:p>
-          <a:p>
-            <a:br>
-              <a:rPr lang="ru-RU" dirty="0"/>
-            </a:br>
+              <a:t>Оператор </a:t>
+            </a:r>
+            <a:r>
+              <a:rPr lang="ru-RU" sz="1200" kern="1200" dirty="0" err="1">
+                <a:solidFill>
+                  <a:schemeClr val="tx1"/>
+                </a:solidFill>
+                <a:latin typeface="+mn-lt"/>
+                <a:ea typeface="+mn-ea"/>
+                <a:cs typeface="+mn-cs"/>
+              </a:rPr>
+              <a:t>continue</a:t>
+            </a:r>
+            <a:r>
+              <a:rPr lang="ru-RU" dirty="0"/>
+              <a:t> не завершает цикл полностью, а прерывает только текущую итерацию. После выполнения </a:t>
+            </a:r>
+            <a:r>
+              <a:rPr lang="ru-RU" sz="1200" kern="1200" dirty="0" err="1">
+                <a:solidFill>
+                  <a:schemeClr val="tx1"/>
+                </a:solidFill>
+                <a:latin typeface="+mn-lt"/>
+                <a:ea typeface="+mn-ea"/>
+                <a:cs typeface="+mn-cs"/>
+              </a:rPr>
+              <a:t>continue</a:t>
+            </a:r>
+            <a:r>
+              <a:rPr lang="ru-RU" dirty="0"/>
+              <a:t> управление переходит к следующей проверке условия цикла. В цикле </a:t>
+            </a:r>
+            <a:r>
+              <a:rPr lang="ru-RU" sz="1200" kern="1200" dirty="0" err="1">
+                <a:solidFill>
+                  <a:schemeClr val="tx1"/>
+                </a:solidFill>
+                <a:latin typeface="+mn-lt"/>
+                <a:ea typeface="+mn-ea"/>
+                <a:cs typeface="+mn-cs"/>
+              </a:rPr>
+              <a:t>for</a:t>
+            </a:r>
+            <a:r>
+              <a:rPr lang="ru-RU" dirty="0"/>
+              <a:t> это означает переход к шагу изменения переменной, а затем к проверке условия.</a:t>
+            </a:r>
+          </a:p>
+          <a:p>
+            <a:r>
+              <a:rPr lang="ru-RU" dirty="0"/>
+              <a:t>В примере мы пропускаем все чётные числа. Когда </a:t>
+            </a:r>
+            <a:r>
+              <a:rPr lang="ru-RU" sz="1200" kern="1200" dirty="0">
+                <a:solidFill>
+                  <a:schemeClr val="tx1"/>
+                </a:solidFill>
+                <a:latin typeface="+mn-lt"/>
+                <a:ea typeface="+mn-ea"/>
+                <a:cs typeface="+mn-cs"/>
+              </a:rPr>
+              <a:t>i</a:t>
+            </a:r>
+            <a:r>
+              <a:rPr lang="ru-RU" dirty="0"/>
+              <a:t> чётное, выполняется </a:t>
+            </a:r>
+            <a:r>
+              <a:rPr lang="ru-RU" sz="1200" kern="1200" dirty="0" err="1">
+                <a:solidFill>
+                  <a:schemeClr val="tx1"/>
+                </a:solidFill>
+                <a:latin typeface="+mn-lt"/>
+                <a:ea typeface="+mn-ea"/>
+                <a:cs typeface="+mn-cs"/>
+              </a:rPr>
+              <a:t>continue</a:t>
+            </a:r>
+            <a:r>
+              <a:rPr lang="ru-RU" dirty="0"/>
+              <a:t>, и печать пропускается. Таким образом выводятся только нечётные значения.</a:t>
+            </a:r>
+          </a:p>
+          <a:p>
+            <a:r>
+              <a:rPr lang="ru-RU" dirty="0"/>
+              <a:t>Разница между </a:t>
+            </a:r>
+            <a:r>
+              <a:rPr lang="ru-RU" sz="1200" kern="1200" dirty="0" err="1">
+                <a:solidFill>
+                  <a:schemeClr val="tx1"/>
+                </a:solidFill>
+                <a:latin typeface="+mn-lt"/>
+                <a:ea typeface="+mn-ea"/>
+                <a:cs typeface="+mn-cs"/>
+              </a:rPr>
+              <a:t>break</a:t>
+            </a:r>
+            <a:r>
+              <a:rPr lang="ru-RU" dirty="0"/>
+              <a:t> и </a:t>
+            </a:r>
+            <a:r>
+              <a:rPr lang="ru-RU" sz="1200" kern="1200" dirty="0" err="1">
+                <a:solidFill>
+                  <a:schemeClr val="tx1"/>
+                </a:solidFill>
+                <a:latin typeface="+mn-lt"/>
+                <a:ea typeface="+mn-ea"/>
+                <a:cs typeface="+mn-cs"/>
+              </a:rPr>
+              <a:t>continue</a:t>
+            </a:r>
+            <a:r>
+              <a:rPr lang="ru-RU" dirty="0"/>
+              <a:t> принципиальна: </a:t>
+            </a:r>
+            <a:r>
+              <a:rPr lang="ru-RU" sz="1200" kern="1200" dirty="0" err="1">
+                <a:solidFill>
+                  <a:schemeClr val="tx1"/>
+                </a:solidFill>
+                <a:latin typeface="+mn-lt"/>
+                <a:ea typeface="+mn-ea"/>
+                <a:cs typeface="+mn-cs"/>
+              </a:rPr>
+              <a:t>break</a:t>
+            </a:r>
+            <a:r>
+              <a:rPr lang="ru-RU" dirty="0"/>
+              <a:t> полностью завершает цикл, а </a:t>
+            </a:r>
+            <a:r>
+              <a:rPr lang="ru-RU" sz="1200" kern="1200" dirty="0" err="1">
+                <a:solidFill>
+                  <a:schemeClr val="tx1"/>
+                </a:solidFill>
+                <a:latin typeface="+mn-lt"/>
+                <a:ea typeface="+mn-ea"/>
+                <a:cs typeface="+mn-cs"/>
+              </a:rPr>
+              <a:t>continue</a:t>
+            </a:r>
+            <a:r>
+              <a:rPr lang="ru-RU" dirty="0"/>
+              <a:t> просто пропускает текущую итерацию и продолжает выполнение цикла дальше.</a:t>
+            </a:r>
+          </a:p>
+          <a:p>
             <a:endParaRPr lang="en-US" dirty="0"/>
           </a:p>
         </p:txBody>
@@ -6912,7 +7277,7 @@
     </p:spTree>
     <p:extLst>
       <p:ext uri="{BB962C8B-B14F-4D97-AF65-F5344CB8AC3E}">
-        <p14:creationId xmlns:p14="http://schemas.microsoft.com/office/powerpoint/2010/main" val="3945570933"/>
+        <p14:creationId xmlns:p14="http://schemas.microsoft.com/office/powerpoint/2010/main" val="553009194"/>
       </p:ext>
     </p:extLst>
   </p:cSld>
@@ -6968,15 +7333,7 @@
           <a:p>
             <a:r>
               <a:rPr lang="ru-RU" dirty="0"/>
-              <a:t>Массив объявляется указанием типа, имени и размера в квадратных скобках. Число в скобках — это </a:t>
-            </a:r>
-            <a:r>
-              <a:rPr lang="ru-RU" b="1" dirty="0"/>
-              <a:t>количество элементов</a:t>
-            </a:r>
-            <a:r>
-              <a:rPr lang="ru-RU" dirty="0"/>
-              <a:t>, а не последний индекс. Если массив объявлен как </a:t>
+              <a:t>Все три цикла позволяют организовать повторение действий. Разница заключается в удобстве и читаемости. Если основной акцент на условии — часто используют </a:t>
             </a:r>
             <a:r>
               <a:rPr lang="ru-RU" sz="1200" kern="1200" dirty="0" err="1">
@@ -6987,10 +7344,14 @@
                 <a:ea typeface="+mn-ea"/>
                 <a:cs typeface="+mn-cs"/>
               </a:rPr>
-              <a:t>int</a:t>
-            </a:r>
-            <a:r>
-              <a:rPr lang="ru-RU" sz="1200" kern="1200" dirty="0">
+              <a:t>while</a:t>
+            </a:r>
+            <a:r>
+              <a:rPr lang="ru-RU" dirty="0"/>
+              <a:t>. Если есть счётчик или перебор значений — удобнее </a:t>
+            </a:r>
+            <a:r>
+              <a:rPr lang="ru-RU" sz="1200" kern="1200" dirty="0" err="1">
                 <a:solidFill>
                   <a:schemeClr val="tx1"/>
                 </a:solidFill>
@@ -6998,11 +7359,26 @@
                 <a:ea typeface="+mn-ea"/>
                 <a:cs typeface="+mn-cs"/>
               </a:rPr>
-              <a:t> a[10]</a:t>
-            </a:r>
-            <a:r>
-              <a:rPr lang="ru-RU" dirty="0"/>
-              <a:t>, допустимые индексы — от 0 до 9. В языке C индексация начинается с нуля. Это важная особенность, к которой нужно привыкнуть. Размер массива должен быть известен во время компиляции, если речь идёт о статическом массиве.</a:t>
+              <a:t>for</a:t>
+            </a:r>
+            <a:r>
+              <a:rPr lang="ru-RU" dirty="0"/>
+              <a:t>. Если действие должно быть выполнено хотя бы один раз — подходит </a:t>
+            </a:r>
+            <a:r>
+              <a:rPr lang="ru-RU" sz="1200" kern="1200" dirty="0" err="1">
+                <a:solidFill>
+                  <a:schemeClr val="tx1"/>
+                </a:solidFill>
+                <a:latin typeface="+mn-lt"/>
+                <a:ea typeface="+mn-ea"/>
+                <a:cs typeface="+mn-cs"/>
+              </a:rPr>
+              <a:t>do-while</a:t>
+            </a:r>
+            <a:r>
+              <a:rPr lang="ru-RU" dirty="0"/>
+              <a:t>. С точки зрения возможностей языка они эквивалентны, но правильный выбор конструкции делает программу более понятной.</a:t>
             </a:r>
             <a:endParaRPr lang="en-US" dirty="0"/>
           </a:p>
@@ -7034,7 +7410,7 @@
     </p:spTree>
     <p:extLst>
       <p:ext uri="{BB962C8B-B14F-4D97-AF65-F5344CB8AC3E}">
-        <p14:creationId xmlns:p14="http://schemas.microsoft.com/office/powerpoint/2010/main" val="3404030083"/>
+        <p14:creationId xmlns:p14="http://schemas.microsoft.com/office/powerpoint/2010/main" val="664971712"/>
       </p:ext>
     </p:extLst>
   </p:cSld>
@@ -7090,10 +7466,10 @@
           <a:p>
             <a:r>
               <a:rPr lang="ru-RU" dirty="0"/>
-              <a:t>К элементам массива обращаются с помощью индекса в квадратных скобках. Индекс — это выражение целого типа, поэтому можно писать не только число, но и переменную или арифметическое выражение. Например, </a:t>
-            </a:r>
-            <a:r>
-              <a:rPr lang="ru-RU" sz="1200" kern="1200" dirty="0">
+              <a:t>Оператор </a:t>
+            </a:r>
+            <a:r>
+              <a:rPr lang="ru-RU" sz="1200" kern="1200" dirty="0" err="1">
                 <a:solidFill>
                   <a:schemeClr val="tx1"/>
                 </a:solidFill>
@@ -7101,20 +7477,191 @@
                 <a:ea typeface="+mn-ea"/>
                 <a:cs typeface="+mn-cs"/>
               </a:rPr>
-              <a:t>a[i]</a:t>
-            </a:r>
-            <a:r>
-              <a:rPr lang="ru-RU" dirty="0"/>
-              <a:t> означает «элемент с номером i». Важно помнить, что </a:t>
-            </a:r>
-            <a:r>
-              <a:rPr lang="ru-RU" b="1" dirty="0"/>
-              <a:t>индекс должен попадать в допустимый диапазон</a:t>
-            </a:r>
-            <a:r>
-              <a:rPr lang="ru-RU" dirty="0"/>
-              <a:t>, иначе программа будет работать некорректно. Пока мы просто будем считать, что индексы всегда корректны.</a:t>
-            </a:r>
+              <a:t>goto</a:t>
+            </a:r>
+            <a:r>
+              <a:rPr lang="ru-RU" dirty="0"/>
+              <a:t> выполняет безусловный переход к метке. Синтаксис состоит из двух частей: инструкции </a:t>
+            </a:r>
+            <a:r>
+              <a:rPr lang="ru-RU" sz="1200" kern="1200" dirty="0" err="1">
+                <a:solidFill>
+                  <a:schemeClr val="tx1"/>
+                </a:solidFill>
+                <a:latin typeface="+mn-lt"/>
+                <a:ea typeface="+mn-ea"/>
+                <a:cs typeface="+mn-cs"/>
+              </a:rPr>
+              <a:t>goto</a:t>
+            </a:r>
+            <a:r>
+              <a:rPr lang="ru-RU" sz="1200" kern="1200" dirty="0">
+                <a:solidFill>
+                  <a:schemeClr val="tx1"/>
+                </a:solidFill>
+                <a:latin typeface="+mn-lt"/>
+                <a:ea typeface="+mn-ea"/>
+                <a:cs typeface="+mn-cs"/>
+              </a:rPr>
+              <a:t> </a:t>
+            </a:r>
+            <a:r>
+              <a:rPr lang="ru-RU" sz="1200" kern="1200" dirty="0" err="1">
+                <a:solidFill>
+                  <a:schemeClr val="tx1"/>
+                </a:solidFill>
+                <a:latin typeface="+mn-lt"/>
+                <a:ea typeface="+mn-ea"/>
+                <a:cs typeface="+mn-cs"/>
+              </a:rPr>
+              <a:t>label</a:t>
+            </a:r>
+            <a:r>
+              <a:rPr lang="ru-RU" sz="1200" kern="1200" dirty="0">
+                <a:solidFill>
+                  <a:schemeClr val="tx1"/>
+                </a:solidFill>
+                <a:latin typeface="+mn-lt"/>
+                <a:ea typeface="+mn-ea"/>
+                <a:cs typeface="+mn-cs"/>
+              </a:rPr>
+              <a:t>;</a:t>
+            </a:r>
+            <a:r>
+              <a:rPr lang="ru-RU" dirty="0"/>
+              <a:t> и самой метки </a:t>
+            </a:r>
+            <a:r>
+              <a:rPr lang="ru-RU" sz="1200" kern="1200" dirty="0" err="1">
+                <a:solidFill>
+                  <a:schemeClr val="tx1"/>
+                </a:solidFill>
+                <a:latin typeface="+mn-lt"/>
+                <a:ea typeface="+mn-ea"/>
+                <a:cs typeface="+mn-cs"/>
+              </a:rPr>
+              <a:t>label</a:t>
+            </a:r>
+            <a:r>
+              <a:rPr lang="ru-RU" sz="1200" kern="1200" dirty="0">
+                <a:solidFill>
+                  <a:schemeClr val="tx1"/>
+                </a:solidFill>
+                <a:latin typeface="+mn-lt"/>
+                <a:ea typeface="+mn-ea"/>
+                <a:cs typeface="+mn-cs"/>
+              </a:rPr>
+              <a:t>:</a:t>
+            </a:r>
+            <a:r>
+              <a:rPr lang="ru-RU" dirty="0"/>
+              <a:t>, расположенной где-то ниже или выше в той же функции. Переход возможен только внутри одной функции, нельзя перейти в другую функцию или в другой файл. Это всегда безусловный переход — никаких проверок, управление просто передаётся к указанной строке.</a:t>
+            </a:r>
+          </a:p>
+          <a:p>
+            <a:endParaRPr lang="ru-RU" dirty="0"/>
+          </a:p>
+          <a:p>
+            <a:r>
+              <a:rPr lang="ru-RU" dirty="0"/>
+              <a:t>Теперь посмотрим на пример. Мы ищем элемент в двумерном массиве с помощью вложенных циклов. Если использовать только </a:t>
+            </a:r>
+            <a:r>
+              <a:rPr lang="ru-RU" sz="1200" kern="1200" dirty="0" err="1">
+                <a:solidFill>
+                  <a:schemeClr val="tx1"/>
+                </a:solidFill>
+                <a:latin typeface="+mn-lt"/>
+                <a:ea typeface="+mn-ea"/>
+                <a:cs typeface="+mn-cs"/>
+              </a:rPr>
+              <a:t>break</a:t>
+            </a:r>
+            <a:r>
+              <a:rPr lang="ru-RU" dirty="0"/>
+              <a:t>, мы сможем выйти лишь из внутреннего цикла. Внешний цикл продолжит выполняться. Чтобы немедленно прекратить оба цикла, используется </a:t>
+            </a:r>
+            <a:r>
+              <a:rPr lang="ru-RU" sz="1200" kern="1200" dirty="0" err="1">
+                <a:solidFill>
+                  <a:schemeClr val="tx1"/>
+                </a:solidFill>
+                <a:latin typeface="+mn-lt"/>
+                <a:ea typeface="+mn-ea"/>
+                <a:cs typeface="+mn-cs"/>
+              </a:rPr>
+              <a:t>goto</a:t>
+            </a:r>
+            <a:r>
+              <a:rPr lang="ru-RU" dirty="0"/>
+              <a:t>.</a:t>
+            </a:r>
+          </a:p>
+          <a:p>
+            <a:r>
+              <a:rPr lang="ru-RU" dirty="0"/>
+              <a:t>Когда элемент найден, устанавливается флаг </a:t>
+            </a:r>
+            <a:r>
+              <a:rPr lang="ru-RU" sz="1200" kern="1200" dirty="0" err="1">
+                <a:solidFill>
+                  <a:schemeClr val="tx1"/>
+                </a:solidFill>
+                <a:latin typeface="+mn-lt"/>
+                <a:ea typeface="+mn-ea"/>
+                <a:cs typeface="+mn-cs"/>
+              </a:rPr>
+              <a:t>found</a:t>
+            </a:r>
+            <a:r>
+              <a:rPr lang="ru-RU" dirty="0"/>
+              <a:t>, после чего выполняется переход к метке </a:t>
+            </a:r>
+            <a:r>
+              <a:rPr lang="ru-RU" sz="1200" kern="1200" dirty="0" err="1">
+                <a:solidFill>
+                  <a:schemeClr val="tx1"/>
+                </a:solidFill>
+                <a:latin typeface="+mn-lt"/>
+                <a:ea typeface="+mn-ea"/>
+                <a:cs typeface="+mn-cs"/>
+              </a:rPr>
+              <a:t>done</a:t>
+            </a:r>
+            <a:r>
+              <a:rPr lang="ru-RU" dirty="0"/>
+              <a:t>, которая расположена после обоих циклов. Таким образом мы аккуратно выходим из всей вложенной </a:t>
+            </a:r>
+            <a:r>
+              <a:rPr lang="ru-RU"/>
+              <a:t>структуры.</a:t>
+            </a:r>
+          </a:p>
+          <a:p>
+            <a:endParaRPr lang="ru-RU" dirty="0"/>
+          </a:p>
+          <a:p>
+            <a:r>
+              <a:rPr lang="ru-RU" dirty="0"/>
+              <a:t>Важно понимать, что </a:t>
+            </a:r>
+            <a:r>
+              <a:rPr lang="ru-RU" sz="1200" kern="1200" dirty="0" err="1">
+                <a:solidFill>
+                  <a:schemeClr val="tx1"/>
+                </a:solidFill>
+                <a:latin typeface="+mn-lt"/>
+                <a:ea typeface="+mn-ea"/>
+                <a:cs typeface="+mn-cs"/>
+              </a:rPr>
+              <a:t>goto</a:t>
+            </a:r>
+            <a:r>
+              <a:rPr lang="ru-RU" dirty="0"/>
+              <a:t> следует использовать осторожно. Он может ухудшить читаемость программы, если применяется без необходимости. Однако в некоторых ситуациях, например при выходе из нескольких вложенных циклов или при централизованной обработке ошибок, он может сделать код проще и понятнее, чем сложные цепочки флагов и условий.</a:t>
+            </a:r>
+          </a:p>
+          <a:p>
             <a:endParaRPr lang="en-US" dirty="0"/>
           </a:p>
         </p:txBody>
@@ -7145,7 +7692,7 @@
     </p:spTree>
     <p:extLst>
       <p:ext uri="{BB962C8B-B14F-4D97-AF65-F5344CB8AC3E}">
-        <p14:creationId xmlns:p14="http://schemas.microsoft.com/office/powerpoint/2010/main" val="2459482462"/>
+        <p14:creationId xmlns:p14="http://schemas.microsoft.com/office/powerpoint/2010/main" val="2695442122"/>
       </p:ext>
     </p:extLst>
   </p:cSld>
@@ -7429,11 +7976,7 @@
           <a:bodyPr/>
           <a:lstStyle/>
           <a:p>
-            <a:r>
-              <a:rPr lang="ru-RU" dirty="0"/>
-              <a:t>Массив можно инициализировать при объявлении, перечислив значения в фигурных скобках. Если количество элементов указано явно, компилятор проверит, что значений не больше, чем размер массива. Если размер не указан, компилятор сам определит его по числу элементов в списке инициализации. Это удобно, когда размер очевиден из данных.</a:t>
-            </a:r>
-            <a:endParaRPr lang="en-US" dirty="0"/>
+            <a:endParaRPr lang="en-US"/>
           </a:p>
         </p:txBody>
       </p:sp>
@@ -7463,7 +8006,7 @@
     </p:spTree>
     <p:extLst>
       <p:ext uri="{BB962C8B-B14F-4D97-AF65-F5344CB8AC3E}">
-        <p14:creationId xmlns:p14="http://schemas.microsoft.com/office/powerpoint/2010/main" val="1344983147"/>
+        <p14:creationId xmlns:p14="http://schemas.microsoft.com/office/powerpoint/2010/main" val="3923793219"/>
       </p:ext>
     </p:extLst>
   </p:cSld>
@@ -7519,112 +8062,35 @@
           <a:p>
             <a:r>
               <a:rPr lang="ru-RU" dirty="0"/>
-              <a:t>Оператор </a:t>
-            </a:r>
-            <a:r>
-              <a:rPr lang="ru-RU" sz="1200" kern="1200" dirty="0" err="1">
-                <a:solidFill>
-                  <a:schemeClr val="tx1"/>
-                </a:solidFill>
-                <a:latin typeface="+mn-lt"/>
-                <a:ea typeface="+mn-ea"/>
-                <a:cs typeface="+mn-cs"/>
-              </a:rPr>
-              <a:t>sizeof</a:t>
-            </a:r>
-            <a:r>
-              <a:rPr lang="ru-RU" dirty="0"/>
-              <a:t> позволяет узнать размер массива в байтах. Если массив содержит 10 элементов типа </a:t>
-            </a:r>
-            <a:r>
-              <a:rPr lang="ru-RU" sz="1200" kern="1200" dirty="0" err="1">
-                <a:solidFill>
-                  <a:schemeClr val="tx1"/>
-                </a:solidFill>
-                <a:latin typeface="+mn-lt"/>
-                <a:ea typeface="+mn-ea"/>
-                <a:cs typeface="+mn-cs"/>
-              </a:rPr>
-              <a:t>int</a:t>
-            </a:r>
-            <a:r>
-              <a:rPr lang="ru-RU" dirty="0"/>
-              <a:t>, результат будет равен </a:t>
-            </a:r>
-            <a:r>
-              <a:rPr lang="ru-RU" sz="1200" kern="1200" dirty="0">
-                <a:solidFill>
-                  <a:schemeClr val="tx1"/>
-                </a:solidFill>
-                <a:latin typeface="+mn-lt"/>
-                <a:ea typeface="+mn-ea"/>
-                <a:cs typeface="+mn-cs"/>
-              </a:rPr>
-              <a:t>10 * </a:t>
-            </a:r>
-            <a:r>
-              <a:rPr lang="ru-RU" sz="1200" kern="1200" dirty="0" err="1">
-                <a:solidFill>
-                  <a:schemeClr val="tx1"/>
-                </a:solidFill>
-                <a:latin typeface="+mn-lt"/>
-                <a:ea typeface="+mn-ea"/>
-                <a:cs typeface="+mn-cs"/>
-              </a:rPr>
-              <a:t>sizeof</a:t>
-            </a:r>
-            <a:r>
-              <a:rPr lang="ru-RU" sz="1200" kern="1200" dirty="0">
-                <a:solidFill>
-                  <a:schemeClr val="tx1"/>
-                </a:solidFill>
-                <a:latin typeface="+mn-lt"/>
-                <a:ea typeface="+mn-ea"/>
-                <a:cs typeface="+mn-cs"/>
-              </a:rPr>
-              <a:t>(</a:t>
-            </a:r>
-            <a:r>
-              <a:rPr lang="ru-RU" sz="1200" kern="1200" dirty="0" err="1">
-                <a:solidFill>
-                  <a:schemeClr val="tx1"/>
-                </a:solidFill>
-                <a:latin typeface="+mn-lt"/>
-                <a:ea typeface="+mn-ea"/>
-                <a:cs typeface="+mn-cs"/>
-              </a:rPr>
-              <a:t>int</a:t>
-            </a:r>
-            <a:r>
-              <a:rPr lang="ru-RU" sz="1200" kern="1200" dirty="0">
-                <a:solidFill>
-                  <a:schemeClr val="tx1"/>
-                </a:solidFill>
-                <a:latin typeface="+mn-lt"/>
-                <a:ea typeface="+mn-ea"/>
-                <a:cs typeface="+mn-cs"/>
-              </a:rPr>
-              <a:t>)</a:t>
-            </a:r>
-            <a:r>
-              <a:rPr lang="ru-RU" dirty="0"/>
-              <a:t>. Чтобы узнать количество элементов, можно разделить общий размер массива на размер одного элемента. Это полезный приём, когда размер массива известен компилятору. Важно понимать, что здесь </a:t>
-            </a:r>
-            <a:r>
-              <a:rPr lang="ru-RU" sz="1200" kern="1200" dirty="0" err="1">
-                <a:solidFill>
-                  <a:schemeClr val="tx1"/>
-                </a:solidFill>
-                <a:latin typeface="+mn-lt"/>
-                <a:ea typeface="+mn-ea"/>
-                <a:cs typeface="+mn-cs"/>
-              </a:rPr>
-              <a:t>sizeof</a:t>
-            </a:r>
-            <a:r>
-              <a:rPr lang="ru-RU" dirty="0"/>
-              <a:t> работает именно с самим массивом, а не с указателем — к указателям мы вернёмся позже.</a:t>
-            </a:r>
+              <a:t>До сих пор мы работали с отдельными переменными. Но если нам нужно хранить десять, сто или тысячу чисел одного типа, объявлять каждую переменную отдельно неудобно и непрактично. Для этого существует массив.</a:t>
+            </a:r>
+            <a:endParaRPr lang="en-US" dirty="0"/>
+          </a:p>
+          <a:p>
+            <a:endParaRPr lang="en-US" b="1" dirty="0"/>
+          </a:p>
+          <a:p>
+            <a:r>
+              <a:rPr lang="ru-RU" b="1" dirty="0"/>
+              <a:t>Массив — это фиксированная последовательность элементов одного типа</a:t>
+            </a:r>
+            <a:r>
+              <a:rPr lang="ru-RU" dirty="0"/>
+              <a:t>, расположенных подряд в памяти. Он позволяет обращаться к данным по индексу, а не по имени каждой переменной. Это делает программы компактнее и </a:t>
+            </a:r>
+            <a:r>
+              <a:rPr lang="ru-RU" dirty="0" err="1"/>
+              <a:t>структурированнее</a:t>
+            </a:r>
+            <a:r>
+              <a:rPr lang="ru-RU" dirty="0"/>
+              <a:t>.</a:t>
+            </a:r>
+          </a:p>
+          <a:p>
+            <a:br>
+              <a:rPr lang="ru-RU" dirty="0"/>
+            </a:br>
             <a:endParaRPr lang="en-US" dirty="0"/>
           </a:p>
         </p:txBody>
@@ -7655,7 +8121,7 @@
     </p:spTree>
     <p:extLst>
       <p:ext uri="{BB962C8B-B14F-4D97-AF65-F5344CB8AC3E}">
-        <p14:creationId xmlns:p14="http://schemas.microsoft.com/office/powerpoint/2010/main" val="1745266316"/>
+        <p14:creationId xmlns:p14="http://schemas.microsoft.com/office/powerpoint/2010/main" val="3945570933"/>
       </p:ext>
     </p:extLst>
   </p:cSld>
@@ -7711,15 +8177,15 @@
           <a:p>
             <a:r>
               <a:rPr lang="ru-RU" dirty="0"/>
-              <a:t>Статический массив имеет </a:t>
+              <a:t>Массив объявляется указанием типа, имени и размера в квадратных скобках. Число в скобках — это </a:t>
             </a:r>
             <a:r>
               <a:rPr lang="ru-RU" b="1" dirty="0"/>
-              <a:t>фиксированный размер</a:t>
-            </a:r>
-            <a:r>
-              <a:rPr lang="ru-RU" dirty="0"/>
-              <a:t>, который определяется на этапе компиляции. Это означает, что компилятор заранее выделяет под него определённую область памяти, и после запуска программы этот размер изменить нельзя. Если вы объявили </a:t>
+              <a:t>количество элементов</a:t>
+            </a:r>
+            <a:r>
+              <a:rPr lang="ru-RU" dirty="0"/>
+              <a:t>, а не последний индекс. Если массив объявлен как </a:t>
             </a:r>
             <a:r>
               <a:rPr lang="ru-RU" sz="1200" kern="1200" dirty="0" err="1">
@@ -7741,87 +8207,13 @@
                 <a:ea typeface="+mn-ea"/>
                 <a:cs typeface="+mn-cs"/>
               </a:rPr>
-              <a:t> a[10];</a:t>
-            </a:r>
-            <a:r>
-              <a:rPr lang="ru-RU" dirty="0"/>
-              <a:t>, то элементов всегда будет ровно десять — ни больше, ни меньше. Поэтому количество элементов должно быть известно заранее, ещё до выполнения программы.</a:t>
-            </a:r>
-          </a:p>
-          <a:p>
-            <a:endParaRPr lang="ru-RU" dirty="0"/>
-          </a:p>
-          <a:p>
-            <a:r>
-              <a:rPr lang="ru-RU" dirty="0"/>
-              <a:t>Второе важное ограничение связано с индексами. Допустимые индексы лежат в диапазоне от 0 до </a:t>
-            </a:r>
-            <a:r>
-              <a:rPr lang="ru-RU" sz="1200" kern="1200" dirty="0" err="1">
-                <a:solidFill>
-                  <a:schemeClr val="tx1"/>
-                </a:solidFill>
-                <a:latin typeface="+mn-lt"/>
-                <a:ea typeface="+mn-ea"/>
-                <a:cs typeface="+mn-cs"/>
-              </a:rPr>
-              <a:t>size</a:t>
-            </a:r>
-            <a:r>
-              <a:rPr lang="ru-RU" sz="1200" kern="1200" dirty="0">
-                <a:solidFill>
-                  <a:schemeClr val="tx1"/>
-                </a:solidFill>
-                <a:latin typeface="+mn-lt"/>
-                <a:ea typeface="+mn-ea"/>
-                <a:cs typeface="+mn-cs"/>
-              </a:rPr>
-              <a:t> - 1</a:t>
-            </a:r>
-            <a:r>
-              <a:rPr lang="ru-RU" dirty="0"/>
-              <a:t>. Язык C </a:t>
-            </a:r>
-            <a:r>
-              <a:rPr lang="ru-RU" b="1" dirty="0"/>
-              <a:t>не выполняет автоматическую проверку выхода за границы массива</a:t>
-            </a:r>
-            <a:r>
-              <a:rPr lang="ru-RU" dirty="0"/>
-              <a:t>. Если обратиться к </a:t>
-            </a:r>
-            <a:r>
-              <a:rPr lang="ru-RU" sz="1200" kern="1200" dirty="0">
-                <a:solidFill>
-                  <a:schemeClr val="tx1"/>
-                </a:solidFill>
-                <a:latin typeface="+mn-lt"/>
-                <a:ea typeface="+mn-ea"/>
-                <a:cs typeface="+mn-cs"/>
-              </a:rPr>
-              <a:t>a[10]</a:t>
-            </a:r>
-            <a:r>
-              <a:rPr lang="ru-RU" dirty="0"/>
-              <a:t> в массиве из десяти элементов, компилятор этого не запретит, и программа может продолжить работу, но поведение будет некорректным. Это может привести к повреждению данных или непредсказуемым ошибкам.</a:t>
-            </a:r>
-          </a:p>
-          <a:p>
-            <a:endParaRPr lang="ru-RU" dirty="0"/>
-          </a:p>
-          <a:p>
-            <a:r>
-              <a:rPr lang="ru-RU" dirty="0"/>
-              <a:t>Таким образом, статический массив — это просто </a:t>
-            </a:r>
-            <a:r>
-              <a:rPr lang="ru-RU" b="1" dirty="0"/>
-              <a:t>фиксированная непрерывная область памяти</a:t>
-            </a:r>
-            <a:r>
-              <a:rPr lang="ru-RU" dirty="0"/>
-              <a:t>, и ответственность за корректную работу с этой областью полностью лежит на программисте. Именно поэтому так важно аккуратно контролировать диапазоны индексов и использовать циклы с правильно заданными условиями.</a:t>
-            </a:r>
+              <a:t> a[10]</a:t>
+            </a:r>
+            <a:r>
+              <a:rPr lang="ru-RU" dirty="0"/>
+              <a:t>, допустимые индексы — от 0 до 9. В языке C индексация начинается с нуля. Это важная особенность, к которой нужно привыкнуть. Размер массива должен быть известен во время компиляции, если речь идёт о статическом массиве.</a:t>
+            </a:r>
+            <a:endParaRPr lang="en-US" dirty="0"/>
           </a:p>
         </p:txBody>
       </p:sp>
@@ -7851,7 +8243,7 @@
     </p:spTree>
     <p:extLst>
       <p:ext uri="{BB962C8B-B14F-4D97-AF65-F5344CB8AC3E}">
-        <p14:creationId xmlns:p14="http://schemas.microsoft.com/office/powerpoint/2010/main" val="3176073212"/>
+        <p14:creationId xmlns:p14="http://schemas.microsoft.com/office/powerpoint/2010/main" val="3404030083"/>
       </p:ext>
     </p:extLst>
   </p:cSld>
@@ -7907,18 +8299,10 @@
           <a:p>
             <a:r>
               <a:rPr lang="ru-RU" dirty="0"/>
-              <a:t>Итак, массив — это </a:t>
-            </a:r>
-            <a:r>
-              <a:rPr lang="ru-RU" b="1" dirty="0"/>
-              <a:t>непрерывная последовательность элементов одного типа</a:t>
-            </a:r>
-            <a:r>
-              <a:rPr lang="ru-RU" dirty="0"/>
-              <a:t>, доступ к которым осуществляется по индексу. Размер статического массива фиксирован и известен компилятору. Индексация начинается с нуля, и за корректность индексов отвечает программист. В сочетании с циклом </a:t>
-            </a:r>
-            <a:r>
-              <a:rPr lang="ru-RU" sz="1200" kern="1200" dirty="0" err="1">
+              <a:t>К элементам массива обращаются с помощью индекса в квадратных скобках. Индекс — это выражение целого типа, поэтому можно писать не только число, но и переменную или арифметическое выражение. Например, </a:t>
+            </a:r>
+            <a:r>
+              <a:rPr lang="ru-RU" sz="1200" kern="1200" dirty="0">
                 <a:solidFill>
                   <a:schemeClr val="tx1"/>
                 </a:solidFill>
@@ -7926,11 +8310,19 @@
                 <a:ea typeface="+mn-ea"/>
                 <a:cs typeface="+mn-cs"/>
               </a:rPr>
-              <a:t>for</a:t>
-            </a:r>
-            <a:r>
-              <a:rPr lang="ru-RU" dirty="0"/>
-              <a:t> массив становится мощным инструментом для обработки наборов данных.</a:t>
+              <a:t>a[i]</a:t>
+            </a:r>
+            <a:r>
+              <a:rPr lang="ru-RU" dirty="0"/>
+              <a:t> означает «элемент с номером i». Важно помнить, что </a:t>
+            </a:r>
+            <a:r>
+              <a:rPr lang="ru-RU" b="1" dirty="0"/>
+              <a:t>индекс должен попадать в допустимый диапазон</a:t>
+            </a:r>
+            <a:r>
+              <a:rPr lang="ru-RU" dirty="0"/>
+              <a:t>, иначе программа будет работать некорректно. Пока мы просто будем считать, что индексы всегда корректны.</a:t>
             </a:r>
             <a:endParaRPr lang="en-US" dirty="0"/>
           </a:p>
@@ -7962,7 +8354,7 @@
     </p:spTree>
     <p:extLst>
       <p:ext uri="{BB962C8B-B14F-4D97-AF65-F5344CB8AC3E}">
-        <p14:creationId xmlns:p14="http://schemas.microsoft.com/office/powerpoint/2010/main" val="1788956741"/>
+        <p14:creationId xmlns:p14="http://schemas.microsoft.com/office/powerpoint/2010/main" val="2459482462"/>
       </p:ext>
     </p:extLst>
   </p:cSld>
@@ -8018,146 +8410,8 @@
           <a:p>
             <a:r>
               <a:rPr lang="ru-RU" dirty="0"/>
-              <a:t>До сих пор мы рассматривали одномерные массивы — по сути, линейные последовательности элементов. Но во многих задачах данные естественно организованы в виде таблицы: строки и столбцы. Например, матрица чисел, игровое поле или таблица значений. Для этого используются двумерные массивы.</a:t>
-            </a:r>
-          </a:p>
-          <a:p>
-            <a:endParaRPr lang="ru-RU" dirty="0"/>
-          </a:p>
-          <a:p>
-            <a:r>
-              <a:rPr lang="ru-RU" dirty="0"/>
-              <a:t>Запись </a:t>
-            </a:r>
-            <a:r>
-              <a:rPr lang="ru-RU" sz="1200" kern="1200" dirty="0" err="1">
-                <a:solidFill>
-                  <a:schemeClr val="tx1"/>
-                </a:solidFill>
-                <a:latin typeface="+mn-lt"/>
-                <a:ea typeface="+mn-ea"/>
-                <a:cs typeface="+mn-cs"/>
-              </a:rPr>
-              <a:t>int</a:t>
-            </a:r>
-            <a:r>
-              <a:rPr lang="ru-RU" sz="1200" kern="1200" dirty="0">
-                <a:solidFill>
-                  <a:schemeClr val="tx1"/>
-                </a:solidFill>
-                <a:latin typeface="+mn-lt"/>
-                <a:ea typeface="+mn-ea"/>
-                <a:cs typeface="+mn-cs"/>
-              </a:rPr>
-              <a:t> a[3][4];</a:t>
-            </a:r>
-            <a:r>
-              <a:rPr lang="ru-RU" dirty="0"/>
-              <a:t> означает, что мы объявляем массив из трёх элементов, каждый из которых сам является массивом из четырёх </a:t>
-            </a:r>
-            <a:r>
-              <a:rPr lang="ru-RU" sz="1200" kern="1200" dirty="0" err="1">
-                <a:solidFill>
-                  <a:schemeClr val="tx1"/>
-                </a:solidFill>
-                <a:latin typeface="+mn-lt"/>
-                <a:ea typeface="+mn-ea"/>
-                <a:cs typeface="+mn-cs"/>
-              </a:rPr>
-              <a:t>int</a:t>
-            </a:r>
-            <a:r>
-              <a:rPr lang="ru-RU" dirty="0"/>
-              <a:t>. Иначе говоря, это </a:t>
-            </a:r>
-            <a:r>
-              <a:rPr lang="ru-RU" b="1" dirty="0"/>
-              <a:t>три строки по четыре элемента в каждой</a:t>
-            </a:r>
-            <a:r>
-              <a:rPr lang="ru-RU" dirty="0"/>
-              <a:t>. Общее количество элементов равно произведению размеров: </a:t>
-            </a:r>
-            <a:r>
-              <a:rPr lang="ru-RU" sz="1200" kern="1200" dirty="0">
-                <a:solidFill>
-                  <a:schemeClr val="tx1"/>
-                </a:solidFill>
-                <a:latin typeface="+mn-lt"/>
-                <a:ea typeface="+mn-ea"/>
-                <a:cs typeface="+mn-cs"/>
-              </a:rPr>
-              <a:t>3 * 4 = 12</a:t>
-            </a:r>
-            <a:r>
-              <a:rPr lang="ru-RU" dirty="0"/>
-              <a:t>.</a:t>
-            </a:r>
-          </a:p>
-          <a:p>
-            <a:endParaRPr lang="ru-RU" dirty="0"/>
-          </a:p>
-          <a:p>
-            <a:r>
-              <a:rPr lang="ru-RU" dirty="0"/>
-              <a:t>Обращение к элементу происходит через два индекса: </a:t>
-            </a:r>
-            <a:r>
-              <a:rPr lang="ru-RU" sz="1200" kern="1200" dirty="0">
-                <a:solidFill>
-                  <a:schemeClr val="tx1"/>
-                </a:solidFill>
-                <a:latin typeface="+mn-lt"/>
-                <a:ea typeface="+mn-ea"/>
-                <a:cs typeface="+mn-cs"/>
-              </a:rPr>
-              <a:t>a[i][j]</a:t>
-            </a:r>
-            <a:r>
-              <a:rPr lang="ru-RU" dirty="0"/>
-              <a:t>. Первый индекс выбирает строку, второй — элемент внутри строки. Как и в одномерном массиве, индексация начинается с нуля, поэтому допустимые значения индексов в этом примере — </a:t>
-            </a:r>
-            <a:r>
-              <a:rPr lang="ru-RU" sz="1200" kern="1200" dirty="0">
-                <a:solidFill>
-                  <a:schemeClr val="tx1"/>
-                </a:solidFill>
-                <a:latin typeface="+mn-lt"/>
-                <a:ea typeface="+mn-ea"/>
-                <a:cs typeface="+mn-cs"/>
-              </a:rPr>
-              <a:t>i</a:t>
-            </a:r>
-            <a:r>
-              <a:rPr lang="ru-RU" dirty="0"/>
-              <a:t> от 0 до 2 и </a:t>
-            </a:r>
-            <a:r>
-              <a:rPr lang="ru-RU" sz="1200" kern="1200" dirty="0">
-                <a:solidFill>
-                  <a:schemeClr val="tx1"/>
-                </a:solidFill>
-                <a:latin typeface="+mn-lt"/>
-                <a:ea typeface="+mn-ea"/>
-                <a:cs typeface="+mn-cs"/>
-              </a:rPr>
-              <a:t>j</a:t>
-            </a:r>
-            <a:r>
-              <a:rPr lang="ru-RU" dirty="0"/>
-              <a:t> от 0 до 3.</a:t>
-            </a:r>
-          </a:p>
-          <a:p>
-            <a:endParaRPr lang="ru-RU" dirty="0"/>
-          </a:p>
-          <a:p>
-            <a:r>
-              <a:rPr lang="ru-RU" dirty="0"/>
-              <a:t>Важно понимать, что двумерный массив — это не какая-то особая структура данных, а просто более сложная форма массива. Позже мы увидим, что в памяти он по-прежнему хранится линейно, а два индекса — это лишь удобный способ обращения к элементам.</a:t>
-            </a:r>
-          </a:p>
-          <a:p>
+              <a:t>Массив можно инициализировать при объявлении, перечислив значения в фигурных скобках. Если количество элементов указано явно, компилятор проверит, что значений не больше, чем размер массива. Если размер не указан, компилятор сам определит его по числу элементов в списке инициализации. Это удобно, когда размер очевиден из данных.</a:t>
+            </a:r>
             <a:endParaRPr lang="en-US" dirty="0"/>
           </a:p>
         </p:txBody>
@@ -8188,7 +8442,7 @@
     </p:spTree>
     <p:extLst>
       <p:ext uri="{BB962C8B-B14F-4D97-AF65-F5344CB8AC3E}">
-        <p14:creationId xmlns:p14="http://schemas.microsoft.com/office/powerpoint/2010/main" val="3367974056"/>
+        <p14:creationId xmlns:p14="http://schemas.microsoft.com/office/powerpoint/2010/main" val="1344983147"/>
       </p:ext>
     </p:extLst>
   </p:cSld>
@@ -8244,7 +8498,111 @@
           <a:p>
             <a:r>
               <a:rPr lang="ru-RU" dirty="0"/>
-              <a:t>Двумерный массив можно инициализировать с помощью вложенных фигурных скобок, что делает структуру таблицы наглядной. Каждая внутренняя группа соответствует строке массива. Однако с точки зрения компилятора это просто последовательность значений, расположенных подряд в памяти. Поэтому допускается и плоская запись без внутренних скобок. Это ещё раз подчёркивает, что в памяти элементы идут непрерывно.</a:t>
+              <a:t>Оператор </a:t>
+            </a:r>
+            <a:r>
+              <a:rPr lang="ru-RU" sz="1200" kern="1200" dirty="0" err="1">
+                <a:solidFill>
+                  <a:schemeClr val="tx1"/>
+                </a:solidFill>
+                <a:latin typeface="+mn-lt"/>
+                <a:ea typeface="+mn-ea"/>
+                <a:cs typeface="+mn-cs"/>
+              </a:rPr>
+              <a:t>sizeof</a:t>
+            </a:r>
+            <a:r>
+              <a:rPr lang="ru-RU" dirty="0"/>
+              <a:t> позволяет узнать размер массива в байтах. Если массив содержит 10 элементов типа </a:t>
+            </a:r>
+            <a:r>
+              <a:rPr lang="ru-RU" sz="1200" kern="1200" dirty="0" err="1">
+                <a:solidFill>
+                  <a:schemeClr val="tx1"/>
+                </a:solidFill>
+                <a:latin typeface="+mn-lt"/>
+                <a:ea typeface="+mn-ea"/>
+                <a:cs typeface="+mn-cs"/>
+              </a:rPr>
+              <a:t>int</a:t>
+            </a:r>
+            <a:r>
+              <a:rPr lang="ru-RU" dirty="0"/>
+              <a:t>, результат будет равен </a:t>
+            </a:r>
+            <a:r>
+              <a:rPr lang="ru-RU" sz="1200" kern="1200" dirty="0">
+                <a:solidFill>
+                  <a:schemeClr val="tx1"/>
+                </a:solidFill>
+                <a:latin typeface="+mn-lt"/>
+                <a:ea typeface="+mn-ea"/>
+                <a:cs typeface="+mn-cs"/>
+              </a:rPr>
+              <a:t>10 * </a:t>
+            </a:r>
+            <a:r>
+              <a:rPr lang="ru-RU" sz="1200" kern="1200" dirty="0" err="1">
+                <a:solidFill>
+                  <a:schemeClr val="tx1"/>
+                </a:solidFill>
+                <a:latin typeface="+mn-lt"/>
+                <a:ea typeface="+mn-ea"/>
+                <a:cs typeface="+mn-cs"/>
+              </a:rPr>
+              <a:t>sizeof</a:t>
+            </a:r>
+            <a:r>
+              <a:rPr lang="ru-RU" sz="1200" kern="1200" dirty="0">
+                <a:solidFill>
+                  <a:schemeClr val="tx1"/>
+                </a:solidFill>
+                <a:latin typeface="+mn-lt"/>
+                <a:ea typeface="+mn-ea"/>
+                <a:cs typeface="+mn-cs"/>
+              </a:rPr>
+              <a:t>(</a:t>
+            </a:r>
+            <a:r>
+              <a:rPr lang="ru-RU" sz="1200" kern="1200" dirty="0" err="1">
+                <a:solidFill>
+                  <a:schemeClr val="tx1"/>
+                </a:solidFill>
+                <a:latin typeface="+mn-lt"/>
+                <a:ea typeface="+mn-ea"/>
+                <a:cs typeface="+mn-cs"/>
+              </a:rPr>
+              <a:t>int</a:t>
+            </a:r>
+            <a:r>
+              <a:rPr lang="ru-RU" sz="1200" kern="1200" dirty="0">
+                <a:solidFill>
+                  <a:schemeClr val="tx1"/>
+                </a:solidFill>
+                <a:latin typeface="+mn-lt"/>
+                <a:ea typeface="+mn-ea"/>
+                <a:cs typeface="+mn-cs"/>
+              </a:rPr>
+              <a:t>)</a:t>
+            </a:r>
+            <a:r>
+              <a:rPr lang="ru-RU" dirty="0"/>
+              <a:t>. Чтобы узнать количество элементов, можно разделить общий размер массива на размер одного элемента. Это полезный приём, когда размер массива известен компилятору. Важно понимать, что здесь </a:t>
+            </a:r>
+            <a:r>
+              <a:rPr lang="ru-RU" sz="1200" kern="1200" dirty="0" err="1">
+                <a:solidFill>
+                  <a:schemeClr val="tx1"/>
+                </a:solidFill>
+                <a:latin typeface="+mn-lt"/>
+                <a:ea typeface="+mn-ea"/>
+                <a:cs typeface="+mn-cs"/>
+              </a:rPr>
+              <a:t>sizeof</a:t>
+            </a:r>
+            <a:r>
+              <a:rPr lang="ru-RU" dirty="0"/>
+              <a:t> работает именно с самим массивом, а не с указателем — к указателям мы вернёмся позже.</a:t>
             </a:r>
             <a:endParaRPr lang="en-US" dirty="0"/>
           </a:p>
@@ -8276,7 +8634,7 @@
     </p:spTree>
     <p:extLst>
       <p:ext uri="{BB962C8B-B14F-4D97-AF65-F5344CB8AC3E}">
-        <p14:creationId xmlns:p14="http://schemas.microsoft.com/office/powerpoint/2010/main" val="367197306"/>
+        <p14:creationId xmlns:p14="http://schemas.microsoft.com/office/powerpoint/2010/main" val="1745266316"/>
       </p:ext>
     </p:extLst>
   </p:cSld>
@@ -8332,18 +8690,18 @@
           <a:p>
             <a:r>
               <a:rPr lang="ru-RU" dirty="0"/>
-              <a:t>Для обработки двумерного массива обычно используются </a:t>
+              <a:t>Статический массив имеет </a:t>
             </a:r>
             <a:r>
               <a:rPr lang="ru-RU" b="1" dirty="0"/>
-              <a:t>вложенные циклы</a:t>
-            </a:r>
-            <a:r>
-              <a:rPr lang="ru-RU" dirty="0"/>
-              <a:t>. Внешний цикл отвечает за перебор строк, а внутренний — за перебор элементов внутри каждой строки. В данном примере переменная </a:t>
-            </a:r>
-            <a:r>
-              <a:rPr lang="ru-RU" sz="1200" kern="1200" dirty="0">
+              <a:t>фиксированный размер</a:t>
+            </a:r>
+            <a:r>
+              <a:rPr lang="ru-RU" dirty="0"/>
+              <a:t>, который определяется на этапе компиляции. Это означает, что компилятор заранее выделяет под него определённую область памяти, и после запуска программы этот размер изменить нельзя. Если вы объявили </a:t>
+            </a:r>
+            <a:r>
+              <a:rPr lang="ru-RU" sz="1200" kern="1200" dirty="0" err="1">
                 <a:solidFill>
                   <a:schemeClr val="tx1"/>
                 </a:solidFill>
@@ -8351,11 +8709,7 @@
                 <a:ea typeface="+mn-ea"/>
                 <a:cs typeface="+mn-cs"/>
               </a:rPr>
-              <a:t>i</a:t>
-            </a:r>
-            <a:r>
-              <a:rPr lang="ru-RU" dirty="0"/>
-              <a:t> принимает значения от 0 до 2 и выбирает строку массива, а переменная </a:t>
+              <a:t>int</a:t>
             </a:r>
             <a:r>
               <a:rPr lang="ru-RU" sz="1200" kern="1200" dirty="0">
@@ -8366,11 +8720,11 @@
                 <a:ea typeface="+mn-ea"/>
                 <a:cs typeface="+mn-cs"/>
               </a:rPr>
-              <a:t>j</a:t>
-            </a:r>
-            <a:r>
-              <a:rPr lang="ru-RU" dirty="0"/>
-              <a:t> принимает значения от 0 до 3 и выбирает элемент внутри строки.</a:t>
+              <a:t> a[10];</a:t>
+            </a:r>
+            <a:r>
+              <a:rPr lang="ru-RU" dirty="0"/>
+              <a:t>, то элементов всегда будет ровно десять — ни больше, ни меньше. Поэтому количество элементов должно быть известно заранее, ещё до выполнения программы.</a:t>
             </a:r>
           </a:p>
           <a:p>
@@ -8379,10 +8733,10 @@
           <a:p>
             <a:r>
               <a:rPr lang="ru-RU" dirty="0"/>
-              <a:t>На каждой итерации внутреннего цикла мы обращаемся к элементу </a:t>
-            </a:r>
-            <a:r>
-              <a:rPr lang="ru-RU" sz="1200" kern="1200" dirty="0">
+              <a:t>Второе важное ограничение связано с индексами. Допустимые индексы лежат в диапазоне от 0 до </a:t>
+            </a:r>
+            <a:r>
+              <a:rPr lang="ru-RU" sz="1200" kern="1200" dirty="0" err="1">
                 <a:solidFill>
                   <a:schemeClr val="tx1"/>
                 </a:solidFill>
@@ -8390,23 +8744,10 @@
                 <a:ea typeface="+mn-ea"/>
                 <a:cs typeface="+mn-cs"/>
               </a:rPr>
-              <a:t>a[i][j]</a:t>
-            </a:r>
-            <a:r>
-              <a:rPr lang="ru-RU" dirty="0"/>
-              <a:t> и выводим его. Когда внутренний цикл завершается, мы печатаем перевод строки, чтобы перейти к следующей строке таблицы. Таким образом структура вложенных циклов естественно отражает структуру данных: строка за строкой, элемент за элементом.</a:t>
-            </a:r>
-          </a:p>
-          <a:p>
-            <a:endParaRPr lang="ru-RU" dirty="0"/>
-          </a:p>
-          <a:p>
-            <a:r>
-              <a:rPr lang="ru-RU" dirty="0"/>
-              <a:t>Важно, чтобы границы циклов точно соответствовали размерам массива. Если размеры изменятся, их нужно изменить и в условиях циклов. Именно поэтому на практике часто используют константы или вычисляют размеры через </a:t>
-            </a:r>
-            <a:r>
-              <a:rPr lang="ru-RU" sz="1200" kern="1200" dirty="0" err="1">
+              <a:t>size</a:t>
+            </a:r>
+            <a:r>
+              <a:rPr lang="ru-RU" sz="1200" kern="1200" dirty="0">
                 <a:solidFill>
                   <a:schemeClr val="tx1"/>
                 </a:solidFill>
@@ -8414,15 +8755,52 @@
                 <a:ea typeface="+mn-ea"/>
                 <a:cs typeface="+mn-cs"/>
               </a:rPr>
-              <a:t>sizeof</a:t>
-            </a:r>
-            <a:r>
-              <a:rPr lang="ru-RU" dirty="0"/>
-              <a:t>, чтобы избежать ошибок.</a:t>
-            </a:r>
-          </a:p>
-          <a:p>
-            <a:endParaRPr lang="en-US" dirty="0"/>
+              <a:t> - 1</a:t>
+            </a:r>
+            <a:r>
+              <a:rPr lang="ru-RU" dirty="0"/>
+              <a:t>. Язык C </a:t>
+            </a:r>
+            <a:r>
+              <a:rPr lang="ru-RU" b="1" dirty="0"/>
+              <a:t>не выполняет автоматическую проверку выхода за границы массива</a:t>
+            </a:r>
+            <a:r>
+              <a:rPr lang="ru-RU" dirty="0"/>
+              <a:t>. Если обратиться к </a:t>
+            </a:r>
+            <a:r>
+              <a:rPr lang="ru-RU" sz="1200" kern="1200" dirty="0">
+                <a:solidFill>
+                  <a:schemeClr val="tx1"/>
+                </a:solidFill>
+                <a:latin typeface="+mn-lt"/>
+                <a:ea typeface="+mn-ea"/>
+                <a:cs typeface="+mn-cs"/>
+              </a:rPr>
+              <a:t>a[10]</a:t>
+            </a:r>
+            <a:r>
+              <a:rPr lang="ru-RU" dirty="0"/>
+              <a:t> в массиве из десяти элементов, компилятор этого не запретит, и программа может продолжить работу, но поведение будет некорректным. Это может привести к повреждению данных или непредсказуемым ошибкам.</a:t>
+            </a:r>
+          </a:p>
+          <a:p>
+            <a:endParaRPr lang="ru-RU" dirty="0"/>
+          </a:p>
+          <a:p>
+            <a:r>
+              <a:rPr lang="ru-RU" dirty="0"/>
+              <a:t>Таким образом, статический массив — это просто </a:t>
+            </a:r>
+            <a:r>
+              <a:rPr lang="ru-RU" b="1" dirty="0"/>
+              <a:t>фиксированная непрерывная область памяти</a:t>
+            </a:r>
+            <a:r>
+              <a:rPr lang="ru-RU" dirty="0"/>
+              <a:t>, и ответственность за корректную работу с этой областью полностью лежит на программисте. Именно поэтому так важно аккуратно контролировать диапазоны индексов и использовать циклы с правильно заданными условиями.</a:t>
+            </a:r>
           </a:p>
         </p:txBody>
       </p:sp>
@@ -8452,7 +8830,7 @@
     </p:spTree>
     <p:extLst>
       <p:ext uri="{BB962C8B-B14F-4D97-AF65-F5344CB8AC3E}">
-        <p14:creationId xmlns:p14="http://schemas.microsoft.com/office/powerpoint/2010/main" val="2485566618"/>
+        <p14:creationId xmlns:p14="http://schemas.microsoft.com/office/powerpoint/2010/main" val="3176073212"/>
       </p:ext>
     </p:extLst>
   </p:cSld>
@@ -8508,10 +8886,18 @@
           <a:p>
             <a:r>
               <a:rPr lang="ru-RU" dirty="0"/>
-              <a:t>Здесь показан простой, но реалистичный пример использования двумерного массива — вычисление суммы всех элементов матрицы. Мы объявляем массив </a:t>
-            </a:r>
-            <a:r>
-              <a:rPr lang="ru-RU" sz="1200" kern="1200" dirty="0">
+              <a:t>Итак, массив — это </a:t>
+            </a:r>
+            <a:r>
+              <a:rPr lang="ru-RU" b="1" dirty="0"/>
+              <a:t>непрерывная последовательность элементов одного типа</a:t>
+            </a:r>
+            <a:r>
+              <a:rPr lang="ru-RU" dirty="0"/>
+              <a:t>, доступ к которым осуществляется по индексу. Размер статического массива фиксирован и известен компилятору. Индексация начинается с нуля, и за корректность индексов отвечает программист. В сочетании с циклом </a:t>
+            </a:r>
+            <a:r>
+              <a:rPr lang="ru-RU" sz="1200" kern="1200" dirty="0" err="1">
                 <a:solidFill>
                   <a:schemeClr val="tx1"/>
                 </a:solidFill>
@@ -8519,72 +8905,12 @@
                 <a:ea typeface="+mn-ea"/>
                 <a:cs typeface="+mn-cs"/>
               </a:rPr>
-              <a:t>a[3][4]</a:t>
-            </a:r>
-            <a:r>
-              <a:rPr lang="ru-RU" dirty="0"/>
-              <a:t> и инициализируем его значениями, организованными по строкам. Затем вводим переменную </a:t>
-            </a:r>
-            <a:r>
-              <a:rPr lang="ru-RU" sz="1200" kern="1200" dirty="0" err="1">
-                <a:solidFill>
-                  <a:schemeClr val="tx1"/>
-                </a:solidFill>
-                <a:latin typeface="+mn-lt"/>
-                <a:ea typeface="+mn-ea"/>
-                <a:cs typeface="+mn-cs"/>
-              </a:rPr>
-              <a:t>sum</a:t>
-            </a:r>
-            <a:r>
-              <a:rPr lang="ru-RU" dirty="0"/>
-              <a:t>, в которую будем накапливать результат.</a:t>
-            </a:r>
-            <a:endParaRPr lang="en-US" dirty="0"/>
-          </a:p>
-          <a:p>
-            <a:endParaRPr lang="ru-RU" dirty="0"/>
-          </a:p>
-          <a:p>
-            <a:r>
-              <a:rPr lang="ru-RU" dirty="0"/>
-              <a:t>Далее используются вложенные циклы: внешний цикл перебирает строки, внутренний — элементы внутри каждой строки. На каждой итерации значение текущего элемента добавляется к переменной </a:t>
-            </a:r>
-            <a:r>
-              <a:rPr lang="ru-RU" sz="1200" kern="1200" dirty="0" err="1">
-                <a:solidFill>
-                  <a:schemeClr val="tx1"/>
-                </a:solidFill>
-                <a:latin typeface="+mn-lt"/>
-                <a:ea typeface="+mn-ea"/>
-                <a:cs typeface="+mn-cs"/>
-              </a:rPr>
-              <a:t>sum</a:t>
-            </a:r>
-            <a:r>
-              <a:rPr lang="ru-RU" dirty="0"/>
-              <a:t>. В конце программа выводит итоговую сумму.</a:t>
-            </a:r>
-            <a:endParaRPr lang="en-US" dirty="0"/>
-          </a:p>
-          <a:p>
-            <a:endParaRPr lang="ru-RU" dirty="0"/>
-          </a:p>
-          <a:p>
-            <a:r>
-              <a:rPr lang="ru-RU" dirty="0"/>
-              <a:t>Этот пример показывает типичный шаблон работы с таблицей данных: </a:t>
-            </a:r>
-            <a:r>
-              <a:rPr lang="ru-RU" b="1" dirty="0"/>
-              <a:t>вложенные циклы + доступ по двум индексам</a:t>
-            </a:r>
-            <a:r>
-              <a:rPr lang="ru-RU" dirty="0"/>
-              <a:t>. Именно так реализуются многие алгоритмы обработки матриц, изображений, игровых полей и других двумерных структур.</a:t>
-            </a:r>
-          </a:p>
-          <a:p>
+              <a:t>for</a:t>
+            </a:r>
+            <a:r>
+              <a:rPr lang="ru-RU" dirty="0"/>
+              <a:t> массив становится мощным инструментом для обработки наборов данных.</a:t>
+            </a:r>
             <a:endParaRPr lang="en-US" dirty="0"/>
           </a:p>
         </p:txBody>
@@ -8615,7 +8941,7 @@
     </p:spTree>
     <p:extLst>
       <p:ext uri="{BB962C8B-B14F-4D97-AF65-F5344CB8AC3E}">
-        <p14:creationId xmlns:p14="http://schemas.microsoft.com/office/powerpoint/2010/main" val="242019281"/>
+        <p14:creationId xmlns:p14="http://schemas.microsoft.com/office/powerpoint/2010/main" val="1788956741"/>
       </p:ext>
     </p:extLst>
   </p:cSld>
@@ -8671,26 +8997,19 @@
           <a:p>
             <a:r>
               <a:rPr lang="ru-RU" dirty="0"/>
-              <a:t>Важно понимать, что в памяти нет «настоящих таблиц». Двумерный массив — это одна непрерывная область памяти. Сначала идут все элементы первой строки, затем второй, затем третьей. Такой способ хранения называется построчным, или </a:t>
-            </a:r>
-            <a:r>
-              <a:rPr lang="ru-RU" dirty="0" err="1"/>
-              <a:t>row-major</a:t>
-            </a:r>
-            <a:r>
-              <a:rPr lang="ru-RU" dirty="0"/>
-              <a:t> </a:t>
-            </a:r>
-            <a:r>
-              <a:rPr lang="ru-RU" dirty="0" err="1"/>
-              <a:t>order</a:t>
-            </a:r>
-            <a:r>
-              <a:rPr lang="ru-RU" dirty="0"/>
-              <a:t>. Это означает, что элементы </a:t>
-            </a:r>
-            <a:r>
-              <a:rPr lang="ru-RU" sz="1200" kern="1200" dirty="0">
+              <a:t>До сих пор мы рассматривали одномерные массивы — по сути, линейные последовательности элементов. Но во многих задачах данные естественно организованы в виде таблицы: строки и столбцы. Например, матрица чисел, игровое поле или таблица значений. Для этого используются двумерные массивы.</a:t>
+            </a:r>
+          </a:p>
+          <a:p>
+            <a:endParaRPr lang="ru-RU" dirty="0"/>
+          </a:p>
+          <a:p>
+            <a:r>
+              <a:rPr lang="ru-RU" dirty="0"/>
+              <a:t>Запись </a:t>
+            </a:r>
+            <a:r>
+              <a:rPr lang="ru-RU" sz="1200" kern="1200" dirty="0" err="1">
                 <a:solidFill>
                   <a:schemeClr val="tx1"/>
                 </a:solidFill>
@@ -8698,11 +9017,7 @@
                 <a:ea typeface="+mn-ea"/>
                 <a:cs typeface="+mn-cs"/>
               </a:rPr>
-              <a:t>a[0][0]</a:t>
-            </a:r>
-            <a:r>
-              <a:rPr lang="ru-RU" dirty="0"/>
-              <a:t>, </a:t>
+              <a:t>int</a:t>
             </a:r>
             <a:r>
               <a:rPr lang="ru-RU" sz="1200" kern="1200" dirty="0">
@@ -8713,14 +9028,14 @@
                 <a:ea typeface="+mn-ea"/>
                 <a:cs typeface="+mn-cs"/>
               </a:rPr>
-              <a:t>a[0][1]</a:t>
-            </a:r>
-            <a:r>
-              <a:rPr lang="ru-RU" dirty="0"/>
-              <a:t>, </a:t>
-            </a:r>
-            <a:r>
-              <a:rPr lang="ru-RU" sz="1200" kern="1200" dirty="0">
+              <a:t> a[3][4];</a:t>
+            </a:r>
+            <a:r>
+              <a:rPr lang="ru-RU" dirty="0"/>
+              <a:t> означает, что мы объявляем массив из трёх элементов, каждый из которых сам является массивом из четырёх </a:t>
+            </a:r>
+            <a:r>
+              <a:rPr lang="ru-RU" sz="1200" kern="1200" dirty="0" err="1">
                 <a:solidFill>
                   <a:schemeClr val="tx1"/>
                 </a:solidFill>
@@ -8728,11 +9043,19 @@
                 <a:ea typeface="+mn-ea"/>
                 <a:cs typeface="+mn-cs"/>
               </a:rPr>
-              <a:t>a[0][2]</a:t>
-            </a:r>
-            <a:r>
-              <a:rPr lang="ru-RU" dirty="0"/>
-              <a:t>, </a:t>
+              <a:t>int</a:t>
+            </a:r>
+            <a:r>
+              <a:rPr lang="ru-RU" dirty="0"/>
+              <a:t>. Иначе говоря, это </a:t>
+            </a:r>
+            <a:r>
+              <a:rPr lang="ru-RU" b="1" dirty="0"/>
+              <a:t>три строки по четыре элемента в каждой</a:t>
+            </a:r>
+            <a:r>
+              <a:rPr lang="ru-RU" dirty="0"/>
+              <a:t>. Общее количество элементов равно произведению размеров: </a:t>
             </a:r>
             <a:r>
               <a:rPr lang="ru-RU" sz="1200" kern="1200" dirty="0">
@@ -8743,17 +9066,77 @@
                 <a:ea typeface="+mn-ea"/>
                 <a:cs typeface="+mn-cs"/>
               </a:rPr>
-              <a:t>a[0][3]</a:t>
-            </a:r>
-            <a:r>
-              <a:rPr lang="ru-RU" dirty="0"/>
-              <a:t> расположены подряд, затем сразу начинается следующая строка. Это знание станет особенно важным, когда мы будем говорить о работе с памятью и указателями.</a:t>
-            </a:r>
-          </a:p>
-          <a:p>
-            <a:br>
-              <a:rPr lang="ru-RU" dirty="0"/>
-            </a:br>
+              <a:t>3 * 4 = 12</a:t>
+            </a:r>
+            <a:r>
+              <a:rPr lang="ru-RU" dirty="0"/>
+              <a:t>.</a:t>
+            </a:r>
+          </a:p>
+          <a:p>
+            <a:endParaRPr lang="ru-RU" dirty="0"/>
+          </a:p>
+          <a:p>
+            <a:r>
+              <a:rPr lang="ru-RU" dirty="0"/>
+              <a:t>Обращение к элементу происходит через два индекса: </a:t>
+            </a:r>
+            <a:r>
+              <a:rPr lang="ru-RU" sz="1200" kern="1200" dirty="0">
+                <a:solidFill>
+                  <a:schemeClr val="tx1"/>
+                </a:solidFill>
+                <a:latin typeface="+mn-lt"/>
+                <a:ea typeface="+mn-ea"/>
+                <a:cs typeface="+mn-cs"/>
+              </a:rPr>
+              <a:t>a[i][j]</a:t>
+            </a:r>
+            <a:r>
+              <a:rPr lang="ru-RU" dirty="0"/>
+              <a:t>. Первый индекс выбирает строку, второй — элемент внутри строки. Как и в одномерном массиве, индексация начинается с нуля, поэтому допустимые значения индексов в этом примере — </a:t>
+            </a:r>
+            <a:r>
+              <a:rPr lang="ru-RU" sz="1200" kern="1200" dirty="0">
+                <a:solidFill>
+                  <a:schemeClr val="tx1"/>
+                </a:solidFill>
+                <a:latin typeface="+mn-lt"/>
+                <a:ea typeface="+mn-ea"/>
+                <a:cs typeface="+mn-cs"/>
+              </a:rPr>
+              <a:t>i</a:t>
+            </a:r>
+            <a:r>
+              <a:rPr lang="ru-RU" dirty="0"/>
+              <a:t> от 0 до 2 и </a:t>
+            </a:r>
+            <a:r>
+              <a:rPr lang="ru-RU" sz="1200" kern="1200" dirty="0">
+                <a:solidFill>
+                  <a:schemeClr val="tx1"/>
+                </a:solidFill>
+                <a:latin typeface="+mn-lt"/>
+                <a:ea typeface="+mn-ea"/>
+                <a:cs typeface="+mn-cs"/>
+              </a:rPr>
+              <a:t>j</a:t>
+            </a:r>
+            <a:r>
+              <a:rPr lang="ru-RU" dirty="0"/>
+              <a:t> от 0 до 3.</a:t>
+            </a:r>
+          </a:p>
+          <a:p>
+            <a:endParaRPr lang="ru-RU" dirty="0"/>
+          </a:p>
+          <a:p>
+            <a:r>
+              <a:rPr lang="ru-RU" dirty="0"/>
+              <a:t>Важно понимать, что двумерный массив — это не какая-то особая структура данных, а просто более сложная форма массива. Позже мы увидим, что в памяти он по-прежнему хранится линейно, а два индекса — это лишь удобный способ обращения к элементам.</a:t>
+            </a:r>
+          </a:p>
+          <a:p>
             <a:endParaRPr lang="en-US" dirty="0"/>
           </a:p>
         </p:txBody>
@@ -8784,7 +9167,7 @@
     </p:spTree>
     <p:extLst>
       <p:ext uri="{BB962C8B-B14F-4D97-AF65-F5344CB8AC3E}">
-        <p14:creationId xmlns:p14="http://schemas.microsoft.com/office/powerpoint/2010/main" val="2180371134"/>
+        <p14:creationId xmlns:p14="http://schemas.microsoft.com/office/powerpoint/2010/main" val="3367974056"/>
       </p:ext>
     </p:extLst>
   </p:cSld>
@@ -8840,105 +9223,9 @@
           <a:p>
             <a:r>
               <a:rPr lang="ru-RU" dirty="0"/>
-              <a:t>В языке C можно объявлять массивы не только двумерные, но и трёхмерные, четырёхмерные и так далее. Например, запись </a:t>
-            </a:r>
-            <a:r>
-              <a:rPr lang="ru-RU" sz="1200" kern="1200" dirty="0" err="1">
-                <a:solidFill>
-                  <a:schemeClr val="tx1"/>
-                </a:solidFill>
-                <a:latin typeface="+mn-lt"/>
-                <a:ea typeface="+mn-ea"/>
-                <a:cs typeface="+mn-cs"/>
-              </a:rPr>
-              <a:t>int</a:t>
-            </a:r>
-            <a:r>
-              <a:rPr lang="ru-RU" sz="1200" kern="1200" dirty="0">
-                <a:solidFill>
-                  <a:schemeClr val="tx1"/>
-                </a:solidFill>
-                <a:latin typeface="+mn-lt"/>
-                <a:ea typeface="+mn-ea"/>
-                <a:cs typeface="+mn-cs"/>
-              </a:rPr>
-              <a:t> a[2][3][4];</a:t>
-            </a:r>
-            <a:r>
-              <a:rPr lang="ru-RU" dirty="0"/>
-              <a:t> означает, что у нас есть массив из двух элементов, каждый из которых является массивом из трёх элементов, каждый из которых, в свою очередь, является массивом из четырёх </a:t>
-            </a:r>
-            <a:r>
-              <a:rPr lang="ru-RU" sz="1200" kern="1200" dirty="0" err="1">
-                <a:solidFill>
-                  <a:schemeClr val="tx1"/>
-                </a:solidFill>
-                <a:latin typeface="+mn-lt"/>
-                <a:ea typeface="+mn-ea"/>
-                <a:cs typeface="+mn-cs"/>
-              </a:rPr>
-              <a:t>int</a:t>
-            </a:r>
-            <a:r>
-              <a:rPr lang="ru-RU" dirty="0"/>
-              <a:t>. Общее количество элементов равно произведению размеров: </a:t>
-            </a:r>
-            <a:r>
-              <a:rPr lang="ru-RU" sz="1200" kern="1200" dirty="0">
-                <a:solidFill>
-                  <a:schemeClr val="tx1"/>
-                </a:solidFill>
-                <a:latin typeface="+mn-lt"/>
-                <a:ea typeface="+mn-ea"/>
-                <a:cs typeface="+mn-cs"/>
-              </a:rPr>
-              <a:t>2 * 3 * 4 = 24</a:t>
-            </a:r>
-            <a:r>
-              <a:rPr lang="ru-RU" dirty="0"/>
-              <a:t>.</a:t>
-            </a:r>
-          </a:p>
-          <a:p>
-            <a:endParaRPr lang="ru-RU" dirty="0"/>
-          </a:p>
-          <a:p>
-            <a:r>
-              <a:rPr lang="ru-RU" dirty="0"/>
-              <a:t>С точки зрения синтаксиса это просто добавление ещё одного индекса. Обращение к элементу будет выглядеть как </a:t>
-            </a:r>
-            <a:r>
-              <a:rPr lang="ru-RU" sz="1200" kern="1200" dirty="0">
-                <a:solidFill>
-                  <a:schemeClr val="tx1"/>
-                </a:solidFill>
-                <a:latin typeface="+mn-lt"/>
-                <a:ea typeface="+mn-ea"/>
-                <a:cs typeface="+mn-cs"/>
-              </a:rPr>
-              <a:t>a[i][j][k]</a:t>
-            </a:r>
-            <a:r>
-              <a:rPr lang="ru-RU" dirty="0"/>
-              <a:t>, где каждый индекс выбирает соответствующий уровень вложенности. Однако важно понимать, что в памяти никакого «трёхмерного пространства» не существует. Все элементы по-прежнему хранятся </a:t>
-            </a:r>
-            <a:r>
-              <a:rPr lang="ru-RU" b="1" dirty="0"/>
-              <a:t>в одной непрерывной области памяти</a:t>
-            </a:r>
-            <a:r>
-              <a:rPr lang="ru-RU" dirty="0"/>
-              <a:t>, просто компилятор вычисляет смещение на основе всех индексов.</a:t>
-            </a:r>
-          </a:p>
-          <a:p>
-            <a:endParaRPr lang="ru-RU" dirty="0"/>
-          </a:p>
-          <a:p>
-            <a:r>
-              <a:rPr lang="ru-RU" dirty="0"/>
-              <a:t>Каждое новое измерение добавляет ещё один уровень структурирования данных, но физически всё остаётся линейной последовательностью значений. Именно поэтому количество элементов всегда равно произведению всех размеров. Это общее правило для многомерных статических массивов в C.</a:t>
-            </a:r>
+              <a:t>Двумерный массив можно инициализировать с помощью вложенных фигурных скобок, что делает структуру таблицы наглядной. Каждая внутренняя группа соответствует строке массива. Однако с точки зрения компилятора это просто последовательность значений, расположенных подряд в памяти. Поэтому допускается и плоская запись без внутренних скобок. Это ещё раз подчёркивает, что в памяти элементы идут непрерывно.</a:t>
+            </a:r>
+            <a:endParaRPr lang="en-US" dirty="0"/>
           </a:p>
         </p:txBody>
       </p:sp>
@@ -8968,7 +9255,7 @@
     </p:spTree>
     <p:extLst>
       <p:ext uri="{BB962C8B-B14F-4D97-AF65-F5344CB8AC3E}">
-        <p14:creationId xmlns:p14="http://schemas.microsoft.com/office/powerpoint/2010/main" val="171016165"/>
+        <p14:creationId xmlns:p14="http://schemas.microsoft.com/office/powerpoint/2010/main" val="367197306"/>
       </p:ext>
     </p:extLst>
   </p:cSld>
@@ -9210,7 +9497,99 @@
           <a:bodyPr/>
           <a:lstStyle/>
           <a:p>
-            <a:endParaRPr lang="en-US"/>
+            <a:r>
+              <a:rPr lang="ru-RU" dirty="0"/>
+              <a:t>Для обработки двумерного массива обычно используются </a:t>
+            </a:r>
+            <a:r>
+              <a:rPr lang="ru-RU" b="1" dirty="0"/>
+              <a:t>вложенные циклы</a:t>
+            </a:r>
+            <a:r>
+              <a:rPr lang="ru-RU" dirty="0"/>
+              <a:t>. Внешний цикл отвечает за перебор строк, а внутренний — за перебор элементов внутри каждой строки. В данном примере переменная </a:t>
+            </a:r>
+            <a:r>
+              <a:rPr lang="ru-RU" sz="1200" kern="1200" dirty="0">
+                <a:solidFill>
+                  <a:schemeClr val="tx1"/>
+                </a:solidFill>
+                <a:latin typeface="+mn-lt"/>
+                <a:ea typeface="+mn-ea"/>
+                <a:cs typeface="+mn-cs"/>
+              </a:rPr>
+              <a:t>i</a:t>
+            </a:r>
+            <a:r>
+              <a:rPr lang="ru-RU" dirty="0"/>
+              <a:t> принимает значения от 0 до 2 и выбирает строку массива, а переменная </a:t>
+            </a:r>
+            <a:r>
+              <a:rPr lang="ru-RU" sz="1200" kern="1200" dirty="0">
+                <a:solidFill>
+                  <a:schemeClr val="tx1"/>
+                </a:solidFill>
+                <a:latin typeface="+mn-lt"/>
+                <a:ea typeface="+mn-ea"/>
+                <a:cs typeface="+mn-cs"/>
+              </a:rPr>
+              <a:t>j</a:t>
+            </a:r>
+            <a:r>
+              <a:rPr lang="ru-RU" dirty="0"/>
+              <a:t> принимает значения от 0 до 3 и выбирает элемент внутри строки.</a:t>
+            </a:r>
+          </a:p>
+          <a:p>
+            <a:endParaRPr lang="ru-RU" dirty="0"/>
+          </a:p>
+          <a:p>
+            <a:r>
+              <a:rPr lang="ru-RU" dirty="0"/>
+              <a:t>На каждой итерации внутреннего цикла мы обращаемся к элементу </a:t>
+            </a:r>
+            <a:r>
+              <a:rPr lang="ru-RU" sz="1200" kern="1200" dirty="0">
+                <a:solidFill>
+                  <a:schemeClr val="tx1"/>
+                </a:solidFill>
+                <a:latin typeface="+mn-lt"/>
+                <a:ea typeface="+mn-ea"/>
+                <a:cs typeface="+mn-cs"/>
+              </a:rPr>
+              <a:t>a[i][j]</a:t>
+            </a:r>
+            <a:r>
+              <a:rPr lang="ru-RU" dirty="0"/>
+              <a:t> и выводим его. Когда внутренний цикл завершается, мы печатаем перевод строки, чтобы перейти к следующей строке таблицы. Таким образом структура вложенных циклов естественно отражает структуру данных: строка за строкой, элемент за элементом.</a:t>
+            </a:r>
+          </a:p>
+          <a:p>
+            <a:endParaRPr lang="ru-RU" dirty="0"/>
+          </a:p>
+          <a:p>
+            <a:r>
+              <a:rPr lang="ru-RU" dirty="0"/>
+              <a:t>Важно, чтобы границы циклов точно соответствовали размерам массива. Если размеры изменятся, их нужно изменить и в условиях циклов. Именно поэтому на практике часто используют константы или вычисляют размеры через </a:t>
+            </a:r>
+            <a:r>
+              <a:rPr lang="ru-RU" sz="1200" kern="1200" dirty="0" err="1">
+                <a:solidFill>
+                  <a:schemeClr val="tx1"/>
+                </a:solidFill>
+                <a:latin typeface="+mn-lt"/>
+                <a:ea typeface="+mn-ea"/>
+                <a:cs typeface="+mn-cs"/>
+              </a:rPr>
+              <a:t>sizeof</a:t>
+            </a:r>
+            <a:r>
+              <a:rPr lang="ru-RU" dirty="0"/>
+              <a:t>, чтобы избежать ошибок.</a:t>
+            </a:r>
+          </a:p>
+          <a:p>
+            <a:endParaRPr lang="en-US" dirty="0"/>
           </a:p>
         </p:txBody>
       </p:sp>
@@ -9240,7 +9619,7 @@
     </p:spTree>
     <p:extLst>
       <p:ext uri="{BB962C8B-B14F-4D97-AF65-F5344CB8AC3E}">
-        <p14:creationId xmlns:p14="http://schemas.microsoft.com/office/powerpoint/2010/main" val="1188917957"/>
+        <p14:creationId xmlns:p14="http://schemas.microsoft.com/office/powerpoint/2010/main" val="2485566618"/>
       </p:ext>
     </p:extLst>
   </p:cSld>
@@ -9296,26 +9675,10 @@
           <a:p>
             <a:r>
               <a:rPr lang="ru-RU" dirty="0"/>
-              <a:t>Сегодня мы собрали набор инструментов, который позволяет писать более серьёзные программы: выбирать ветку выполнения, строить меню и обработчики команд, повторять действия циклом и обрабатывать наборы данных через массивы.</a:t>
-            </a:r>
-            <a:endParaRPr lang="en-US" dirty="0"/>
-          </a:p>
-          <a:p>
-            <a:endParaRPr lang="ru-RU" dirty="0"/>
-          </a:p>
-          <a:p>
-            <a:r>
-              <a:rPr lang="ru-RU" dirty="0"/>
-              <a:t>Важно, что все эти конструкции языка высокого уровня в итоге сводятся к простым механизмам выполнения: сравнениям и переходам, именно поэтому мы смотрели на ассемблер поверхностно.</a:t>
-            </a:r>
-          </a:p>
-          <a:p>
-            <a:r>
-              <a:rPr lang="ru-RU" dirty="0"/>
-              <a:t>На следующей лекции мы продолжим тему массивов и перейдём к строкам, потому что в C строка — это массив символов </a:t>
-            </a:r>
-            <a:r>
-              <a:rPr lang="ru-RU" sz="1200" kern="1200" dirty="0" err="1">
+              <a:t>Здесь показан простой, но реалистичный пример использования двумерного массива — вычисление суммы всех элементов матрицы. Мы объявляем массив </a:t>
+            </a:r>
+            <a:r>
+              <a:rPr lang="ru-RU" sz="1200" kern="1200" dirty="0">
                 <a:solidFill>
                   <a:schemeClr val="tx1"/>
                 </a:solidFill>
@@ -9323,12 +9686,72 @@
                 <a:ea typeface="+mn-ea"/>
                 <a:cs typeface="+mn-cs"/>
               </a:rPr>
-              <a:t>char</a:t>
-            </a:r>
-            <a:r>
-              <a:rPr lang="ru-RU" dirty="0"/>
-              <a:t>, и это естественное продолжение текущего материала.</a:t>
-            </a:r>
+              <a:t>a[3][4]</a:t>
+            </a:r>
+            <a:r>
+              <a:rPr lang="ru-RU" dirty="0"/>
+              <a:t> и инициализируем его значениями, организованными по строкам. Затем вводим переменную </a:t>
+            </a:r>
+            <a:r>
+              <a:rPr lang="ru-RU" sz="1200" kern="1200" dirty="0" err="1">
+                <a:solidFill>
+                  <a:schemeClr val="tx1"/>
+                </a:solidFill>
+                <a:latin typeface="+mn-lt"/>
+                <a:ea typeface="+mn-ea"/>
+                <a:cs typeface="+mn-cs"/>
+              </a:rPr>
+              <a:t>sum</a:t>
+            </a:r>
+            <a:r>
+              <a:rPr lang="ru-RU" dirty="0"/>
+              <a:t>, в которую будем накапливать результат.</a:t>
+            </a:r>
+            <a:endParaRPr lang="en-US" dirty="0"/>
+          </a:p>
+          <a:p>
+            <a:endParaRPr lang="ru-RU" dirty="0"/>
+          </a:p>
+          <a:p>
+            <a:r>
+              <a:rPr lang="ru-RU" dirty="0"/>
+              <a:t>Далее используются вложенные циклы: внешний цикл перебирает строки, внутренний — элементы внутри каждой строки. На каждой итерации значение текущего элемента добавляется к переменной </a:t>
+            </a:r>
+            <a:r>
+              <a:rPr lang="ru-RU" sz="1200" kern="1200" dirty="0" err="1">
+                <a:solidFill>
+                  <a:schemeClr val="tx1"/>
+                </a:solidFill>
+                <a:latin typeface="+mn-lt"/>
+                <a:ea typeface="+mn-ea"/>
+                <a:cs typeface="+mn-cs"/>
+              </a:rPr>
+              <a:t>sum</a:t>
+            </a:r>
+            <a:r>
+              <a:rPr lang="ru-RU" dirty="0"/>
+              <a:t>. В конце программа выводит итоговую сумму.</a:t>
+            </a:r>
+            <a:endParaRPr lang="en-US" dirty="0"/>
+          </a:p>
+          <a:p>
+            <a:endParaRPr lang="ru-RU" dirty="0"/>
+          </a:p>
+          <a:p>
+            <a:r>
+              <a:rPr lang="ru-RU" dirty="0"/>
+              <a:t>Этот пример показывает типичный шаблон работы с таблицей данных: </a:t>
+            </a:r>
+            <a:r>
+              <a:rPr lang="ru-RU" b="1" dirty="0"/>
+              <a:t>вложенные циклы + доступ по двум индексам</a:t>
+            </a:r>
+            <a:r>
+              <a:rPr lang="ru-RU" dirty="0"/>
+              <a:t>. Именно так реализуются многие алгоритмы обработки матриц, изображений, игровых полей и других двумерных структур.</a:t>
+            </a:r>
+          </a:p>
+          <a:p>
             <a:endParaRPr lang="en-US" dirty="0"/>
           </a:p>
         </p:txBody>
@@ -9351,6 +9774,562 @@
             <a:fld id="{CB945CA0-E94A-4FB7-A4CA-C1968BB52B92}" type="slidenum">
               <a:rPr lang="en-US" smtClean="0"/>
               <a:t>51</a:t>
+            </a:fld>
+            <a:endParaRPr lang="en-US"/>
+          </a:p>
+        </p:txBody>
+      </p:sp>
+    </p:spTree>
+    <p:extLst>
+      <p:ext uri="{BB962C8B-B14F-4D97-AF65-F5344CB8AC3E}">
+        <p14:creationId xmlns:p14="http://schemas.microsoft.com/office/powerpoint/2010/main" val="242019281"/>
+      </p:ext>
+    </p:extLst>
+  </p:cSld>
+  <p:clrMapOvr>
+    <a:masterClrMapping/>
+  </p:clrMapOvr>
+</p:notes>
+</file>
+
+<file path=ppt/notesSlides/notesSlide52.xml><?xml version="1.0" encoding="utf-8"?>
+<p:notes xmlns:a="http://schemas.openxmlformats.org/drawingml/2006/main" xmlns:r="http://schemas.openxmlformats.org/officeDocument/2006/relationships" xmlns:p="http://schemas.openxmlformats.org/presentationml/2006/main">
+  <p:cSld>
+    <p:spTree>
+      <p:nvGrpSpPr>
+        <p:cNvPr id="1" name=""/>
+        <p:cNvGrpSpPr/>
+        <p:nvPr/>
+      </p:nvGrpSpPr>
+      <p:grpSpPr>
+        <a:xfrm>
+          <a:off x="0" y="0"/>
+          <a:ext cx="0" cy="0"/>
+          <a:chOff x="0" y="0"/>
+          <a:chExt cx="0" cy="0"/>
+        </a:xfrm>
+      </p:grpSpPr>
+      <p:sp>
+        <p:nvSpPr>
+          <p:cNvPr id="2" name="Slide Image Placeholder 1"/>
+          <p:cNvSpPr>
+            <a:spLocks noGrp="1" noRot="1" noChangeAspect="1"/>
+          </p:cNvSpPr>
+          <p:nvPr>
+            <p:ph type="sldImg"/>
+          </p:nvPr>
+        </p:nvSpPr>
+        <p:spPr/>
+      </p:sp>
+      <p:sp>
+        <p:nvSpPr>
+          <p:cNvPr id="3" name="Notes Placeholder 2"/>
+          <p:cNvSpPr>
+            <a:spLocks noGrp="1"/>
+          </p:cNvSpPr>
+          <p:nvPr>
+            <p:ph type="body" idx="1"/>
+          </p:nvPr>
+        </p:nvSpPr>
+        <p:spPr/>
+        <p:txBody>
+          <a:bodyPr/>
+          <a:lstStyle/>
+          <a:p>
+            <a:r>
+              <a:rPr lang="ru-RU" dirty="0"/>
+              <a:t>Важно понимать, что в памяти нет «настоящих таблиц». Двумерный массив — это одна непрерывная область памяти. Сначала идут все элементы первой строки, затем второй, затем третьей. Такой способ хранения называется построчным, или </a:t>
+            </a:r>
+            <a:r>
+              <a:rPr lang="ru-RU" dirty="0" err="1"/>
+              <a:t>row-major</a:t>
+            </a:r>
+            <a:r>
+              <a:rPr lang="ru-RU" dirty="0"/>
+              <a:t> </a:t>
+            </a:r>
+            <a:r>
+              <a:rPr lang="ru-RU" dirty="0" err="1"/>
+              <a:t>order</a:t>
+            </a:r>
+            <a:r>
+              <a:rPr lang="ru-RU" dirty="0"/>
+              <a:t>. Это означает, что элементы </a:t>
+            </a:r>
+            <a:r>
+              <a:rPr lang="ru-RU" sz="1200" kern="1200" dirty="0">
+                <a:solidFill>
+                  <a:schemeClr val="tx1"/>
+                </a:solidFill>
+                <a:latin typeface="+mn-lt"/>
+                <a:ea typeface="+mn-ea"/>
+                <a:cs typeface="+mn-cs"/>
+              </a:rPr>
+              <a:t>a[0][0]</a:t>
+            </a:r>
+            <a:r>
+              <a:rPr lang="ru-RU" dirty="0"/>
+              <a:t>, </a:t>
+            </a:r>
+            <a:r>
+              <a:rPr lang="ru-RU" sz="1200" kern="1200" dirty="0">
+                <a:solidFill>
+                  <a:schemeClr val="tx1"/>
+                </a:solidFill>
+                <a:latin typeface="+mn-lt"/>
+                <a:ea typeface="+mn-ea"/>
+                <a:cs typeface="+mn-cs"/>
+              </a:rPr>
+              <a:t>a[0][1]</a:t>
+            </a:r>
+            <a:r>
+              <a:rPr lang="ru-RU" dirty="0"/>
+              <a:t>, </a:t>
+            </a:r>
+            <a:r>
+              <a:rPr lang="ru-RU" sz="1200" kern="1200" dirty="0">
+                <a:solidFill>
+                  <a:schemeClr val="tx1"/>
+                </a:solidFill>
+                <a:latin typeface="+mn-lt"/>
+                <a:ea typeface="+mn-ea"/>
+                <a:cs typeface="+mn-cs"/>
+              </a:rPr>
+              <a:t>a[0][2]</a:t>
+            </a:r>
+            <a:r>
+              <a:rPr lang="ru-RU" dirty="0"/>
+              <a:t>, </a:t>
+            </a:r>
+            <a:r>
+              <a:rPr lang="ru-RU" sz="1200" kern="1200" dirty="0">
+                <a:solidFill>
+                  <a:schemeClr val="tx1"/>
+                </a:solidFill>
+                <a:latin typeface="+mn-lt"/>
+                <a:ea typeface="+mn-ea"/>
+                <a:cs typeface="+mn-cs"/>
+              </a:rPr>
+              <a:t>a[0][3]</a:t>
+            </a:r>
+            <a:r>
+              <a:rPr lang="ru-RU" dirty="0"/>
+              <a:t> расположены подряд, затем сразу начинается следующая строка. Это знание станет особенно важным, когда мы будем говорить о работе с памятью и указателями.</a:t>
+            </a:r>
+          </a:p>
+          <a:p>
+            <a:br>
+              <a:rPr lang="ru-RU" dirty="0"/>
+            </a:br>
+            <a:endParaRPr lang="en-US" dirty="0"/>
+          </a:p>
+        </p:txBody>
+      </p:sp>
+      <p:sp>
+        <p:nvSpPr>
+          <p:cNvPr id="4" name="Slide Number Placeholder 3"/>
+          <p:cNvSpPr>
+            <a:spLocks noGrp="1"/>
+          </p:cNvSpPr>
+          <p:nvPr>
+            <p:ph type="sldNum" sz="quarter" idx="5"/>
+          </p:nvPr>
+        </p:nvSpPr>
+        <p:spPr/>
+        <p:txBody>
+          <a:bodyPr/>
+          <a:lstStyle/>
+          <a:p>
+            <a:fld id="{CB945CA0-E94A-4FB7-A4CA-C1968BB52B92}" type="slidenum">
+              <a:rPr lang="en-US" smtClean="0"/>
+              <a:t>52</a:t>
+            </a:fld>
+            <a:endParaRPr lang="en-US"/>
+          </a:p>
+        </p:txBody>
+      </p:sp>
+    </p:spTree>
+    <p:extLst>
+      <p:ext uri="{BB962C8B-B14F-4D97-AF65-F5344CB8AC3E}">
+        <p14:creationId xmlns:p14="http://schemas.microsoft.com/office/powerpoint/2010/main" val="2180371134"/>
+      </p:ext>
+    </p:extLst>
+  </p:cSld>
+  <p:clrMapOvr>
+    <a:masterClrMapping/>
+  </p:clrMapOvr>
+</p:notes>
+</file>
+
+<file path=ppt/notesSlides/notesSlide53.xml><?xml version="1.0" encoding="utf-8"?>
+<p:notes xmlns:a="http://schemas.openxmlformats.org/drawingml/2006/main" xmlns:r="http://schemas.openxmlformats.org/officeDocument/2006/relationships" xmlns:p="http://schemas.openxmlformats.org/presentationml/2006/main">
+  <p:cSld>
+    <p:spTree>
+      <p:nvGrpSpPr>
+        <p:cNvPr id="1" name=""/>
+        <p:cNvGrpSpPr/>
+        <p:nvPr/>
+      </p:nvGrpSpPr>
+      <p:grpSpPr>
+        <a:xfrm>
+          <a:off x="0" y="0"/>
+          <a:ext cx="0" cy="0"/>
+          <a:chOff x="0" y="0"/>
+          <a:chExt cx="0" cy="0"/>
+        </a:xfrm>
+      </p:grpSpPr>
+      <p:sp>
+        <p:nvSpPr>
+          <p:cNvPr id="2" name="Slide Image Placeholder 1"/>
+          <p:cNvSpPr>
+            <a:spLocks noGrp="1" noRot="1" noChangeAspect="1"/>
+          </p:cNvSpPr>
+          <p:nvPr>
+            <p:ph type="sldImg"/>
+          </p:nvPr>
+        </p:nvSpPr>
+        <p:spPr/>
+      </p:sp>
+      <p:sp>
+        <p:nvSpPr>
+          <p:cNvPr id="3" name="Notes Placeholder 2"/>
+          <p:cNvSpPr>
+            <a:spLocks noGrp="1"/>
+          </p:cNvSpPr>
+          <p:nvPr>
+            <p:ph type="body" idx="1"/>
+          </p:nvPr>
+        </p:nvSpPr>
+        <p:spPr/>
+        <p:txBody>
+          <a:bodyPr/>
+          <a:lstStyle/>
+          <a:p>
+            <a:r>
+              <a:rPr lang="ru-RU" dirty="0"/>
+              <a:t>В языке C можно объявлять массивы не только двумерные, но и трёхмерные, четырёхмерные и так далее. Например, запись </a:t>
+            </a:r>
+            <a:r>
+              <a:rPr lang="ru-RU" sz="1200" kern="1200" dirty="0" err="1">
+                <a:solidFill>
+                  <a:schemeClr val="tx1"/>
+                </a:solidFill>
+                <a:latin typeface="+mn-lt"/>
+                <a:ea typeface="+mn-ea"/>
+                <a:cs typeface="+mn-cs"/>
+              </a:rPr>
+              <a:t>int</a:t>
+            </a:r>
+            <a:r>
+              <a:rPr lang="ru-RU" sz="1200" kern="1200" dirty="0">
+                <a:solidFill>
+                  <a:schemeClr val="tx1"/>
+                </a:solidFill>
+                <a:latin typeface="+mn-lt"/>
+                <a:ea typeface="+mn-ea"/>
+                <a:cs typeface="+mn-cs"/>
+              </a:rPr>
+              <a:t> a[2][3][4];</a:t>
+            </a:r>
+            <a:r>
+              <a:rPr lang="ru-RU" dirty="0"/>
+              <a:t> означает, что у нас есть массив из двух элементов, каждый из которых является массивом из трёх элементов, каждый из которых, в свою очередь, является массивом из четырёх </a:t>
+            </a:r>
+            <a:r>
+              <a:rPr lang="ru-RU" sz="1200" kern="1200" dirty="0" err="1">
+                <a:solidFill>
+                  <a:schemeClr val="tx1"/>
+                </a:solidFill>
+                <a:latin typeface="+mn-lt"/>
+                <a:ea typeface="+mn-ea"/>
+                <a:cs typeface="+mn-cs"/>
+              </a:rPr>
+              <a:t>int</a:t>
+            </a:r>
+            <a:r>
+              <a:rPr lang="ru-RU" dirty="0"/>
+              <a:t>. Общее количество элементов равно произведению размеров: </a:t>
+            </a:r>
+            <a:r>
+              <a:rPr lang="ru-RU" sz="1200" kern="1200" dirty="0">
+                <a:solidFill>
+                  <a:schemeClr val="tx1"/>
+                </a:solidFill>
+                <a:latin typeface="+mn-lt"/>
+                <a:ea typeface="+mn-ea"/>
+                <a:cs typeface="+mn-cs"/>
+              </a:rPr>
+              <a:t>2 * 3 * 4 = 24</a:t>
+            </a:r>
+            <a:r>
+              <a:rPr lang="ru-RU" dirty="0"/>
+              <a:t>.</a:t>
+            </a:r>
+          </a:p>
+          <a:p>
+            <a:endParaRPr lang="ru-RU" dirty="0"/>
+          </a:p>
+          <a:p>
+            <a:r>
+              <a:rPr lang="ru-RU" dirty="0"/>
+              <a:t>С точки зрения синтаксиса это просто добавление ещё одного индекса. Обращение к элементу будет выглядеть как </a:t>
+            </a:r>
+            <a:r>
+              <a:rPr lang="ru-RU" sz="1200" kern="1200" dirty="0">
+                <a:solidFill>
+                  <a:schemeClr val="tx1"/>
+                </a:solidFill>
+                <a:latin typeface="+mn-lt"/>
+                <a:ea typeface="+mn-ea"/>
+                <a:cs typeface="+mn-cs"/>
+              </a:rPr>
+              <a:t>a[i][j][k]</a:t>
+            </a:r>
+            <a:r>
+              <a:rPr lang="ru-RU" dirty="0"/>
+              <a:t>, где каждый индекс выбирает соответствующий уровень вложенности. Однако важно понимать, что в памяти никакого «трёхмерного пространства» не существует. Все элементы по-прежнему хранятся </a:t>
+            </a:r>
+            <a:r>
+              <a:rPr lang="ru-RU" b="1" dirty="0"/>
+              <a:t>в одной непрерывной области памяти</a:t>
+            </a:r>
+            <a:r>
+              <a:rPr lang="ru-RU" dirty="0"/>
+              <a:t>, просто компилятор вычисляет смещение на основе всех индексов.</a:t>
+            </a:r>
+          </a:p>
+          <a:p>
+            <a:endParaRPr lang="ru-RU" dirty="0"/>
+          </a:p>
+          <a:p>
+            <a:r>
+              <a:rPr lang="ru-RU" dirty="0"/>
+              <a:t>Каждое новое измерение добавляет ещё один уровень структурирования данных, но физически всё остаётся линейной последовательностью значений. Именно поэтому количество элементов всегда равно произведению всех размеров. Это общее правило для многомерных статических массивов в C.</a:t>
+            </a:r>
+          </a:p>
+        </p:txBody>
+      </p:sp>
+      <p:sp>
+        <p:nvSpPr>
+          <p:cNvPr id="4" name="Slide Number Placeholder 3"/>
+          <p:cNvSpPr>
+            <a:spLocks noGrp="1"/>
+          </p:cNvSpPr>
+          <p:nvPr>
+            <p:ph type="sldNum" sz="quarter" idx="5"/>
+          </p:nvPr>
+        </p:nvSpPr>
+        <p:spPr/>
+        <p:txBody>
+          <a:bodyPr/>
+          <a:lstStyle/>
+          <a:p>
+            <a:fld id="{CB945CA0-E94A-4FB7-A4CA-C1968BB52B92}" type="slidenum">
+              <a:rPr lang="en-US" smtClean="0"/>
+              <a:t>53</a:t>
+            </a:fld>
+            <a:endParaRPr lang="en-US"/>
+          </a:p>
+        </p:txBody>
+      </p:sp>
+    </p:spTree>
+    <p:extLst>
+      <p:ext uri="{BB962C8B-B14F-4D97-AF65-F5344CB8AC3E}">
+        <p14:creationId xmlns:p14="http://schemas.microsoft.com/office/powerpoint/2010/main" val="171016165"/>
+      </p:ext>
+    </p:extLst>
+  </p:cSld>
+  <p:clrMapOvr>
+    <a:masterClrMapping/>
+  </p:clrMapOvr>
+</p:notes>
+</file>
+
+<file path=ppt/notesSlides/notesSlide54.xml><?xml version="1.0" encoding="utf-8"?>
+<p:notes xmlns:a="http://schemas.openxmlformats.org/drawingml/2006/main" xmlns:r="http://schemas.openxmlformats.org/officeDocument/2006/relationships" xmlns:p="http://schemas.openxmlformats.org/presentationml/2006/main">
+  <p:cSld>
+    <p:spTree>
+      <p:nvGrpSpPr>
+        <p:cNvPr id="1" name=""/>
+        <p:cNvGrpSpPr/>
+        <p:nvPr/>
+      </p:nvGrpSpPr>
+      <p:grpSpPr>
+        <a:xfrm>
+          <a:off x="0" y="0"/>
+          <a:ext cx="0" cy="0"/>
+          <a:chOff x="0" y="0"/>
+          <a:chExt cx="0" cy="0"/>
+        </a:xfrm>
+      </p:grpSpPr>
+      <p:sp>
+        <p:nvSpPr>
+          <p:cNvPr id="2" name="Slide Image Placeholder 1"/>
+          <p:cNvSpPr>
+            <a:spLocks noGrp="1" noRot="1" noChangeAspect="1"/>
+          </p:cNvSpPr>
+          <p:nvPr>
+            <p:ph type="sldImg"/>
+          </p:nvPr>
+        </p:nvSpPr>
+        <p:spPr/>
+      </p:sp>
+      <p:sp>
+        <p:nvSpPr>
+          <p:cNvPr id="3" name="Notes Placeholder 2"/>
+          <p:cNvSpPr>
+            <a:spLocks noGrp="1"/>
+          </p:cNvSpPr>
+          <p:nvPr>
+            <p:ph type="body" idx="1"/>
+          </p:nvPr>
+        </p:nvSpPr>
+        <p:spPr/>
+        <p:txBody>
+          <a:bodyPr/>
+          <a:lstStyle/>
+          <a:p>
+            <a:endParaRPr lang="en-US"/>
+          </a:p>
+        </p:txBody>
+      </p:sp>
+      <p:sp>
+        <p:nvSpPr>
+          <p:cNvPr id="4" name="Slide Number Placeholder 3"/>
+          <p:cNvSpPr>
+            <a:spLocks noGrp="1"/>
+          </p:cNvSpPr>
+          <p:nvPr>
+            <p:ph type="sldNum" sz="quarter" idx="5"/>
+          </p:nvPr>
+        </p:nvSpPr>
+        <p:spPr/>
+        <p:txBody>
+          <a:bodyPr/>
+          <a:lstStyle/>
+          <a:p>
+            <a:fld id="{CB945CA0-E94A-4FB7-A4CA-C1968BB52B92}" type="slidenum">
+              <a:rPr lang="en-US" smtClean="0"/>
+              <a:t>54</a:t>
+            </a:fld>
+            <a:endParaRPr lang="en-US"/>
+          </a:p>
+        </p:txBody>
+      </p:sp>
+    </p:spTree>
+    <p:extLst>
+      <p:ext uri="{BB962C8B-B14F-4D97-AF65-F5344CB8AC3E}">
+        <p14:creationId xmlns:p14="http://schemas.microsoft.com/office/powerpoint/2010/main" val="1188917957"/>
+      </p:ext>
+    </p:extLst>
+  </p:cSld>
+  <p:clrMapOvr>
+    <a:masterClrMapping/>
+  </p:clrMapOvr>
+</p:notes>
+</file>
+
+<file path=ppt/notesSlides/notesSlide55.xml><?xml version="1.0" encoding="utf-8"?>
+<p:notes xmlns:a="http://schemas.openxmlformats.org/drawingml/2006/main" xmlns:r="http://schemas.openxmlformats.org/officeDocument/2006/relationships" xmlns:p="http://schemas.openxmlformats.org/presentationml/2006/main">
+  <p:cSld>
+    <p:spTree>
+      <p:nvGrpSpPr>
+        <p:cNvPr id="1" name=""/>
+        <p:cNvGrpSpPr/>
+        <p:nvPr/>
+      </p:nvGrpSpPr>
+      <p:grpSpPr>
+        <a:xfrm>
+          <a:off x="0" y="0"/>
+          <a:ext cx="0" cy="0"/>
+          <a:chOff x="0" y="0"/>
+          <a:chExt cx="0" cy="0"/>
+        </a:xfrm>
+      </p:grpSpPr>
+      <p:sp>
+        <p:nvSpPr>
+          <p:cNvPr id="2" name="Slide Image Placeholder 1"/>
+          <p:cNvSpPr>
+            <a:spLocks noGrp="1" noRot="1" noChangeAspect="1"/>
+          </p:cNvSpPr>
+          <p:nvPr>
+            <p:ph type="sldImg"/>
+          </p:nvPr>
+        </p:nvSpPr>
+        <p:spPr/>
+      </p:sp>
+      <p:sp>
+        <p:nvSpPr>
+          <p:cNvPr id="3" name="Notes Placeholder 2"/>
+          <p:cNvSpPr>
+            <a:spLocks noGrp="1"/>
+          </p:cNvSpPr>
+          <p:nvPr>
+            <p:ph type="body" idx="1"/>
+          </p:nvPr>
+        </p:nvSpPr>
+        <p:spPr/>
+        <p:txBody>
+          <a:bodyPr/>
+          <a:lstStyle/>
+          <a:p>
+            <a:r>
+              <a:rPr lang="ru-RU" dirty="0"/>
+              <a:t>Сегодня мы собрали набор инструментов, который позволяет писать более серьёзные программы: выбирать ветку выполнения, строить меню и обработчики команд, повторять действия циклом и обрабатывать наборы данных через массивы.</a:t>
+            </a:r>
+            <a:endParaRPr lang="en-US" dirty="0"/>
+          </a:p>
+          <a:p>
+            <a:endParaRPr lang="ru-RU" dirty="0"/>
+          </a:p>
+          <a:p>
+            <a:r>
+              <a:rPr lang="ru-RU" dirty="0"/>
+              <a:t>Важно, что все эти конструкции языка высокого уровня в итоге сводятся к простым механизмам выполнения: сравнениям и переходам, именно поэтому мы смотрели на ассемблер поверхностно.</a:t>
+            </a:r>
+          </a:p>
+          <a:p>
+            <a:r>
+              <a:rPr lang="ru-RU" dirty="0"/>
+              <a:t>На следующей лекции мы продолжим тему массивов и перейдём к строкам, потому что в C строка — это массив символов </a:t>
+            </a:r>
+            <a:r>
+              <a:rPr lang="ru-RU" sz="1200" kern="1200" dirty="0" err="1">
+                <a:solidFill>
+                  <a:schemeClr val="tx1"/>
+                </a:solidFill>
+                <a:latin typeface="+mn-lt"/>
+                <a:ea typeface="+mn-ea"/>
+                <a:cs typeface="+mn-cs"/>
+              </a:rPr>
+              <a:t>char</a:t>
+            </a:r>
+            <a:r>
+              <a:rPr lang="ru-RU" dirty="0"/>
+              <a:t>, и это естественное продолжение текущего материала.</a:t>
+            </a:r>
+            <a:endParaRPr lang="en-US" dirty="0"/>
+          </a:p>
+        </p:txBody>
+      </p:sp>
+      <p:sp>
+        <p:nvSpPr>
+          <p:cNvPr id="4" name="Slide Number Placeholder 3"/>
+          <p:cNvSpPr>
+            <a:spLocks noGrp="1"/>
+          </p:cNvSpPr>
+          <p:nvPr>
+            <p:ph type="sldNum" sz="quarter" idx="5"/>
+          </p:nvPr>
+        </p:nvSpPr>
+        <p:spPr/>
+        <p:txBody>
+          <a:bodyPr/>
+          <a:lstStyle/>
+          <a:p>
+            <a:fld id="{CB945CA0-E94A-4FB7-A4CA-C1968BB52B92}" type="slidenum">
+              <a:rPr lang="en-US" smtClean="0"/>
+              <a:t>55</a:t>
             </a:fld>
             <a:endParaRPr lang="en-US"/>
           </a:p>
@@ -28772,7 +29751,7 @@
           <p:cNvPr id="3" name="Title 2">
             <a:extLst>
               <a:ext uri="{FF2B5EF4-FFF2-40B4-BE49-F238E27FC236}">
-                <a16:creationId xmlns:a16="http://schemas.microsoft.com/office/drawing/2014/main" id="{6090378D-BC0A-E043-9B89-7587AAA95F5C}"/>
+                <a16:creationId xmlns:a16="http://schemas.microsoft.com/office/drawing/2014/main" id="{C900EF6C-0F70-A676-B240-8ED6E86E0B15}"/>
               </a:ext>
             </a:extLst>
           </p:cNvPr>
@@ -28790,19 +29769,11 @@
           <a:p>
             <a:r>
               <a:rPr lang="ru-RU" dirty="0"/>
-              <a:t>Сравнение циклов</a:t>
+              <a:t>Досрочный выход из цикла с помощью </a:t>
             </a:r>
             <a:r>
               <a:rPr lang="en-US" dirty="0"/>
-              <a:t> while, for </a:t>
-            </a:r>
-            <a:r>
-              <a:rPr lang="ru-RU" dirty="0"/>
-              <a:t>и </a:t>
-            </a:r>
-            <a:r>
-              <a:rPr lang="en-US" dirty="0"/>
-              <a:t>do-while</a:t>
+              <a:t>break</a:t>
             </a:r>
           </a:p>
         </p:txBody>
@@ -28812,7 +29783,7 @@
           <p:cNvPr id="4" name="Content Placeholder 3">
             <a:extLst>
               <a:ext uri="{FF2B5EF4-FFF2-40B4-BE49-F238E27FC236}">
-                <a16:creationId xmlns:a16="http://schemas.microsoft.com/office/drawing/2014/main" id="{E2EAD42A-654F-8A00-E442-1177422C7926}"/>
+                <a16:creationId xmlns:a16="http://schemas.microsoft.com/office/drawing/2014/main" id="{1AD1E77F-7C18-2547-DC74-EB8268C679F2}"/>
               </a:ext>
             </a:extLst>
           </p:cNvPr>
@@ -28823,44 +29794,402 @@
             <p:ph idx="1"/>
           </p:nvPr>
         </p:nvSpPr>
-        <p:spPr/>
+        <p:spPr>
+          <a:xfrm>
+            <a:off x="838200" y="1825625"/>
+            <a:ext cx="5047211" cy="4351338"/>
+          </a:xfrm>
+        </p:spPr>
         <p:txBody>
           <a:bodyPr/>
           <a:lstStyle/>
           <a:p>
             <a:r>
-              <a:rPr lang="ru-RU" dirty="0" err="1"/>
-              <a:t>while</a:t>
-            </a:r>
-            <a:r>
-              <a:rPr lang="ru-RU" dirty="0"/>
-              <a:t> — когда условие главное</a:t>
-            </a:r>
-          </a:p>
-          <a:p>
-            <a:r>
-              <a:rPr lang="ru-RU" dirty="0" err="1"/>
+              <a:rPr lang="ru-RU" dirty="0"/>
+              <a:t>Инструкция </a:t>
+            </a:r>
+            <a:r>
+              <a:rPr lang="en-US" dirty="0"/>
+              <a:t>break</a:t>
+            </a:r>
+            <a:r>
+              <a:rPr lang="ru-RU" dirty="0"/>
+              <a:t> немедленно завершает выполнение циклов </a:t>
+            </a:r>
+            <a:r>
+              <a:rPr lang="en-US" dirty="0"/>
+              <a:t>for, while, do-while</a:t>
+            </a:r>
+          </a:p>
+        </p:txBody>
+      </p:sp>
+      <p:sp>
+        <p:nvSpPr>
+          <p:cNvPr id="8" name="TextBox 7">
+            <a:extLst>
+              <a:ext uri="{FF2B5EF4-FFF2-40B4-BE49-F238E27FC236}">
+                <a16:creationId xmlns:a16="http://schemas.microsoft.com/office/drawing/2014/main" id="{048C9CCB-9453-DC6E-986C-993EDB5350F4}"/>
+              </a:ext>
+            </a:extLst>
+          </p:cNvPr>
+          <p:cNvSpPr txBox="1"/>
+          <p:nvPr/>
+        </p:nvSpPr>
+        <p:spPr>
+          <a:xfrm>
+            <a:off x="6306591" y="1825625"/>
+            <a:ext cx="4466704" cy="1754326"/>
+          </a:xfrm>
+          <a:prstGeom prst="rect">
+            <a:avLst/>
+          </a:prstGeom>
+          <a:noFill/>
+        </p:spPr>
+        <p:txBody>
+          <a:bodyPr wrap="square">
+            <a:spAutoFit/>
+          </a:bodyPr>
+          <a:lstStyle/>
+          <a:p>
+            <a:pPr>
+              <a:buNone/>
+            </a:pPr>
+            <a:r>
+              <a:rPr lang="nn-NO" b="0" dirty="0">
+                <a:solidFill>
+                  <a:srgbClr val="8F08C4"/>
+                </a:solidFill>
+                <a:effectLst/>
+                <a:latin typeface="Consolas" panose="020B0609020204030204" pitchFamily="49" charset="0"/>
+              </a:rPr>
               <a:t>for</a:t>
             </a:r>
             <a:r>
-              <a:rPr lang="ru-RU" dirty="0"/>
-              <a:t> — когда есть счётчик или перебор</a:t>
-            </a:r>
-          </a:p>
-          <a:p>
-            <a:r>
-              <a:rPr lang="ru-RU" dirty="0" err="1"/>
-              <a:t>do-while</a:t>
-            </a:r>
-            <a:r>
-              <a:rPr lang="ru-RU" dirty="0"/>
-              <a:t> — когда тело должно выполниться минимум один раз</a:t>
-            </a:r>
-          </a:p>
-          <a:p>
-            <a:r>
-              <a:rPr lang="ru-RU" dirty="0"/>
-              <a:t>Все три конструкции взаимозаменяемы по выразительной силе.</a:t>
+              <a:rPr lang="nn-NO" b="0" dirty="0">
+                <a:solidFill>
+                  <a:srgbClr val="000000"/>
+                </a:solidFill>
+                <a:effectLst/>
+                <a:latin typeface="Consolas" panose="020B0609020204030204" pitchFamily="49" charset="0"/>
+              </a:rPr>
+              <a:t> (</a:t>
+            </a:r>
+            <a:r>
+              <a:rPr lang="nn-NO" b="0" dirty="0">
+                <a:solidFill>
+                  <a:srgbClr val="0000FF"/>
+                </a:solidFill>
+                <a:effectLst/>
+                <a:latin typeface="Consolas" panose="020B0609020204030204" pitchFamily="49" charset="0"/>
+              </a:rPr>
+              <a:t>int</a:t>
+            </a:r>
+            <a:r>
+              <a:rPr lang="nn-NO" b="0" dirty="0">
+                <a:solidFill>
+                  <a:srgbClr val="000000"/>
+                </a:solidFill>
+                <a:effectLst/>
+                <a:latin typeface="Consolas" panose="020B0609020204030204" pitchFamily="49" charset="0"/>
+              </a:rPr>
+              <a:t> i = </a:t>
+            </a:r>
+            <a:r>
+              <a:rPr lang="nn-NO" b="0" dirty="0">
+                <a:solidFill>
+                  <a:srgbClr val="098658"/>
+                </a:solidFill>
+                <a:effectLst/>
+                <a:latin typeface="Consolas" panose="020B0609020204030204" pitchFamily="49" charset="0"/>
+              </a:rPr>
+              <a:t>0</a:t>
+            </a:r>
+            <a:r>
+              <a:rPr lang="nn-NO" b="0" dirty="0">
+                <a:solidFill>
+                  <a:srgbClr val="000000"/>
+                </a:solidFill>
+                <a:effectLst/>
+                <a:latin typeface="Consolas" panose="020B0609020204030204" pitchFamily="49" charset="0"/>
+              </a:rPr>
+              <a:t>; i &lt; </a:t>
+            </a:r>
+            <a:r>
+              <a:rPr lang="nn-NO" b="0" dirty="0">
+                <a:solidFill>
+                  <a:srgbClr val="098658"/>
+                </a:solidFill>
+                <a:effectLst/>
+                <a:latin typeface="Consolas" panose="020B0609020204030204" pitchFamily="49" charset="0"/>
+              </a:rPr>
+              <a:t>10</a:t>
+            </a:r>
+            <a:r>
+              <a:rPr lang="nn-NO" b="0" dirty="0">
+                <a:solidFill>
+                  <a:srgbClr val="000000"/>
+                </a:solidFill>
+                <a:effectLst/>
+                <a:latin typeface="Consolas" panose="020B0609020204030204" pitchFamily="49" charset="0"/>
+              </a:rPr>
+              <a:t>; i++) {</a:t>
+            </a:r>
+          </a:p>
+          <a:p>
+            <a:pPr>
+              <a:buNone/>
+            </a:pPr>
+            <a:r>
+              <a:rPr lang="nn-NO" b="0" dirty="0">
+                <a:solidFill>
+                  <a:srgbClr val="000000"/>
+                </a:solidFill>
+                <a:effectLst/>
+                <a:latin typeface="Consolas" panose="020B0609020204030204" pitchFamily="49" charset="0"/>
+              </a:rPr>
+              <a:t>    </a:t>
+            </a:r>
+            <a:r>
+              <a:rPr lang="nn-NO" b="0" dirty="0">
+                <a:solidFill>
+                  <a:srgbClr val="8F08C4"/>
+                </a:solidFill>
+                <a:effectLst/>
+                <a:latin typeface="Consolas" panose="020B0609020204030204" pitchFamily="49" charset="0"/>
+              </a:rPr>
+              <a:t>if</a:t>
+            </a:r>
+            <a:r>
+              <a:rPr lang="nn-NO" b="0" dirty="0">
+                <a:solidFill>
+                  <a:srgbClr val="000000"/>
+                </a:solidFill>
+                <a:effectLst/>
+                <a:latin typeface="Consolas" panose="020B0609020204030204" pitchFamily="49" charset="0"/>
+              </a:rPr>
+              <a:t> (i == </a:t>
+            </a:r>
+            <a:r>
+              <a:rPr lang="nn-NO" b="0" dirty="0">
+                <a:solidFill>
+                  <a:srgbClr val="098658"/>
+                </a:solidFill>
+                <a:effectLst/>
+                <a:latin typeface="Consolas" panose="020B0609020204030204" pitchFamily="49" charset="0"/>
+              </a:rPr>
+              <a:t>5</a:t>
+            </a:r>
+            <a:r>
+              <a:rPr lang="nn-NO" b="0" dirty="0">
+                <a:solidFill>
+                  <a:srgbClr val="000000"/>
+                </a:solidFill>
+                <a:effectLst/>
+                <a:latin typeface="Consolas" panose="020B0609020204030204" pitchFamily="49" charset="0"/>
+              </a:rPr>
+              <a:t>) {</a:t>
+            </a:r>
+          </a:p>
+          <a:p>
+            <a:pPr>
+              <a:buNone/>
+            </a:pPr>
+            <a:r>
+              <a:rPr lang="nn-NO" b="0" dirty="0">
+                <a:solidFill>
+                  <a:srgbClr val="000000"/>
+                </a:solidFill>
+                <a:effectLst/>
+                <a:latin typeface="Consolas" panose="020B0609020204030204" pitchFamily="49" charset="0"/>
+              </a:rPr>
+              <a:t>        </a:t>
+            </a:r>
+            <a:r>
+              <a:rPr lang="nn-NO" b="0" dirty="0">
+                <a:solidFill>
+                  <a:srgbClr val="8F08C4"/>
+                </a:solidFill>
+                <a:effectLst/>
+                <a:latin typeface="Consolas" panose="020B0609020204030204" pitchFamily="49" charset="0"/>
+              </a:rPr>
+              <a:t>break</a:t>
+            </a:r>
+            <a:r>
+              <a:rPr lang="nn-NO" b="0" dirty="0">
+                <a:solidFill>
+                  <a:srgbClr val="000000"/>
+                </a:solidFill>
+                <a:effectLst/>
+                <a:latin typeface="Consolas" panose="020B0609020204030204" pitchFamily="49" charset="0"/>
+              </a:rPr>
+              <a:t>;</a:t>
+            </a:r>
+          </a:p>
+          <a:p>
+            <a:pPr>
+              <a:buNone/>
+            </a:pPr>
+            <a:r>
+              <a:rPr lang="nn-NO" b="0" dirty="0">
+                <a:solidFill>
+                  <a:srgbClr val="000000"/>
+                </a:solidFill>
+                <a:effectLst/>
+                <a:latin typeface="Consolas" panose="020B0609020204030204" pitchFamily="49" charset="0"/>
+              </a:rPr>
+              <a:t>    }</a:t>
+            </a:r>
+          </a:p>
+          <a:p>
+            <a:pPr>
+              <a:buNone/>
+            </a:pPr>
+            <a:r>
+              <a:rPr lang="nn-NO" b="0" dirty="0">
+                <a:solidFill>
+                  <a:srgbClr val="000000"/>
+                </a:solidFill>
+                <a:effectLst/>
+                <a:latin typeface="Consolas" panose="020B0609020204030204" pitchFamily="49" charset="0"/>
+              </a:rPr>
+              <a:t>    </a:t>
+            </a:r>
+            <a:r>
+              <a:rPr lang="nn-NO" b="0" dirty="0">
+                <a:solidFill>
+                  <a:srgbClr val="74531F"/>
+                </a:solidFill>
+                <a:effectLst/>
+                <a:latin typeface="Consolas" panose="020B0609020204030204" pitchFamily="49" charset="0"/>
+              </a:rPr>
+              <a:t>printf</a:t>
+            </a:r>
+            <a:r>
+              <a:rPr lang="nn-NO" b="0" dirty="0">
+                <a:solidFill>
+                  <a:srgbClr val="000000"/>
+                </a:solidFill>
+                <a:effectLst/>
+                <a:latin typeface="Consolas" panose="020B0609020204030204" pitchFamily="49" charset="0"/>
+              </a:rPr>
+              <a:t>(</a:t>
+            </a:r>
+            <a:r>
+              <a:rPr lang="nn-NO" b="0" dirty="0">
+                <a:solidFill>
+                  <a:srgbClr val="E21F1F"/>
+                </a:solidFill>
+                <a:effectLst/>
+                <a:latin typeface="Consolas" panose="020B0609020204030204" pitchFamily="49" charset="0"/>
+              </a:rPr>
+              <a:t>"</a:t>
+            </a:r>
+            <a:r>
+              <a:rPr lang="nn-NO" b="0" dirty="0">
+                <a:solidFill>
+                  <a:srgbClr val="1F377F"/>
+                </a:solidFill>
+                <a:effectLst/>
+                <a:latin typeface="Consolas" panose="020B0609020204030204" pitchFamily="49" charset="0"/>
+              </a:rPr>
+              <a:t>%d,</a:t>
+            </a:r>
+            <a:r>
+              <a:rPr lang="nn-NO" b="0" dirty="0">
+                <a:solidFill>
+                  <a:srgbClr val="B776FB"/>
+                </a:solidFill>
+                <a:effectLst/>
+                <a:latin typeface="Consolas" panose="020B0609020204030204" pitchFamily="49" charset="0"/>
+              </a:rPr>
+              <a:t> </a:t>
+            </a:r>
+            <a:r>
+              <a:rPr lang="nn-NO" b="0" dirty="0">
+                <a:solidFill>
+                  <a:srgbClr val="E21F1F"/>
+                </a:solidFill>
+                <a:effectLst/>
+                <a:latin typeface="Consolas" panose="020B0609020204030204" pitchFamily="49" charset="0"/>
+              </a:rPr>
+              <a:t>"</a:t>
+            </a:r>
+            <a:r>
+              <a:rPr lang="nn-NO" b="0" dirty="0">
+                <a:solidFill>
+                  <a:srgbClr val="000000"/>
+                </a:solidFill>
+                <a:effectLst/>
+                <a:latin typeface="Consolas" panose="020B0609020204030204" pitchFamily="49" charset="0"/>
+              </a:rPr>
+              <a:t>, i);</a:t>
+            </a:r>
+          </a:p>
+          <a:p>
+            <a:pPr>
+              <a:buNone/>
+            </a:pPr>
+            <a:r>
+              <a:rPr lang="nn-NO" b="0" dirty="0">
+                <a:solidFill>
+                  <a:srgbClr val="000000"/>
+                </a:solidFill>
+                <a:effectLst/>
+                <a:latin typeface="Consolas" panose="020B0609020204030204" pitchFamily="49" charset="0"/>
+              </a:rPr>
+              <a:t>}</a:t>
+            </a:r>
+          </a:p>
+        </p:txBody>
+      </p:sp>
+      <p:sp>
+        <p:nvSpPr>
+          <p:cNvPr id="10" name="TextBox 9">
+            <a:extLst>
+              <a:ext uri="{FF2B5EF4-FFF2-40B4-BE49-F238E27FC236}">
+                <a16:creationId xmlns:a16="http://schemas.microsoft.com/office/drawing/2014/main" id="{C6D93500-CF0B-9632-997D-8BAA5A30F151}"/>
+              </a:ext>
+            </a:extLst>
+          </p:cNvPr>
+          <p:cNvSpPr txBox="1"/>
+          <p:nvPr/>
+        </p:nvSpPr>
+        <p:spPr>
+          <a:xfrm>
+            <a:off x="6306591" y="4001293"/>
+            <a:ext cx="2554776" cy="369332"/>
+          </a:xfrm>
+          <a:prstGeom prst="rect">
+            <a:avLst/>
+          </a:prstGeom>
+        </p:spPr>
+        <p:style>
+          <a:lnRef idx="2">
+            <a:schemeClr val="dk1">
+              <a:shade val="15000"/>
+            </a:schemeClr>
+          </a:lnRef>
+          <a:fillRef idx="1">
+            <a:schemeClr val="dk1"/>
+          </a:fillRef>
+          <a:effectRef idx="0">
+            <a:schemeClr val="dk1"/>
+          </a:effectRef>
+          <a:fontRef idx="minor">
+            <a:schemeClr val="lt1"/>
+          </a:fontRef>
+        </p:style>
+        <p:txBody>
+          <a:bodyPr wrap="square">
+            <a:spAutoFit/>
+          </a:bodyPr>
+          <a:lstStyle/>
+          <a:p>
+            <a:r>
+              <a:rPr lang="en-US" dirty="0">
+                <a:latin typeface="Consolas" panose="020B0609020204030204" pitchFamily="49" charset="0"/>
+              </a:rPr>
+              <a:t>0, 1, 2, 3, 4,</a:t>
             </a:r>
           </a:p>
         </p:txBody>
@@ -28868,7 +30197,7 @@
     </p:spTree>
     <p:extLst>
       <p:ext uri="{BB962C8B-B14F-4D97-AF65-F5344CB8AC3E}">
-        <p14:creationId xmlns:p14="http://schemas.microsoft.com/office/powerpoint/2010/main" val="4171260144"/>
+        <p14:creationId xmlns:p14="http://schemas.microsoft.com/office/powerpoint/2010/main" val="4001988544"/>
       </p:ext>
     </p:extLst>
   </p:cSld>
@@ -28900,7 +30229,7 @@
           <p:cNvPr id="4" name="Title 3">
             <a:extLst>
               <a:ext uri="{FF2B5EF4-FFF2-40B4-BE49-F238E27FC236}">
-                <a16:creationId xmlns:a16="http://schemas.microsoft.com/office/drawing/2014/main" id="{407664B8-DCDB-1E7F-7C54-E0B44F90AB49}"/>
+                <a16:creationId xmlns:a16="http://schemas.microsoft.com/office/drawing/2014/main" id="{90CD6FEA-6358-5600-92D8-24F7F35F2496}"/>
               </a:ext>
             </a:extLst>
           </p:cNvPr>
@@ -28917,8 +30246,12 @@
           <a:lstStyle/>
           <a:p>
             <a:r>
-              <a:rPr lang="ru-RU" dirty="0"/>
-              <a:t>Массивы</a:t>
+              <a:rPr lang="en-US" dirty="0"/>
+              <a:t>break </a:t>
+            </a:r>
+            <a:r>
+              <a:rPr lang="ru-RU" dirty="0"/>
+              <a:t>во вложенных циклах</a:t>
             </a:r>
             <a:endParaRPr lang="en-US" dirty="0"/>
           </a:p>
@@ -28926,25 +30259,1061 @@
       </p:sp>
       <p:sp>
         <p:nvSpPr>
-          <p:cNvPr id="5" name="Text Placeholder 4">
+          <p:cNvPr id="8" name="TextBox 7">
             <a:extLst>
               <a:ext uri="{FF2B5EF4-FFF2-40B4-BE49-F238E27FC236}">
-                <a16:creationId xmlns:a16="http://schemas.microsoft.com/office/drawing/2014/main" id="{5A725672-6867-8E55-49D5-027659DC8F59}"/>
+                <a16:creationId xmlns:a16="http://schemas.microsoft.com/office/drawing/2014/main" id="{71AADF82-19FE-AC3B-542D-2D4980A98199}"/>
               </a:ext>
             </a:extLst>
           </p:cNvPr>
-          <p:cNvSpPr>
-            <a:spLocks noGrp="1"/>
-          </p:cNvSpPr>
-          <p:nvPr>
-            <p:ph type="body" idx="1"/>
-          </p:nvPr>
+          <p:cNvSpPr txBox="1"/>
+          <p:nvPr/>
         </p:nvSpPr>
-        <p:spPr/>
+        <p:spPr>
+          <a:xfrm>
+            <a:off x="838200" y="6308209"/>
+            <a:ext cx="6093228" cy="369332"/>
+          </a:xfrm>
+          <a:prstGeom prst="rect">
+            <a:avLst/>
+          </a:prstGeom>
+          <a:noFill/>
+        </p:spPr>
         <p:txBody>
-          <a:bodyPr/>
+          <a:bodyPr wrap="square">
+            <a:spAutoFit/>
+          </a:bodyPr>
           <a:lstStyle/>
           <a:p>
+            <a:r>
+              <a:rPr lang="en-US" dirty="0">
+                <a:hlinkClick r:id="rId3"/>
+              </a:rPr>
+              <a:t>https://godbolt.org/z/TKK9nG818</a:t>
+            </a:r>
+            <a:endParaRPr lang="en-US" dirty="0"/>
+          </a:p>
+        </p:txBody>
+      </p:sp>
+      <p:sp>
+        <p:nvSpPr>
+          <p:cNvPr id="10" name="TextBox 9">
+            <a:extLst>
+              <a:ext uri="{FF2B5EF4-FFF2-40B4-BE49-F238E27FC236}">
+                <a16:creationId xmlns:a16="http://schemas.microsoft.com/office/drawing/2014/main" id="{4B8989F6-F7F0-2ADD-C89E-1F1C4B9FF476}"/>
+              </a:ext>
+            </a:extLst>
+          </p:cNvPr>
+          <p:cNvSpPr txBox="1"/>
+          <p:nvPr/>
+        </p:nvSpPr>
+        <p:spPr>
+          <a:xfrm>
+            <a:off x="838200" y="1783906"/>
+            <a:ext cx="6093228" cy="3970318"/>
+          </a:xfrm>
+          <a:prstGeom prst="rect">
+            <a:avLst/>
+          </a:prstGeom>
+          <a:noFill/>
+        </p:spPr>
+        <p:txBody>
+          <a:bodyPr wrap="square">
+            <a:spAutoFit/>
+          </a:bodyPr>
+          <a:lstStyle/>
+          <a:p>
+            <a:pPr>
+              <a:buNone/>
+            </a:pPr>
+            <a:r>
+              <a:rPr lang="en-US" b="0" dirty="0">
+                <a:solidFill>
+                  <a:srgbClr val="0000FF"/>
+                </a:solidFill>
+                <a:effectLst/>
+                <a:latin typeface="Consolas" panose="020B0609020204030204" pitchFamily="49" charset="0"/>
+              </a:rPr>
+              <a:t>#include</a:t>
+            </a:r>
+            <a:r>
+              <a:rPr lang="en-US" b="0" dirty="0">
+                <a:solidFill>
+                  <a:srgbClr val="000000"/>
+                </a:solidFill>
+                <a:effectLst/>
+                <a:latin typeface="Consolas" panose="020B0609020204030204" pitchFamily="49" charset="0"/>
+              </a:rPr>
+              <a:t> </a:t>
+            </a:r>
+            <a:r>
+              <a:rPr lang="en-US" b="0" dirty="0">
+                <a:solidFill>
+                  <a:srgbClr val="0000FF"/>
+                </a:solidFill>
+                <a:effectLst/>
+                <a:latin typeface="Consolas" panose="020B0609020204030204" pitchFamily="49" charset="0"/>
+              </a:rPr>
+              <a:t>&lt;</a:t>
+            </a:r>
+            <a:r>
+              <a:rPr lang="en-US" b="0" dirty="0" err="1">
+                <a:solidFill>
+                  <a:srgbClr val="A31515"/>
+                </a:solidFill>
+                <a:effectLst/>
+                <a:latin typeface="Consolas" panose="020B0609020204030204" pitchFamily="49" charset="0"/>
+              </a:rPr>
+              <a:t>stdio.h</a:t>
+            </a:r>
+            <a:r>
+              <a:rPr lang="en-US" b="0" dirty="0">
+                <a:solidFill>
+                  <a:srgbClr val="0000FF"/>
+                </a:solidFill>
+                <a:effectLst/>
+                <a:latin typeface="Consolas" panose="020B0609020204030204" pitchFamily="49" charset="0"/>
+              </a:rPr>
+              <a:t>&gt;</a:t>
+            </a:r>
+            <a:br>
+              <a:rPr lang="en-US" b="0" dirty="0">
+                <a:solidFill>
+                  <a:srgbClr val="000000"/>
+                </a:solidFill>
+                <a:effectLst/>
+                <a:latin typeface="Consolas" panose="020B0609020204030204" pitchFamily="49" charset="0"/>
+              </a:rPr>
+            </a:br>
+            <a:endParaRPr lang="en-US" b="0" dirty="0">
+              <a:solidFill>
+                <a:srgbClr val="000000"/>
+              </a:solidFill>
+              <a:effectLst/>
+              <a:latin typeface="Consolas" panose="020B0609020204030204" pitchFamily="49" charset="0"/>
+            </a:endParaRPr>
+          </a:p>
+          <a:p>
+            <a:pPr>
+              <a:buNone/>
+            </a:pPr>
+            <a:r>
+              <a:rPr lang="en-US" b="0" dirty="0">
+                <a:solidFill>
+                  <a:srgbClr val="0000FF"/>
+                </a:solidFill>
+                <a:effectLst/>
+                <a:latin typeface="Consolas" panose="020B0609020204030204" pitchFamily="49" charset="0"/>
+              </a:rPr>
+              <a:t>int</a:t>
+            </a:r>
+            <a:r>
+              <a:rPr lang="en-US" b="0" dirty="0">
+                <a:solidFill>
+                  <a:srgbClr val="000000"/>
+                </a:solidFill>
+                <a:effectLst/>
+                <a:latin typeface="Consolas" panose="020B0609020204030204" pitchFamily="49" charset="0"/>
+              </a:rPr>
+              <a:t> main() {</a:t>
+            </a:r>
+          </a:p>
+          <a:p>
+            <a:pPr>
+              <a:buNone/>
+            </a:pPr>
+            <a:r>
+              <a:rPr lang="en-US" b="0" dirty="0">
+                <a:solidFill>
+                  <a:srgbClr val="000000"/>
+                </a:solidFill>
+                <a:effectLst/>
+                <a:latin typeface="Consolas" panose="020B0609020204030204" pitchFamily="49" charset="0"/>
+              </a:rPr>
+              <a:t>    </a:t>
+            </a:r>
+            <a:r>
+              <a:rPr lang="en-US" b="0" dirty="0">
+                <a:solidFill>
+                  <a:srgbClr val="0000FF"/>
+                </a:solidFill>
+                <a:effectLst/>
+                <a:latin typeface="Consolas" panose="020B0609020204030204" pitchFamily="49" charset="0"/>
+              </a:rPr>
+              <a:t>for</a:t>
+            </a:r>
+            <a:r>
+              <a:rPr lang="en-US" b="0" dirty="0">
+                <a:solidFill>
+                  <a:srgbClr val="000000"/>
+                </a:solidFill>
+                <a:effectLst/>
+                <a:latin typeface="Consolas" panose="020B0609020204030204" pitchFamily="49" charset="0"/>
+              </a:rPr>
+              <a:t> (</a:t>
+            </a:r>
+            <a:r>
+              <a:rPr lang="en-US" b="0" dirty="0">
+                <a:solidFill>
+                  <a:srgbClr val="0000FF"/>
+                </a:solidFill>
+                <a:effectLst/>
+                <a:latin typeface="Consolas" panose="020B0609020204030204" pitchFamily="49" charset="0"/>
+              </a:rPr>
+              <a:t>int</a:t>
+            </a:r>
+            <a:r>
+              <a:rPr lang="en-US" b="0" dirty="0">
+                <a:solidFill>
+                  <a:srgbClr val="000000"/>
+                </a:solidFill>
+                <a:effectLst/>
+                <a:latin typeface="Consolas" panose="020B0609020204030204" pitchFamily="49" charset="0"/>
+              </a:rPr>
+              <a:t> </a:t>
+            </a:r>
+            <a:r>
+              <a:rPr lang="en-US" b="0" dirty="0" err="1">
+                <a:solidFill>
+                  <a:srgbClr val="000000"/>
+                </a:solidFill>
+                <a:effectLst/>
+                <a:latin typeface="Consolas" panose="020B0609020204030204" pitchFamily="49" charset="0"/>
+              </a:rPr>
+              <a:t>i</a:t>
+            </a:r>
+            <a:r>
+              <a:rPr lang="en-US" b="0" dirty="0">
+                <a:solidFill>
+                  <a:srgbClr val="000000"/>
+                </a:solidFill>
+                <a:effectLst/>
+                <a:latin typeface="Consolas" panose="020B0609020204030204" pitchFamily="49" charset="0"/>
+              </a:rPr>
+              <a:t> = </a:t>
+            </a:r>
+            <a:r>
+              <a:rPr lang="en-US" b="0" dirty="0">
+                <a:solidFill>
+                  <a:srgbClr val="098658"/>
+                </a:solidFill>
+                <a:effectLst/>
+                <a:latin typeface="Consolas" panose="020B0609020204030204" pitchFamily="49" charset="0"/>
+              </a:rPr>
+              <a:t>0</a:t>
+            </a:r>
+            <a:r>
+              <a:rPr lang="en-US" b="0" dirty="0">
+                <a:solidFill>
+                  <a:srgbClr val="000000"/>
+                </a:solidFill>
+                <a:effectLst/>
+                <a:latin typeface="Consolas" panose="020B0609020204030204" pitchFamily="49" charset="0"/>
+              </a:rPr>
+              <a:t>; </a:t>
+            </a:r>
+            <a:r>
+              <a:rPr lang="en-US" b="0" dirty="0" err="1">
+                <a:solidFill>
+                  <a:srgbClr val="000000"/>
+                </a:solidFill>
+                <a:effectLst/>
+                <a:latin typeface="Consolas" panose="020B0609020204030204" pitchFamily="49" charset="0"/>
+              </a:rPr>
+              <a:t>i</a:t>
+            </a:r>
+            <a:r>
+              <a:rPr lang="en-US" b="0" dirty="0">
+                <a:solidFill>
+                  <a:srgbClr val="000000"/>
+                </a:solidFill>
+                <a:effectLst/>
+                <a:latin typeface="Consolas" panose="020B0609020204030204" pitchFamily="49" charset="0"/>
+              </a:rPr>
+              <a:t> &lt; </a:t>
+            </a:r>
+            <a:r>
+              <a:rPr lang="en-US" b="0" dirty="0">
+                <a:solidFill>
+                  <a:srgbClr val="098658"/>
+                </a:solidFill>
+                <a:effectLst/>
+                <a:latin typeface="Consolas" panose="020B0609020204030204" pitchFamily="49" charset="0"/>
+              </a:rPr>
+              <a:t>3</a:t>
+            </a:r>
+            <a:r>
+              <a:rPr lang="en-US" b="0" dirty="0">
+                <a:solidFill>
+                  <a:srgbClr val="000000"/>
+                </a:solidFill>
+                <a:effectLst/>
+                <a:latin typeface="Consolas" panose="020B0609020204030204" pitchFamily="49" charset="0"/>
+              </a:rPr>
+              <a:t>; </a:t>
+            </a:r>
+            <a:r>
+              <a:rPr lang="en-US" b="0" dirty="0" err="1">
+                <a:solidFill>
+                  <a:srgbClr val="000000"/>
+                </a:solidFill>
+                <a:effectLst/>
+                <a:latin typeface="Consolas" panose="020B0609020204030204" pitchFamily="49" charset="0"/>
+              </a:rPr>
+              <a:t>i</a:t>
+            </a:r>
+            <a:r>
+              <a:rPr lang="en-US" b="0" dirty="0">
+                <a:solidFill>
+                  <a:srgbClr val="000000"/>
+                </a:solidFill>
+                <a:effectLst/>
+                <a:latin typeface="Consolas" panose="020B0609020204030204" pitchFamily="49" charset="0"/>
+              </a:rPr>
+              <a:t>++) {</a:t>
+            </a:r>
+          </a:p>
+          <a:p>
+            <a:pPr>
+              <a:buNone/>
+            </a:pPr>
+            <a:r>
+              <a:rPr lang="en-US" b="0" dirty="0">
+                <a:solidFill>
+                  <a:srgbClr val="000000"/>
+                </a:solidFill>
+                <a:effectLst/>
+                <a:latin typeface="Consolas" panose="020B0609020204030204" pitchFamily="49" charset="0"/>
+              </a:rPr>
+              <a:t>        </a:t>
+            </a:r>
+            <a:r>
+              <a:rPr lang="en-US" b="0" dirty="0">
+                <a:solidFill>
+                  <a:srgbClr val="0000FF"/>
+                </a:solidFill>
+                <a:effectLst/>
+                <a:latin typeface="Consolas" panose="020B0609020204030204" pitchFamily="49" charset="0"/>
+              </a:rPr>
+              <a:t>for</a:t>
+            </a:r>
+            <a:r>
+              <a:rPr lang="en-US" b="0" dirty="0">
+                <a:solidFill>
+                  <a:srgbClr val="000000"/>
+                </a:solidFill>
+                <a:effectLst/>
+                <a:latin typeface="Consolas" panose="020B0609020204030204" pitchFamily="49" charset="0"/>
+              </a:rPr>
+              <a:t> (</a:t>
+            </a:r>
+            <a:r>
+              <a:rPr lang="en-US" b="0" dirty="0">
+                <a:solidFill>
+                  <a:srgbClr val="0000FF"/>
+                </a:solidFill>
+                <a:effectLst/>
+                <a:latin typeface="Consolas" panose="020B0609020204030204" pitchFamily="49" charset="0"/>
+              </a:rPr>
+              <a:t>int</a:t>
+            </a:r>
+            <a:r>
+              <a:rPr lang="en-US" b="0" dirty="0">
+                <a:solidFill>
+                  <a:srgbClr val="000000"/>
+                </a:solidFill>
+                <a:effectLst/>
+                <a:latin typeface="Consolas" panose="020B0609020204030204" pitchFamily="49" charset="0"/>
+              </a:rPr>
+              <a:t> j = </a:t>
+            </a:r>
+            <a:r>
+              <a:rPr lang="en-US" b="0" dirty="0">
+                <a:solidFill>
+                  <a:srgbClr val="098658"/>
+                </a:solidFill>
+                <a:effectLst/>
+                <a:latin typeface="Consolas" panose="020B0609020204030204" pitchFamily="49" charset="0"/>
+              </a:rPr>
+              <a:t>0</a:t>
+            </a:r>
+            <a:r>
+              <a:rPr lang="en-US" b="0" dirty="0">
+                <a:solidFill>
+                  <a:srgbClr val="000000"/>
+                </a:solidFill>
+                <a:effectLst/>
+                <a:latin typeface="Consolas" panose="020B0609020204030204" pitchFamily="49" charset="0"/>
+              </a:rPr>
+              <a:t>; j &lt; </a:t>
+            </a:r>
+            <a:r>
+              <a:rPr lang="en-US" b="0" dirty="0">
+                <a:solidFill>
+                  <a:srgbClr val="098658"/>
+                </a:solidFill>
+                <a:effectLst/>
+                <a:latin typeface="Consolas" panose="020B0609020204030204" pitchFamily="49" charset="0"/>
+              </a:rPr>
+              <a:t>5</a:t>
+            </a:r>
+            <a:r>
+              <a:rPr lang="en-US" b="0" dirty="0">
+                <a:solidFill>
+                  <a:srgbClr val="000000"/>
+                </a:solidFill>
+                <a:effectLst/>
+                <a:latin typeface="Consolas" panose="020B0609020204030204" pitchFamily="49" charset="0"/>
+              </a:rPr>
+              <a:t>; </a:t>
+            </a:r>
+            <a:r>
+              <a:rPr lang="en-US" b="0" dirty="0" err="1">
+                <a:solidFill>
+                  <a:srgbClr val="000000"/>
+                </a:solidFill>
+                <a:effectLst/>
+                <a:latin typeface="Consolas" panose="020B0609020204030204" pitchFamily="49" charset="0"/>
+              </a:rPr>
+              <a:t>j++</a:t>
+            </a:r>
+            <a:r>
+              <a:rPr lang="en-US" b="0" dirty="0">
+                <a:solidFill>
+                  <a:srgbClr val="000000"/>
+                </a:solidFill>
+                <a:effectLst/>
+                <a:latin typeface="Consolas" panose="020B0609020204030204" pitchFamily="49" charset="0"/>
+              </a:rPr>
+              <a:t>) {</a:t>
+            </a:r>
+          </a:p>
+          <a:p>
+            <a:pPr>
+              <a:buNone/>
+            </a:pPr>
+            <a:r>
+              <a:rPr lang="en-US" b="0" dirty="0">
+                <a:solidFill>
+                  <a:srgbClr val="000000"/>
+                </a:solidFill>
+                <a:effectLst/>
+                <a:latin typeface="Consolas" panose="020B0609020204030204" pitchFamily="49" charset="0"/>
+              </a:rPr>
+              <a:t>            </a:t>
+            </a:r>
+            <a:r>
+              <a:rPr lang="en-US" b="0" dirty="0">
+                <a:solidFill>
+                  <a:srgbClr val="0000FF"/>
+                </a:solidFill>
+                <a:effectLst/>
+                <a:latin typeface="Consolas" panose="020B0609020204030204" pitchFamily="49" charset="0"/>
+              </a:rPr>
+              <a:t>if</a:t>
+            </a:r>
+            <a:r>
+              <a:rPr lang="en-US" b="0" dirty="0">
+                <a:solidFill>
+                  <a:srgbClr val="000000"/>
+                </a:solidFill>
+                <a:effectLst/>
+                <a:latin typeface="Consolas" panose="020B0609020204030204" pitchFamily="49" charset="0"/>
+              </a:rPr>
+              <a:t> (j == </a:t>
+            </a:r>
+            <a:r>
+              <a:rPr lang="en-US" b="0" dirty="0">
+                <a:solidFill>
+                  <a:srgbClr val="098658"/>
+                </a:solidFill>
+                <a:effectLst/>
+                <a:latin typeface="Consolas" panose="020B0609020204030204" pitchFamily="49" charset="0"/>
+              </a:rPr>
+              <a:t>2</a:t>
+            </a:r>
+            <a:r>
+              <a:rPr lang="en-US" b="0" dirty="0">
+                <a:solidFill>
+                  <a:srgbClr val="000000"/>
+                </a:solidFill>
+                <a:effectLst/>
+                <a:latin typeface="Consolas" panose="020B0609020204030204" pitchFamily="49" charset="0"/>
+              </a:rPr>
+              <a:t>) {</a:t>
+            </a:r>
+          </a:p>
+          <a:p>
+            <a:pPr>
+              <a:buNone/>
+            </a:pPr>
+            <a:r>
+              <a:rPr lang="en-US" b="0" dirty="0">
+                <a:solidFill>
+                  <a:srgbClr val="000000"/>
+                </a:solidFill>
+                <a:effectLst/>
+                <a:latin typeface="Consolas" panose="020B0609020204030204" pitchFamily="49" charset="0"/>
+              </a:rPr>
+              <a:t>                </a:t>
+            </a:r>
+            <a:r>
+              <a:rPr lang="en-US" b="0" dirty="0">
+                <a:solidFill>
+                  <a:srgbClr val="0000FF"/>
+                </a:solidFill>
+                <a:effectLst/>
+                <a:latin typeface="Consolas" panose="020B0609020204030204" pitchFamily="49" charset="0"/>
+              </a:rPr>
+              <a:t>break</a:t>
+            </a:r>
+            <a:r>
+              <a:rPr lang="en-US" b="0" dirty="0">
+                <a:solidFill>
+                  <a:srgbClr val="000000"/>
+                </a:solidFill>
+                <a:effectLst/>
+                <a:latin typeface="Consolas" panose="020B0609020204030204" pitchFamily="49" charset="0"/>
+              </a:rPr>
+              <a:t>;</a:t>
+            </a:r>
+          </a:p>
+          <a:p>
+            <a:pPr>
+              <a:buNone/>
+            </a:pPr>
+            <a:r>
+              <a:rPr lang="en-US" b="0" dirty="0">
+                <a:solidFill>
+                  <a:srgbClr val="000000"/>
+                </a:solidFill>
+                <a:effectLst/>
+                <a:latin typeface="Consolas" panose="020B0609020204030204" pitchFamily="49" charset="0"/>
+              </a:rPr>
+              <a:t>            }</a:t>
+            </a:r>
+          </a:p>
+          <a:p>
+            <a:pPr>
+              <a:buNone/>
+            </a:pPr>
+            <a:r>
+              <a:rPr lang="en-US" b="0" dirty="0">
+                <a:solidFill>
+                  <a:srgbClr val="000000"/>
+                </a:solidFill>
+                <a:effectLst/>
+                <a:latin typeface="Consolas" panose="020B0609020204030204" pitchFamily="49" charset="0"/>
+              </a:rPr>
+              <a:t>            </a:t>
+            </a:r>
+            <a:r>
+              <a:rPr lang="en-US" b="0" dirty="0" err="1">
+                <a:solidFill>
+                  <a:srgbClr val="000000"/>
+                </a:solidFill>
+                <a:effectLst/>
+                <a:latin typeface="Consolas" panose="020B0609020204030204" pitchFamily="49" charset="0"/>
+              </a:rPr>
+              <a:t>printf</a:t>
+            </a:r>
+            <a:r>
+              <a:rPr lang="en-US" b="0" dirty="0">
+                <a:solidFill>
+                  <a:srgbClr val="000000"/>
+                </a:solidFill>
+                <a:effectLst/>
+                <a:latin typeface="Consolas" panose="020B0609020204030204" pitchFamily="49" charset="0"/>
+              </a:rPr>
+              <a:t>(</a:t>
+            </a:r>
+            <a:r>
+              <a:rPr lang="en-US" b="0" dirty="0">
+                <a:solidFill>
+                  <a:srgbClr val="A31515"/>
+                </a:solidFill>
+                <a:effectLst/>
+                <a:latin typeface="Consolas" panose="020B0609020204030204" pitchFamily="49" charset="0"/>
+              </a:rPr>
+              <a:t>"</a:t>
+            </a:r>
+            <a:r>
+              <a:rPr lang="en-US" b="0" dirty="0" err="1">
+                <a:solidFill>
+                  <a:srgbClr val="A31515"/>
+                </a:solidFill>
+                <a:effectLst/>
+                <a:latin typeface="Consolas" panose="020B0609020204030204" pitchFamily="49" charset="0"/>
+              </a:rPr>
+              <a:t>i</a:t>
+            </a:r>
+            <a:r>
+              <a:rPr lang="en-US" b="0" dirty="0">
+                <a:solidFill>
+                  <a:srgbClr val="A31515"/>
+                </a:solidFill>
+                <a:effectLst/>
+                <a:latin typeface="Consolas" panose="020B0609020204030204" pitchFamily="49" charset="0"/>
+              </a:rPr>
+              <a:t>=%d j=%d\n"</a:t>
+            </a:r>
+            <a:r>
+              <a:rPr lang="en-US" b="0" dirty="0">
+                <a:solidFill>
+                  <a:srgbClr val="000000"/>
+                </a:solidFill>
+                <a:effectLst/>
+                <a:latin typeface="Consolas" panose="020B0609020204030204" pitchFamily="49" charset="0"/>
+              </a:rPr>
+              <a:t>, </a:t>
+            </a:r>
+            <a:r>
+              <a:rPr lang="en-US" b="0" dirty="0" err="1">
+                <a:solidFill>
+                  <a:srgbClr val="000000"/>
+                </a:solidFill>
+                <a:effectLst/>
+                <a:latin typeface="Consolas" panose="020B0609020204030204" pitchFamily="49" charset="0"/>
+              </a:rPr>
+              <a:t>i</a:t>
+            </a:r>
+            <a:r>
+              <a:rPr lang="en-US" b="0" dirty="0">
+                <a:solidFill>
+                  <a:srgbClr val="000000"/>
+                </a:solidFill>
+                <a:effectLst/>
+                <a:latin typeface="Consolas" panose="020B0609020204030204" pitchFamily="49" charset="0"/>
+              </a:rPr>
+              <a:t>, j);</a:t>
+            </a:r>
+          </a:p>
+          <a:p>
+            <a:pPr>
+              <a:buNone/>
+            </a:pPr>
+            <a:r>
+              <a:rPr lang="en-US" b="0" dirty="0">
+                <a:solidFill>
+                  <a:srgbClr val="000000"/>
+                </a:solidFill>
+                <a:effectLst/>
+                <a:latin typeface="Consolas" panose="020B0609020204030204" pitchFamily="49" charset="0"/>
+              </a:rPr>
+              <a:t>        }</a:t>
+            </a:r>
+            <a:endParaRPr lang="ru-RU" b="0" dirty="0">
+              <a:solidFill>
+                <a:srgbClr val="000000"/>
+              </a:solidFill>
+              <a:effectLst/>
+              <a:latin typeface="Consolas" panose="020B0609020204030204" pitchFamily="49" charset="0"/>
+            </a:endParaRPr>
+          </a:p>
+          <a:p>
+            <a:pPr>
+              <a:buNone/>
+            </a:pPr>
+            <a:endParaRPr lang="en-US" b="0" dirty="0">
+              <a:solidFill>
+                <a:srgbClr val="000000"/>
+              </a:solidFill>
+              <a:effectLst/>
+              <a:latin typeface="Consolas" panose="020B0609020204030204" pitchFamily="49" charset="0"/>
+            </a:endParaRPr>
+          </a:p>
+          <a:p>
+            <a:pPr>
+              <a:buNone/>
+            </a:pPr>
+            <a:r>
+              <a:rPr lang="en-US" b="0" dirty="0">
+                <a:solidFill>
+                  <a:srgbClr val="000000"/>
+                </a:solidFill>
+                <a:effectLst/>
+                <a:latin typeface="Consolas" panose="020B0609020204030204" pitchFamily="49" charset="0"/>
+              </a:rPr>
+              <a:t>        </a:t>
+            </a:r>
+            <a:r>
+              <a:rPr lang="en-US" b="0" dirty="0" err="1">
+                <a:solidFill>
+                  <a:srgbClr val="000000"/>
+                </a:solidFill>
+                <a:effectLst/>
+                <a:latin typeface="Consolas" panose="020B0609020204030204" pitchFamily="49" charset="0"/>
+              </a:rPr>
+              <a:t>printf</a:t>
+            </a:r>
+            <a:r>
+              <a:rPr lang="en-US" b="0" dirty="0">
+                <a:solidFill>
+                  <a:srgbClr val="000000"/>
+                </a:solidFill>
+                <a:effectLst/>
+                <a:latin typeface="Consolas" panose="020B0609020204030204" pitchFamily="49" charset="0"/>
+              </a:rPr>
+              <a:t>(</a:t>
+            </a:r>
+            <a:r>
+              <a:rPr lang="en-US" b="0" dirty="0">
+                <a:solidFill>
+                  <a:srgbClr val="A31515"/>
+                </a:solidFill>
+                <a:effectLst/>
+                <a:latin typeface="Consolas" panose="020B0609020204030204" pitchFamily="49" charset="0"/>
+              </a:rPr>
+              <a:t>"End of inner loop, </a:t>
+            </a:r>
+            <a:r>
+              <a:rPr lang="en-US" b="0" dirty="0" err="1">
+                <a:solidFill>
+                  <a:srgbClr val="A31515"/>
+                </a:solidFill>
+                <a:effectLst/>
+                <a:latin typeface="Consolas" panose="020B0609020204030204" pitchFamily="49" charset="0"/>
+              </a:rPr>
+              <a:t>i</a:t>
+            </a:r>
+            <a:r>
+              <a:rPr lang="en-US" b="0" dirty="0">
+                <a:solidFill>
+                  <a:srgbClr val="A31515"/>
+                </a:solidFill>
+                <a:effectLst/>
+                <a:latin typeface="Consolas" panose="020B0609020204030204" pitchFamily="49" charset="0"/>
+              </a:rPr>
+              <a:t>=%d\n"</a:t>
+            </a:r>
+            <a:r>
+              <a:rPr lang="en-US" b="0" dirty="0">
+                <a:solidFill>
+                  <a:srgbClr val="000000"/>
+                </a:solidFill>
+                <a:effectLst/>
+                <a:latin typeface="Consolas" panose="020B0609020204030204" pitchFamily="49" charset="0"/>
+              </a:rPr>
+              <a:t>, </a:t>
+            </a:r>
+            <a:r>
+              <a:rPr lang="en-US" b="0" dirty="0" err="1">
+                <a:solidFill>
+                  <a:srgbClr val="000000"/>
+                </a:solidFill>
+                <a:effectLst/>
+                <a:latin typeface="Consolas" panose="020B0609020204030204" pitchFamily="49" charset="0"/>
+              </a:rPr>
+              <a:t>i</a:t>
+            </a:r>
+            <a:r>
+              <a:rPr lang="en-US" b="0" dirty="0">
+                <a:solidFill>
+                  <a:srgbClr val="000000"/>
+                </a:solidFill>
+                <a:effectLst/>
+                <a:latin typeface="Consolas" panose="020B0609020204030204" pitchFamily="49" charset="0"/>
+              </a:rPr>
+              <a:t>);</a:t>
+            </a:r>
+          </a:p>
+          <a:p>
+            <a:pPr>
+              <a:buNone/>
+            </a:pPr>
+            <a:r>
+              <a:rPr lang="en-US" b="0" dirty="0">
+                <a:solidFill>
+                  <a:srgbClr val="000000"/>
+                </a:solidFill>
+                <a:effectLst/>
+                <a:latin typeface="Consolas" panose="020B0609020204030204" pitchFamily="49" charset="0"/>
+              </a:rPr>
+              <a:t>    }</a:t>
+            </a:r>
+          </a:p>
+          <a:p>
+            <a:pPr>
+              <a:buNone/>
+            </a:pPr>
+            <a:r>
+              <a:rPr lang="en-US" b="0" dirty="0">
+                <a:solidFill>
+                  <a:srgbClr val="000000"/>
+                </a:solidFill>
+                <a:effectLst/>
+                <a:latin typeface="Consolas" panose="020B0609020204030204" pitchFamily="49" charset="0"/>
+              </a:rPr>
+              <a:t>}</a:t>
+            </a:r>
+          </a:p>
+        </p:txBody>
+      </p:sp>
+      <p:sp>
+        <p:nvSpPr>
+          <p:cNvPr id="12" name="TextBox 11">
+            <a:extLst>
+              <a:ext uri="{FF2B5EF4-FFF2-40B4-BE49-F238E27FC236}">
+                <a16:creationId xmlns:a16="http://schemas.microsoft.com/office/drawing/2014/main" id="{9C50B467-D171-1D59-871A-780F1FECBC41}"/>
+              </a:ext>
+            </a:extLst>
+          </p:cNvPr>
+          <p:cNvSpPr txBox="1"/>
+          <p:nvPr/>
+        </p:nvSpPr>
+        <p:spPr>
+          <a:xfrm>
+            <a:off x="7381702" y="2014733"/>
+            <a:ext cx="3972098" cy="2585323"/>
+          </a:xfrm>
+          <a:prstGeom prst="rect">
+            <a:avLst/>
+          </a:prstGeom>
+        </p:spPr>
+        <p:style>
+          <a:lnRef idx="2">
+            <a:schemeClr val="dk1">
+              <a:shade val="15000"/>
+            </a:schemeClr>
+          </a:lnRef>
+          <a:fillRef idx="1">
+            <a:schemeClr val="dk1"/>
+          </a:fillRef>
+          <a:effectRef idx="0">
+            <a:schemeClr val="dk1"/>
+          </a:effectRef>
+          <a:fontRef idx="minor">
+            <a:schemeClr val="lt1"/>
+          </a:fontRef>
+        </p:style>
+        <p:txBody>
+          <a:bodyPr wrap="square">
+            <a:spAutoFit/>
+          </a:bodyPr>
+          <a:lstStyle/>
+          <a:p>
+            <a:pPr algn="l">
+              <a:buNone/>
+            </a:pPr>
+            <a:r>
+              <a:rPr lang="da-DK" b="0" i="0" dirty="0">
+                <a:solidFill>
+                  <a:schemeClr val="bg1"/>
+                </a:solidFill>
+                <a:effectLst/>
+                <a:latin typeface="Courier New" panose="02070309020205020404" pitchFamily="49" charset="0"/>
+              </a:rPr>
+              <a:t>i=0 j=0</a:t>
+            </a:r>
+          </a:p>
+          <a:p>
+            <a:pPr algn="l">
+              <a:buNone/>
+            </a:pPr>
+            <a:r>
+              <a:rPr lang="da-DK" b="0" i="0" dirty="0">
+                <a:solidFill>
+                  <a:schemeClr val="bg1"/>
+                </a:solidFill>
+                <a:effectLst/>
+                <a:latin typeface="Courier New" panose="02070309020205020404" pitchFamily="49" charset="0"/>
+              </a:rPr>
+              <a:t>i=0 j=1</a:t>
+            </a:r>
+          </a:p>
+          <a:p>
+            <a:pPr algn="l">
+              <a:buNone/>
+            </a:pPr>
+            <a:r>
+              <a:rPr lang="da-DK" b="0" i="0" dirty="0">
+                <a:solidFill>
+                  <a:schemeClr val="bg1"/>
+                </a:solidFill>
+                <a:effectLst/>
+                <a:latin typeface="Courier New" panose="02070309020205020404" pitchFamily="49" charset="0"/>
+              </a:rPr>
+              <a:t>End of inner loop, i=0</a:t>
+            </a:r>
+          </a:p>
+          <a:p>
+            <a:pPr algn="l">
+              <a:buNone/>
+            </a:pPr>
+            <a:r>
+              <a:rPr lang="da-DK" b="0" i="0" dirty="0">
+                <a:solidFill>
+                  <a:schemeClr val="bg1"/>
+                </a:solidFill>
+                <a:effectLst/>
+                <a:latin typeface="Courier New" panose="02070309020205020404" pitchFamily="49" charset="0"/>
+              </a:rPr>
+              <a:t>i=1 j=0</a:t>
+            </a:r>
+          </a:p>
+          <a:p>
+            <a:pPr algn="l">
+              <a:buNone/>
+            </a:pPr>
+            <a:r>
+              <a:rPr lang="da-DK" b="0" i="0" dirty="0">
+                <a:solidFill>
+                  <a:schemeClr val="bg1"/>
+                </a:solidFill>
+                <a:effectLst/>
+                <a:latin typeface="Courier New" panose="02070309020205020404" pitchFamily="49" charset="0"/>
+              </a:rPr>
+              <a:t>i=1 j=1</a:t>
+            </a:r>
+          </a:p>
+          <a:p>
+            <a:pPr algn="l">
+              <a:buNone/>
+            </a:pPr>
+            <a:r>
+              <a:rPr lang="da-DK" b="0" i="0" dirty="0">
+                <a:solidFill>
+                  <a:schemeClr val="bg1"/>
+                </a:solidFill>
+                <a:effectLst/>
+                <a:latin typeface="Courier New" panose="02070309020205020404" pitchFamily="49" charset="0"/>
+              </a:rPr>
+              <a:t>End of inner loop, i=1</a:t>
+            </a:r>
+          </a:p>
+          <a:p>
+            <a:pPr algn="l">
+              <a:buNone/>
+            </a:pPr>
+            <a:r>
+              <a:rPr lang="da-DK" b="0" i="0" dirty="0">
+                <a:solidFill>
+                  <a:schemeClr val="bg1"/>
+                </a:solidFill>
+                <a:effectLst/>
+                <a:latin typeface="Courier New" panose="02070309020205020404" pitchFamily="49" charset="0"/>
+              </a:rPr>
+              <a:t>i=2 j=0</a:t>
+            </a:r>
+          </a:p>
+          <a:p>
+            <a:pPr algn="l">
+              <a:buNone/>
+            </a:pPr>
+            <a:r>
+              <a:rPr lang="da-DK" b="0" i="0" dirty="0">
+                <a:solidFill>
+                  <a:schemeClr val="bg1"/>
+                </a:solidFill>
+                <a:effectLst/>
+                <a:latin typeface="Courier New" panose="02070309020205020404" pitchFamily="49" charset="0"/>
+              </a:rPr>
+              <a:t>i=2 j=1</a:t>
+            </a:r>
+          </a:p>
+          <a:p>
+            <a:pPr algn="l">
+              <a:buNone/>
+            </a:pPr>
+            <a:r>
+              <a:rPr lang="da-DK" b="0" i="0" dirty="0">
+                <a:solidFill>
+                  <a:schemeClr val="bg1"/>
+                </a:solidFill>
+                <a:effectLst/>
+                <a:latin typeface="Courier New" panose="02070309020205020404" pitchFamily="49" charset="0"/>
+              </a:rPr>
+              <a:t>End of inner loop, i=2</a:t>
+            </a:r>
+          </a:p>
+        </p:txBody>
+      </p:sp>
+      <p:sp>
+        <p:nvSpPr>
+          <p:cNvPr id="15" name="Freeform: Shape 14">
+            <a:extLst>
+              <a:ext uri="{FF2B5EF4-FFF2-40B4-BE49-F238E27FC236}">
+                <a16:creationId xmlns:a16="http://schemas.microsoft.com/office/drawing/2014/main" id="{5BE4EE33-E1BB-DDE9-06B6-DE1381B03340}"/>
+              </a:ext>
+            </a:extLst>
+          </p:cNvPr>
+          <p:cNvSpPr/>
+          <p:nvPr/>
+        </p:nvSpPr>
+        <p:spPr>
+          <a:xfrm>
+            <a:off x="3550920" y="3627120"/>
+            <a:ext cx="3048963" cy="1097280"/>
+          </a:xfrm>
+          <a:custGeom>
+            <a:avLst/>
+            <a:gdLst>
+              <a:gd name="csX0" fmla="*/ 259080 w 3048963"/>
+              <a:gd name="csY0" fmla="*/ 0 h 1097280"/>
+              <a:gd name="csX1" fmla="*/ 3048000 w 3048963"/>
+              <a:gd name="csY1" fmla="*/ 518160 h 1097280"/>
+              <a:gd name="csX2" fmla="*/ 0 w 3048963"/>
+              <a:gd name="csY2" fmla="*/ 1097280 h 1097280"/>
+            </a:gdLst>
+            <a:ahLst/>
+            <a:cxnLst>
+              <a:cxn ang="0">
+                <a:pos x="csX0" y="csY0"/>
+              </a:cxn>
+              <a:cxn ang="0">
+                <a:pos x="csX1" y="csY1"/>
+              </a:cxn>
+              <a:cxn ang="0">
+                <a:pos x="csX2" y="csY2"/>
+              </a:cxn>
+            </a:cxnLst>
+            <a:rect l="l" t="t" r="r" b="b"/>
+            <a:pathLst>
+              <a:path w="3048963" h="1097280">
+                <a:moveTo>
+                  <a:pt x="259080" y="0"/>
+                </a:moveTo>
+                <a:cubicBezTo>
+                  <a:pt x="1675130" y="167640"/>
+                  <a:pt x="3091180" y="335280"/>
+                  <a:pt x="3048000" y="518160"/>
+                </a:cubicBezTo>
+                <a:cubicBezTo>
+                  <a:pt x="3004820" y="701040"/>
+                  <a:pt x="1502410" y="899160"/>
+                  <a:pt x="0" y="1097280"/>
+                </a:cubicBezTo>
+              </a:path>
+            </a:pathLst>
+          </a:custGeom>
+          <a:noFill/>
+          <a:ln>
+            <a:prstDash val="dash"/>
+            <a:headEnd type="none" w="med" len="med"/>
+            <a:tailEnd type="arrow" w="med" len="med"/>
+          </a:ln>
+        </p:spPr>
+        <p:style>
+          <a:lnRef idx="2">
+            <a:schemeClr val="accent1">
+              <a:shade val="15000"/>
+            </a:schemeClr>
+          </a:lnRef>
+          <a:fillRef idx="1">
+            <a:schemeClr val="accent1"/>
+          </a:fillRef>
+          <a:effectRef idx="0">
+            <a:schemeClr val="accent1"/>
+          </a:effectRef>
+          <a:fontRef idx="minor">
+            <a:schemeClr val="lt1"/>
+          </a:fontRef>
+        </p:style>
+        <p:txBody>
+          <a:bodyPr rtlCol="0" anchor="ctr"/>
+          <a:lstStyle/>
+          <a:p>
+            <a:pPr algn="ctr"/>
             <a:endParaRPr lang="en-US"/>
           </a:p>
         </p:txBody>
@@ -28952,7 +31321,7 @@
     </p:spTree>
     <p:extLst>
       <p:ext uri="{BB962C8B-B14F-4D97-AF65-F5344CB8AC3E}">
-        <p14:creationId xmlns:p14="http://schemas.microsoft.com/office/powerpoint/2010/main" val="1854538543"/>
+        <p14:creationId xmlns:p14="http://schemas.microsoft.com/office/powerpoint/2010/main" val="2678946289"/>
       </p:ext>
     </p:extLst>
   </p:cSld>
@@ -28981,10 +31350,10 @@
       </p:grpSpPr>
       <p:sp>
         <p:nvSpPr>
-          <p:cNvPr id="4" name="Title 3">
+          <p:cNvPr id="3" name="Title 2">
             <a:extLst>
               <a:ext uri="{FF2B5EF4-FFF2-40B4-BE49-F238E27FC236}">
-                <a16:creationId xmlns:a16="http://schemas.microsoft.com/office/drawing/2014/main" id="{1C295AF7-85AC-BC82-F2A7-386642DD04B7}"/>
+                <a16:creationId xmlns:a16="http://schemas.microsoft.com/office/drawing/2014/main" id="{09280E89-F23E-5FCC-496D-17023A0E3054}"/>
               </a:ext>
             </a:extLst>
           </p:cNvPr>
@@ -29002,18 +31371,21 @@
           <a:p>
             <a:r>
               <a:rPr lang="ru-RU" dirty="0"/>
-              <a:t>Зачем нужны массивы</a:t>
-            </a:r>
-            <a:endParaRPr lang="en-US" dirty="0"/>
+              <a:t>Инструкция </a:t>
+            </a:r>
+            <a:r>
+              <a:rPr lang="en-US" dirty="0"/>
+              <a:t>continue</a:t>
+            </a:r>
           </a:p>
         </p:txBody>
       </p:sp>
       <p:sp>
         <p:nvSpPr>
-          <p:cNvPr id="5" name="Content Placeholder 4">
+          <p:cNvPr id="4" name="Content Placeholder 3">
             <a:extLst>
               <a:ext uri="{FF2B5EF4-FFF2-40B4-BE49-F238E27FC236}">
-                <a16:creationId xmlns:a16="http://schemas.microsoft.com/office/drawing/2014/main" id="{86C3FA05-28D1-194E-C00E-C7B8E3A310ED}"/>
+                <a16:creationId xmlns:a16="http://schemas.microsoft.com/office/drawing/2014/main" id="{DFEFEE24-F4DD-53D3-B527-1B275260A4C0}"/>
               </a:ext>
             </a:extLst>
           </p:cNvPr>
@@ -29030,56 +31402,753 @@
           <a:lstStyle/>
           <a:p>
             <a:r>
-              <a:rPr lang="ru-RU" dirty="0"/>
-              <a:t>Иногда нужно хранить много значений одного типа.</a:t>
-            </a:r>
-          </a:p>
-          <a:p>
-            <a:r>
-              <a:rPr lang="ru-RU" dirty="0"/>
-              <a:t>Без массива:</a:t>
-            </a:r>
-          </a:p>
-          <a:p>
-            <a:pPr lvl="1"/>
-            <a:r>
-              <a:rPr lang="ru-RU" dirty="0" err="1"/>
+              <a:rPr lang="en-US" dirty="0"/>
+              <a:t>continue</a:t>
+            </a:r>
+            <a:r>
+              <a:rPr lang="ru-RU" dirty="0"/>
+              <a:t> переходит к следующей итерации цикла</a:t>
+            </a:r>
+            <a:endParaRPr lang="en-US" dirty="0"/>
+          </a:p>
+        </p:txBody>
+      </p:sp>
+      <p:sp>
+        <p:nvSpPr>
+          <p:cNvPr id="6" name="TextBox 5">
+            <a:extLst>
+              <a:ext uri="{FF2B5EF4-FFF2-40B4-BE49-F238E27FC236}">
+                <a16:creationId xmlns:a16="http://schemas.microsoft.com/office/drawing/2014/main" id="{984D09A9-66B1-95D5-FF06-A4587A27D189}"/>
+              </a:ext>
+            </a:extLst>
+          </p:cNvPr>
+          <p:cNvSpPr txBox="1"/>
+          <p:nvPr/>
+        </p:nvSpPr>
+        <p:spPr>
+          <a:xfrm>
+            <a:off x="990600" y="6176963"/>
+            <a:ext cx="4785360" cy="369332"/>
+          </a:xfrm>
+          <a:prstGeom prst="rect">
+            <a:avLst/>
+          </a:prstGeom>
+          <a:noFill/>
+        </p:spPr>
+        <p:txBody>
+          <a:bodyPr wrap="square">
+            <a:spAutoFit/>
+          </a:bodyPr>
+          <a:lstStyle/>
+          <a:p>
+            <a:r>
+              <a:rPr lang="en-US" dirty="0">
+                <a:hlinkClick r:id="rId3"/>
+              </a:rPr>
+              <a:t>https://godbolt.org/z/1q95E7qM7</a:t>
+            </a:r>
+            <a:endParaRPr lang="en-US" dirty="0"/>
+          </a:p>
+        </p:txBody>
+      </p:sp>
+      <p:sp>
+        <p:nvSpPr>
+          <p:cNvPr id="8" name="TextBox 7">
+            <a:extLst>
+              <a:ext uri="{FF2B5EF4-FFF2-40B4-BE49-F238E27FC236}">
+                <a16:creationId xmlns:a16="http://schemas.microsoft.com/office/drawing/2014/main" id="{36DA6611-9820-FD28-CE64-835AD89283B8}"/>
+              </a:ext>
+            </a:extLst>
+          </p:cNvPr>
+          <p:cNvSpPr txBox="1"/>
+          <p:nvPr/>
+        </p:nvSpPr>
+        <p:spPr>
+          <a:xfrm>
+            <a:off x="990600" y="2575977"/>
+            <a:ext cx="5105400" cy="2862322"/>
+          </a:xfrm>
+          <a:prstGeom prst="rect">
+            <a:avLst/>
+          </a:prstGeom>
+          <a:noFill/>
+        </p:spPr>
+        <p:txBody>
+          <a:bodyPr wrap="square">
+            <a:spAutoFit/>
+          </a:bodyPr>
+          <a:lstStyle/>
+          <a:p>
+            <a:pPr>
+              <a:buNone/>
+            </a:pPr>
+            <a:r>
+              <a:rPr lang="en-US" b="0" dirty="0">
+                <a:solidFill>
+                  <a:srgbClr val="0000FF"/>
+                </a:solidFill>
+                <a:effectLst/>
+                <a:latin typeface="Consolas" panose="020B0609020204030204" pitchFamily="49" charset="0"/>
+              </a:rPr>
+              <a:t>#include</a:t>
+            </a:r>
+            <a:r>
+              <a:rPr lang="en-US" b="0" dirty="0">
+                <a:solidFill>
+                  <a:srgbClr val="000000"/>
+                </a:solidFill>
+                <a:effectLst/>
+                <a:latin typeface="Consolas" panose="020B0609020204030204" pitchFamily="49" charset="0"/>
+              </a:rPr>
+              <a:t> </a:t>
+            </a:r>
+            <a:r>
+              <a:rPr lang="en-US" b="0" dirty="0">
+                <a:solidFill>
+                  <a:srgbClr val="0000FF"/>
+                </a:solidFill>
+                <a:effectLst/>
+                <a:latin typeface="Consolas" panose="020B0609020204030204" pitchFamily="49" charset="0"/>
+              </a:rPr>
+              <a:t>&lt;</a:t>
+            </a:r>
+            <a:r>
+              <a:rPr lang="en-US" b="0" dirty="0" err="1">
+                <a:solidFill>
+                  <a:srgbClr val="A31515"/>
+                </a:solidFill>
+                <a:effectLst/>
+                <a:latin typeface="Consolas" panose="020B0609020204030204" pitchFamily="49" charset="0"/>
+              </a:rPr>
+              <a:t>stdio.h</a:t>
+            </a:r>
+            <a:r>
+              <a:rPr lang="en-US" b="0" dirty="0">
+                <a:solidFill>
+                  <a:srgbClr val="0000FF"/>
+                </a:solidFill>
+                <a:effectLst/>
+                <a:latin typeface="Consolas" panose="020B0609020204030204" pitchFamily="49" charset="0"/>
+              </a:rPr>
+              <a:t>&gt;</a:t>
+            </a:r>
+            <a:endParaRPr lang="en-US" b="0" dirty="0">
+              <a:solidFill>
+                <a:srgbClr val="000000"/>
+              </a:solidFill>
+              <a:effectLst/>
+              <a:latin typeface="Consolas" panose="020B0609020204030204" pitchFamily="49" charset="0"/>
+            </a:endParaRPr>
+          </a:p>
+          <a:p>
+            <a:pPr>
+              <a:buNone/>
+            </a:pPr>
+            <a:endParaRPr lang="en-US" b="0" dirty="0">
+              <a:solidFill>
+                <a:srgbClr val="000000"/>
+              </a:solidFill>
+              <a:effectLst/>
+              <a:latin typeface="Consolas" panose="020B0609020204030204" pitchFamily="49" charset="0"/>
+            </a:endParaRPr>
+          </a:p>
+          <a:p>
+            <a:pPr>
+              <a:buNone/>
+            </a:pPr>
+            <a:r>
+              <a:rPr lang="en-US" b="0" dirty="0">
+                <a:solidFill>
+                  <a:srgbClr val="0000FF"/>
+                </a:solidFill>
+                <a:effectLst/>
+                <a:latin typeface="Consolas" panose="020B0609020204030204" pitchFamily="49" charset="0"/>
+              </a:rPr>
               <a:t>int</a:t>
             </a:r>
             <a:r>
-              <a:rPr lang="ru-RU" dirty="0"/>
-              <a:t> a0, a1, a2, a3, a4;</a:t>
-            </a:r>
-          </a:p>
-          <a:p>
-            <a:r>
-              <a:rPr lang="ru-RU" dirty="0"/>
-              <a:t>С массивом:</a:t>
-            </a:r>
-          </a:p>
-          <a:p>
-            <a:pPr lvl="1"/>
-            <a:r>
-              <a:rPr lang="ru-RU" dirty="0" err="1"/>
+              <a:rPr lang="en-US" b="0" dirty="0">
+                <a:solidFill>
+                  <a:srgbClr val="000000"/>
+                </a:solidFill>
+                <a:effectLst/>
+                <a:latin typeface="Consolas" panose="020B0609020204030204" pitchFamily="49" charset="0"/>
+              </a:rPr>
+              <a:t> main() {</a:t>
+            </a:r>
+          </a:p>
+          <a:p>
+            <a:pPr>
+              <a:buNone/>
+            </a:pPr>
+            <a:r>
+              <a:rPr lang="en-US" b="0" dirty="0">
+                <a:solidFill>
+                  <a:srgbClr val="000000"/>
+                </a:solidFill>
+                <a:effectLst/>
+                <a:latin typeface="Consolas" panose="020B0609020204030204" pitchFamily="49" charset="0"/>
+              </a:rPr>
+              <a:t>    </a:t>
+            </a:r>
+            <a:r>
+              <a:rPr lang="en-US" b="0" dirty="0">
+                <a:solidFill>
+                  <a:srgbClr val="0000FF"/>
+                </a:solidFill>
+                <a:effectLst/>
+                <a:latin typeface="Consolas" panose="020B0609020204030204" pitchFamily="49" charset="0"/>
+              </a:rPr>
+              <a:t>for</a:t>
+            </a:r>
+            <a:r>
+              <a:rPr lang="en-US" b="0" dirty="0">
+                <a:solidFill>
+                  <a:srgbClr val="000000"/>
+                </a:solidFill>
+                <a:effectLst/>
+                <a:latin typeface="Consolas" panose="020B0609020204030204" pitchFamily="49" charset="0"/>
+              </a:rPr>
+              <a:t> (</a:t>
+            </a:r>
+            <a:r>
+              <a:rPr lang="en-US" b="0" dirty="0">
+                <a:solidFill>
+                  <a:srgbClr val="0000FF"/>
+                </a:solidFill>
+                <a:effectLst/>
+                <a:latin typeface="Consolas" panose="020B0609020204030204" pitchFamily="49" charset="0"/>
+              </a:rPr>
               <a:t>int</a:t>
             </a:r>
             <a:r>
-              <a:rPr lang="ru-RU" dirty="0"/>
-              <a:t> a[5];</a:t>
-            </a:r>
-          </a:p>
-          <a:p>
-            <a:r>
-              <a:rPr lang="ru-RU" dirty="0"/>
-              <a:t>Массив — это набор элементов одного типа, расположенных подряд в памяти.</a:t>
-            </a:r>
+              <a:rPr lang="en-US" b="0" dirty="0">
+                <a:solidFill>
+                  <a:srgbClr val="000000"/>
+                </a:solidFill>
+                <a:effectLst/>
+                <a:latin typeface="Consolas" panose="020B0609020204030204" pitchFamily="49" charset="0"/>
+              </a:rPr>
+              <a:t> </a:t>
+            </a:r>
+            <a:r>
+              <a:rPr lang="en-US" b="0" dirty="0" err="1">
+                <a:solidFill>
+                  <a:srgbClr val="000000"/>
+                </a:solidFill>
+                <a:effectLst/>
+                <a:latin typeface="Consolas" panose="020B0609020204030204" pitchFamily="49" charset="0"/>
+              </a:rPr>
+              <a:t>i</a:t>
+            </a:r>
+            <a:r>
+              <a:rPr lang="en-US" b="0" dirty="0">
+                <a:solidFill>
+                  <a:srgbClr val="000000"/>
+                </a:solidFill>
+                <a:effectLst/>
+                <a:latin typeface="Consolas" panose="020B0609020204030204" pitchFamily="49" charset="0"/>
+              </a:rPr>
+              <a:t> = </a:t>
+            </a:r>
+            <a:r>
+              <a:rPr lang="en-US" b="0" dirty="0">
+                <a:solidFill>
+                  <a:srgbClr val="098658"/>
+                </a:solidFill>
+                <a:effectLst/>
+                <a:latin typeface="Consolas" panose="020B0609020204030204" pitchFamily="49" charset="0"/>
+              </a:rPr>
+              <a:t>0</a:t>
+            </a:r>
+            <a:r>
+              <a:rPr lang="en-US" b="0" dirty="0">
+                <a:solidFill>
+                  <a:srgbClr val="000000"/>
+                </a:solidFill>
+                <a:effectLst/>
+                <a:latin typeface="Consolas" panose="020B0609020204030204" pitchFamily="49" charset="0"/>
+              </a:rPr>
+              <a:t>; </a:t>
+            </a:r>
+            <a:r>
+              <a:rPr lang="en-US" b="0" dirty="0" err="1">
+                <a:solidFill>
+                  <a:srgbClr val="000000"/>
+                </a:solidFill>
+                <a:effectLst/>
+                <a:latin typeface="Consolas" panose="020B0609020204030204" pitchFamily="49" charset="0"/>
+              </a:rPr>
+              <a:t>i</a:t>
+            </a:r>
+            <a:r>
+              <a:rPr lang="en-US" b="0" dirty="0">
+                <a:solidFill>
+                  <a:srgbClr val="000000"/>
+                </a:solidFill>
+                <a:effectLst/>
+                <a:latin typeface="Consolas" panose="020B0609020204030204" pitchFamily="49" charset="0"/>
+              </a:rPr>
+              <a:t> &lt; </a:t>
+            </a:r>
+            <a:r>
+              <a:rPr lang="en-US" b="0" dirty="0">
+                <a:solidFill>
+                  <a:srgbClr val="098658"/>
+                </a:solidFill>
+                <a:effectLst/>
+                <a:latin typeface="Consolas" panose="020B0609020204030204" pitchFamily="49" charset="0"/>
+              </a:rPr>
+              <a:t>10</a:t>
+            </a:r>
+            <a:r>
+              <a:rPr lang="en-US" b="0" dirty="0">
+                <a:solidFill>
+                  <a:srgbClr val="000000"/>
+                </a:solidFill>
+                <a:effectLst/>
+                <a:latin typeface="Consolas" panose="020B0609020204030204" pitchFamily="49" charset="0"/>
+              </a:rPr>
+              <a:t>; </a:t>
+            </a:r>
+            <a:r>
+              <a:rPr lang="en-US" b="0" dirty="0" err="1">
+                <a:solidFill>
+                  <a:srgbClr val="000000"/>
+                </a:solidFill>
+                <a:effectLst/>
+                <a:latin typeface="Consolas" panose="020B0609020204030204" pitchFamily="49" charset="0"/>
+              </a:rPr>
+              <a:t>i</a:t>
+            </a:r>
+            <a:r>
+              <a:rPr lang="en-US" b="0" dirty="0">
+                <a:solidFill>
+                  <a:srgbClr val="000000"/>
+                </a:solidFill>
+                <a:effectLst/>
+                <a:latin typeface="Consolas" panose="020B0609020204030204" pitchFamily="49" charset="0"/>
+              </a:rPr>
+              <a:t>++) {</a:t>
+            </a:r>
+          </a:p>
+          <a:p>
+            <a:pPr>
+              <a:buNone/>
+            </a:pPr>
+            <a:r>
+              <a:rPr lang="en-US" b="0" dirty="0">
+                <a:solidFill>
+                  <a:srgbClr val="000000"/>
+                </a:solidFill>
+                <a:effectLst/>
+                <a:latin typeface="Consolas" panose="020B0609020204030204" pitchFamily="49" charset="0"/>
+              </a:rPr>
+              <a:t>        </a:t>
+            </a:r>
+            <a:r>
+              <a:rPr lang="en-US" b="0" dirty="0">
+                <a:solidFill>
+                  <a:srgbClr val="0000FF"/>
+                </a:solidFill>
+                <a:effectLst/>
+                <a:latin typeface="Consolas" panose="020B0609020204030204" pitchFamily="49" charset="0"/>
+              </a:rPr>
+              <a:t>if</a:t>
+            </a:r>
+            <a:r>
+              <a:rPr lang="en-US" b="0" dirty="0">
+                <a:solidFill>
+                  <a:srgbClr val="000000"/>
+                </a:solidFill>
+                <a:effectLst/>
+                <a:latin typeface="Consolas" panose="020B0609020204030204" pitchFamily="49" charset="0"/>
+              </a:rPr>
+              <a:t> (</a:t>
+            </a:r>
+            <a:r>
+              <a:rPr lang="en-US" b="0" dirty="0" err="1">
+                <a:solidFill>
+                  <a:srgbClr val="000000"/>
+                </a:solidFill>
+                <a:effectLst/>
+                <a:latin typeface="Consolas" panose="020B0609020204030204" pitchFamily="49" charset="0"/>
+              </a:rPr>
+              <a:t>i</a:t>
+            </a:r>
+            <a:r>
+              <a:rPr lang="en-US" b="0" dirty="0">
+                <a:solidFill>
+                  <a:srgbClr val="000000"/>
+                </a:solidFill>
+                <a:effectLst/>
+                <a:latin typeface="Consolas" panose="020B0609020204030204" pitchFamily="49" charset="0"/>
+              </a:rPr>
+              <a:t> % </a:t>
+            </a:r>
+            <a:r>
+              <a:rPr lang="en-US" b="0" dirty="0">
+                <a:solidFill>
+                  <a:srgbClr val="098658"/>
+                </a:solidFill>
+                <a:effectLst/>
+                <a:latin typeface="Consolas" panose="020B0609020204030204" pitchFamily="49" charset="0"/>
+              </a:rPr>
+              <a:t>2</a:t>
+            </a:r>
+            <a:r>
+              <a:rPr lang="en-US" b="0" dirty="0">
+                <a:solidFill>
+                  <a:srgbClr val="000000"/>
+                </a:solidFill>
+                <a:effectLst/>
+                <a:latin typeface="Consolas" panose="020B0609020204030204" pitchFamily="49" charset="0"/>
+              </a:rPr>
+              <a:t> == </a:t>
+            </a:r>
+            <a:r>
+              <a:rPr lang="en-US" b="0" dirty="0">
+                <a:solidFill>
+                  <a:srgbClr val="098658"/>
+                </a:solidFill>
+                <a:effectLst/>
+                <a:latin typeface="Consolas" panose="020B0609020204030204" pitchFamily="49" charset="0"/>
+              </a:rPr>
+              <a:t>0</a:t>
+            </a:r>
+            <a:r>
+              <a:rPr lang="en-US" b="0" dirty="0">
+                <a:solidFill>
+                  <a:srgbClr val="000000"/>
+                </a:solidFill>
+                <a:effectLst/>
+                <a:latin typeface="Consolas" panose="020B0609020204030204" pitchFamily="49" charset="0"/>
+              </a:rPr>
+              <a:t>) {</a:t>
+            </a:r>
+          </a:p>
+          <a:p>
+            <a:pPr>
+              <a:buNone/>
+            </a:pPr>
+            <a:r>
+              <a:rPr lang="en-US" b="0" dirty="0">
+                <a:solidFill>
+                  <a:srgbClr val="000000"/>
+                </a:solidFill>
+                <a:effectLst/>
+                <a:latin typeface="Consolas" panose="020B0609020204030204" pitchFamily="49" charset="0"/>
+              </a:rPr>
+              <a:t>            </a:t>
+            </a:r>
+            <a:r>
+              <a:rPr lang="en-US" b="0" dirty="0">
+                <a:solidFill>
+                  <a:srgbClr val="0000FF"/>
+                </a:solidFill>
+                <a:effectLst/>
+                <a:latin typeface="Consolas" panose="020B0609020204030204" pitchFamily="49" charset="0"/>
+              </a:rPr>
+              <a:t>continue</a:t>
+            </a:r>
+            <a:r>
+              <a:rPr lang="en-US" b="0" dirty="0">
+                <a:solidFill>
+                  <a:srgbClr val="000000"/>
+                </a:solidFill>
+                <a:effectLst/>
+                <a:latin typeface="Consolas" panose="020B0609020204030204" pitchFamily="49" charset="0"/>
+              </a:rPr>
+              <a:t>;</a:t>
+            </a:r>
+          </a:p>
+          <a:p>
+            <a:pPr>
+              <a:buNone/>
+            </a:pPr>
+            <a:r>
+              <a:rPr lang="en-US" b="0" dirty="0">
+                <a:solidFill>
+                  <a:srgbClr val="000000"/>
+                </a:solidFill>
+                <a:effectLst/>
+                <a:latin typeface="Consolas" panose="020B0609020204030204" pitchFamily="49" charset="0"/>
+              </a:rPr>
+              <a:t>        }</a:t>
+            </a:r>
+          </a:p>
+          <a:p>
+            <a:pPr>
+              <a:buNone/>
+            </a:pPr>
+            <a:r>
+              <a:rPr lang="en-US" b="0" dirty="0">
+                <a:solidFill>
+                  <a:srgbClr val="000000"/>
+                </a:solidFill>
+                <a:effectLst/>
+                <a:latin typeface="Consolas" panose="020B0609020204030204" pitchFamily="49" charset="0"/>
+              </a:rPr>
+              <a:t>        </a:t>
+            </a:r>
+            <a:r>
+              <a:rPr lang="en-US" b="0" dirty="0" err="1">
+                <a:solidFill>
+                  <a:srgbClr val="000000"/>
+                </a:solidFill>
+                <a:effectLst/>
+                <a:latin typeface="Consolas" panose="020B0609020204030204" pitchFamily="49" charset="0"/>
+              </a:rPr>
+              <a:t>printf</a:t>
+            </a:r>
+            <a:r>
+              <a:rPr lang="en-US" b="0" dirty="0">
+                <a:solidFill>
+                  <a:srgbClr val="000000"/>
+                </a:solidFill>
+                <a:effectLst/>
+                <a:latin typeface="Consolas" panose="020B0609020204030204" pitchFamily="49" charset="0"/>
+              </a:rPr>
+              <a:t>(</a:t>
+            </a:r>
+            <a:r>
+              <a:rPr lang="en-US" b="0" dirty="0">
+                <a:solidFill>
+                  <a:srgbClr val="A31515"/>
+                </a:solidFill>
+                <a:effectLst/>
+                <a:latin typeface="Consolas" panose="020B0609020204030204" pitchFamily="49" charset="0"/>
+              </a:rPr>
+              <a:t>"%d, \n"</a:t>
+            </a:r>
+            <a:r>
+              <a:rPr lang="en-US" b="0" dirty="0">
+                <a:solidFill>
+                  <a:srgbClr val="000000"/>
+                </a:solidFill>
+                <a:effectLst/>
+                <a:latin typeface="Consolas" panose="020B0609020204030204" pitchFamily="49" charset="0"/>
+              </a:rPr>
+              <a:t>, </a:t>
+            </a:r>
+            <a:r>
+              <a:rPr lang="en-US" b="0" dirty="0" err="1">
+                <a:solidFill>
+                  <a:srgbClr val="000000"/>
+                </a:solidFill>
+                <a:effectLst/>
+                <a:latin typeface="Consolas" panose="020B0609020204030204" pitchFamily="49" charset="0"/>
+              </a:rPr>
+              <a:t>i</a:t>
+            </a:r>
+            <a:r>
+              <a:rPr lang="en-US" b="0" dirty="0">
+                <a:solidFill>
+                  <a:srgbClr val="000000"/>
+                </a:solidFill>
+                <a:effectLst/>
+                <a:latin typeface="Consolas" panose="020B0609020204030204" pitchFamily="49" charset="0"/>
+              </a:rPr>
+              <a:t>);</a:t>
+            </a:r>
+          </a:p>
+          <a:p>
+            <a:pPr>
+              <a:buNone/>
+            </a:pPr>
+            <a:r>
+              <a:rPr lang="en-US" b="0" dirty="0">
+                <a:solidFill>
+                  <a:srgbClr val="000000"/>
+                </a:solidFill>
+                <a:effectLst/>
+                <a:latin typeface="Consolas" panose="020B0609020204030204" pitchFamily="49" charset="0"/>
+              </a:rPr>
+              <a:t>    }</a:t>
+            </a:r>
+          </a:p>
+          <a:p>
+            <a:pPr>
+              <a:buNone/>
+            </a:pPr>
+            <a:r>
+              <a:rPr lang="en-US" b="0" dirty="0">
+                <a:solidFill>
+                  <a:srgbClr val="000000"/>
+                </a:solidFill>
+                <a:effectLst/>
+                <a:latin typeface="Consolas" panose="020B0609020204030204" pitchFamily="49" charset="0"/>
+              </a:rPr>
+              <a:t>}</a:t>
+            </a:r>
+          </a:p>
+        </p:txBody>
+      </p:sp>
+      <p:sp>
+        <p:nvSpPr>
+          <p:cNvPr id="10" name="TextBox 9">
+            <a:extLst>
+              <a:ext uri="{FF2B5EF4-FFF2-40B4-BE49-F238E27FC236}">
+                <a16:creationId xmlns:a16="http://schemas.microsoft.com/office/drawing/2014/main" id="{97D59C20-C8D1-3E96-8DA4-8F475A719D67}"/>
+              </a:ext>
+            </a:extLst>
+          </p:cNvPr>
+          <p:cNvSpPr txBox="1"/>
+          <p:nvPr/>
+        </p:nvSpPr>
+        <p:spPr>
+          <a:xfrm>
+            <a:off x="990600" y="5622965"/>
+            <a:ext cx="4419600" cy="369332"/>
+          </a:xfrm>
+          <a:prstGeom prst="rect">
+            <a:avLst/>
+          </a:prstGeom>
+        </p:spPr>
+        <p:style>
+          <a:lnRef idx="2">
+            <a:schemeClr val="dk1">
+              <a:shade val="15000"/>
+            </a:schemeClr>
+          </a:lnRef>
+          <a:fillRef idx="1">
+            <a:schemeClr val="dk1"/>
+          </a:fillRef>
+          <a:effectRef idx="0">
+            <a:schemeClr val="dk1"/>
+          </a:effectRef>
+          <a:fontRef idx="minor">
+            <a:schemeClr val="lt1"/>
+          </a:fontRef>
+        </p:style>
+        <p:txBody>
+          <a:bodyPr wrap="square">
+            <a:spAutoFit/>
+          </a:bodyPr>
+          <a:lstStyle/>
+          <a:p>
+            <a:r>
+              <a:rPr lang="en-US" b="0" i="0" dirty="0">
+                <a:solidFill>
+                  <a:schemeClr val="bg1"/>
+                </a:solidFill>
+                <a:effectLst/>
+                <a:latin typeface="Courier New" panose="02070309020205020404" pitchFamily="49" charset="0"/>
+              </a:rPr>
+              <a:t>1, 3, 5, 7, 9, </a:t>
+            </a:r>
+            <a:endParaRPr lang="en-US" dirty="0">
+              <a:solidFill>
+                <a:schemeClr val="bg1"/>
+              </a:solidFill>
+            </a:endParaRPr>
+          </a:p>
+        </p:txBody>
+      </p:sp>
+      <p:sp>
+        <p:nvSpPr>
+          <p:cNvPr id="12" name="Freeform: Shape 11">
+            <a:extLst>
+              <a:ext uri="{FF2B5EF4-FFF2-40B4-BE49-F238E27FC236}">
+                <a16:creationId xmlns:a16="http://schemas.microsoft.com/office/drawing/2014/main" id="{587EFDA8-23F1-4E80-90D7-27745B689AD7}"/>
+              </a:ext>
+            </a:extLst>
+          </p:cNvPr>
+          <p:cNvSpPr/>
+          <p:nvPr/>
+        </p:nvSpPr>
+        <p:spPr>
+          <a:xfrm>
+            <a:off x="2009274" y="4115927"/>
+            <a:ext cx="3012683" cy="767118"/>
+          </a:xfrm>
+          <a:custGeom>
+            <a:avLst/>
+            <a:gdLst>
+              <a:gd name="csX0" fmla="*/ 1780673 w 3012683"/>
+              <a:gd name="csY0" fmla="*/ 34968 h 767118"/>
+              <a:gd name="csX1" fmla="*/ 2743200 w 3012683"/>
+              <a:gd name="csY1" fmla="*/ 71062 h 767118"/>
+              <a:gd name="csX2" fmla="*/ 2779294 w 3012683"/>
+              <a:gd name="csY2" fmla="*/ 672641 h 767118"/>
+              <a:gd name="csX3" fmla="*/ 0 w 3012683"/>
+              <a:gd name="csY3" fmla="*/ 756862 h 767118"/>
+            </a:gdLst>
+            <a:ahLst/>
+            <a:cxnLst>
+              <a:cxn ang="0">
+                <a:pos x="csX0" y="csY0"/>
+              </a:cxn>
+              <a:cxn ang="0">
+                <a:pos x="csX1" y="csY1"/>
+              </a:cxn>
+              <a:cxn ang="0">
+                <a:pos x="csX2" y="csY2"/>
+              </a:cxn>
+              <a:cxn ang="0">
+                <a:pos x="csX3" y="csY3"/>
+              </a:cxn>
+            </a:cxnLst>
+            <a:rect l="l" t="t" r="r" b="b"/>
+            <a:pathLst>
+              <a:path w="3012683" h="767118">
+                <a:moveTo>
+                  <a:pt x="1780673" y="34968"/>
+                </a:moveTo>
+                <a:cubicBezTo>
+                  <a:pt x="2178718" y="-125"/>
+                  <a:pt x="2576763" y="-35217"/>
+                  <a:pt x="2743200" y="71062"/>
+                </a:cubicBezTo>
+                <a:cubicBezTo>
+                  <a:pt x="2909637" y="177341"/>
+                  <a:pt x="3236494" y="558341"/>
+                  <a:pt x="2779294" y="672641"/>
+                </a:cubicBezTo>
+                <a:cubicBezTo>
+                  <a:pt x="2322094" y="786941"/>
+                  <a:pt x="1161047" y="771901"/>
+                  <a:pt x="0" y="756862"/>
+                </a:cubicBezTo>
+              </a:path>
+            </a:pathLst>
+          </a:custGeom>
+          <a:noFill/>
+          <a:ln>
+            <a:prstDash val="dash"/>
+            <a:headEnd type="none" w="med" len="med"/>
+            <a:tailEnd type="arrow" w="med" len="med"/>
+          </a:ln>
+        </p:spPr>
+        <p:style>
+          <a:lnRef idx="2">
+            <a:schemeClr val="accent1">
+              <a:shade val="15000"/>
+            </a:schemeClr>
+          </a:lnRef>
+          <a:fillRef idx="1">
+            <a:schemeClr val="accent1"/>
+          </a:fillRef>
+          <a:effectRef idx="0">
+            <a:schemeClr val="accent1"/>
+          </a:effectRef>
+          <a:fontRef idx="minor">
+            <a:schemeClr val="lt1"/>
+          </a:fontRef>
+        </p:style>
+        <p:txBody>
+          <a:bodyPr rtlCol="0" anchor="ctr"/>
+          <a:lstStyle/>
+          <a:p>
+            <a:pPr algn="ctr"/>
+            <a:endParaRPr lang="en-US"/>
           </a:p>
         </p:txBody>
       </p:sp>
     </p:spTree>
     <p:extLst>
       <p:ext uri="{BB962C8B-B14F-4D97-AF65-F5344CB8AC3E}">
-        <p14:creationId xmlns:p14="http://schemas.microsoft.com/office/powerpoint/2010/main" val="2157300560"/>
+        <p14:creationId xmlns:p14="http://schemas.microsoft.com/office/powerpoint/2010/main" val="3446456345"/>
       </p:ext>
     </p:extLst>
   </p:cSld>
@@ -29108,10 +32177,10 @@
       </p:grpSpPr>
       <p:sp>
         <p:nvSpPr>
-          <p:cNvPr id="2" name="Title 1">
+          <p:cNvPr id="3" name="Title 2">
             <a:extLst>
               <a:ext uri="{FF2B5EF4-FFF2-40B4-BE49-F238E27FC236}">
-                <a16:creationId xmlns:a16="http://schemas.microsoft.com/office/drawing/2014/main" id="{0858A3AC-067E-59A8-D960-D9AE15D63448}"/>
+                <a16:creationId xmlns:a16="http://schemas.microsoft.com/office/drawing/2014/main" id="{6090378D-BC0A-E043-9B89-7587AAA95F5C}"/>
               </a:ext>
             </a:extLst>
           </p:cNvPr>
@@ -29129,18 +32198,29 @@
           <a:p>
             <a:r>
               <a:rPr lang="ru-RU" dirty="0"/>
-              <a:t>Объявление массива</a:t>
-            </a:r>
-            <a:endParaRPr lang="en-US" dirty="0"/>
+              <a:t>Сравнение циклов</a:t>
+            </a:r>
+            <a:r>
+              <a:rPr lang="en-US" dirty="0"/>
+              <a:t> while, for </a:t>
+            </a:r>
+            <a:r>
+              <a:rPr lang="ru-RU" dirty="0"/>
+              <a:t>и </a:t>
+            </a:r>
+            <a:r>
+              <a:rPr lang="en-US" dirty="0"/>
+              <a:t>do-while</a:t>
+            </a:r>
           </a:p>
         </p:txBody>
       </p:sp>
       <p:sp>
         <p:nvSpPr>
-          <p:cNvPr id="3" name="Content Placeholder 2">
+          <p:cNvPr id="4" name="Content Placeholder 3">
             <a:extLst>
               <a:ext uri="{FF2B5EF4-FFF2-40B4-BE49-F238E27FC236}">
-                <a16:creationId xmlns:a16="http://schemas.microsoft.com/office/drawing/2014/main" id="{0BC2E1D1-97ED-54BE-AF86-AE4AC33BF199}"/>
+                <a16:creationId xmlns:a16="http://schemas.microsoft.com/office/drawing/2014/main" id="{E2EAD42A-654F-8A00-E442-1177422C7926}"/>
               </a:ext>
             </a:extLst>
           </p:cNvPr>
@@ -29157,87 +32237,46 @@
           <a:lstStyle/>
           <a:p>
             <a:r>
-              <a:rPr lang="ru-RU" dirty="0"/>
-              <a:t>Общая форма:</a:t>
-            </a:r>
-          </a:p>
-          <a:p>
-            <a:pPr lvl="1"/>
-            <a:r>
               <a:rPr lang="ru-RU" dirty="0" err="1"/>
-              <a:t>type</a:t>
-            </a:r>
-            <a:r>
-              <a:rPr lang="ru-RU" dirty="0"/>
-              <a:t> </a:t>
-            </a:r>
+              <a:t>while</a:t>
+            </a:r>
+            <a:r>
+              <a:rPr lang="ru-RU" dirty="0"/>
+              <a:t> — когда условие главное</a:t>
+            </a:r>
+          </a:p>
+          <a:p>
             <a:r>
               <a:rPr lang="ru-RU" dirty="0" err="1"/>
-              <a:t>name</a:t>
-            </a:r>
-            <a:r>
-              <a:rPr lang="ru-RU" dirty="0"/>
-              <a:t>[</a:t>
-            </a:r>
+              <a:t>for</a:t>
+            </a:r>
+            <a:r>
+              <a:rPr lang="ru-RU" dirty="0"/>
+              <a:t> — когда есть счётчик или перебор</a:t>
+            </a:r>
+          </a:p>
+          <a:p>
             <a:r>
               <a:rPr lang="ru-RU" dirty="0" err="1"/>
-              <a:t>size</a:t>
-            </a:r>
-            <a:r>
-              <a:rPr lang="ru-RU" dirty="0"/>
-              <a:t>];</a:t>
-            </a:r>
-          </a:p>
-          <a:p>
-            <a:r>
-              <a:rPr lang="ru-RU" dirty="0"/>
-              <a:t>Пример:</a:t>
-            </a:r>
-          </a:p>
-          <a:p>
-            <a:pPr lvl="1"/>
-            <a:r>
-              <a:rPr lang="ru-RU" dirty="0" err="1"/>
-              <a:t>int</a:t>
-            </a:r>
-            <a:r>
-              <a:rPr lang="ru-RU" dirty="0"/>
-              <a:t> a[10];</a:t>
-            </a:r>
-          </a:p>
-          <a:p>
-            <a:r>
-              <a:rPr lang="ru-RU" dirty="0" err="1"/>
-              <a:t>size</a:t>
-            </a:r>
-            <a:r>
-              <a:rPr lang="ru-RU" dirty="0"/>
-              <a:t> — количество элементов</a:t>
-            </a:r>
-          </a:p>
-          <a:p>
-            <a:r>
-              <a:rPr lang="ru-RU" dirty="0"/>
-              <a:t>индексы: от 0 до </a:t>
-            </a:r>
-            <a:r>
-              <a:rPr lang="ru-RU" dirty="0" err="1"/>
-              <a:t>size</a:t>
-            </a:r>
-            <a:r>
-              <a:rPr lang="ru-RU" dirty="0"/>
-              <a:t> - 1</a:t>
-            </a:r>
-          </a:p>
-          <a:p>
-            <a:endParaRPr lang="en-US" dirty="0"/>
+              <a:t>do-while</a:t>
+            </a:r>
+            <a:r>
+              <a:rPr lang="ru-RU" dirty="0"/>
+              <a:t> — когда тело должно выполниться минимум один раз</a:t>
+            </a:r>
+          </a:p>
+          <a:p>
+            <a:r>
+              <a:rPr lang="ru-RU" dirty="0"/>
+              <a:t>Все три конструкции взаимозаменяемы по выразительной силе.</a:t>
+            </a:r>
           </a:p>
         </p:txBody>
       </p:sp>
     </p:spTree>
     <p:extLst>
       <p:ext uri="{BB962C8B-B14F-4D97-AF65-F5344CB8AC3E}">
-        <p14:creationId xmlns:p14="http://schemas.microsoft.com/office/powerpoint/2010/main" val="4159347011"/>
+        <p14:creationId xmlns:p14="http://schemas.microsoft.com/office/powerpoint/2010/main" val="4171260144"/>
       </p:ext>
     </p:extLst>
   </p:cSld>
@@ -29266,10 +32305,10 @@
       </p:grpSpPr>
       <p:sp>
         <p:nvSpPr>
-          <p:cNvPr id="2" name="Title 1">
+          <p:cNvPr id="7" name="Title 6">
             <a:extLst>
               <a:ext uri="{FF2B5EF4-FFF2-40B4-BE49-F238E27FC236}">
-                <a16:creationId xmlns:a16="http://schemas.microsoft.com/office/drawing/2014/main" id="{E880A21F-7F52-DF23-7B48-F496BAD9DAA9}"/>
+                <a16:creationId xmlns:a16="http://schemas.microsoft.com/office/drawing/2014/main" id="{D79CF419-7EC7-F310-6882-0A6CF4136795}"/>
               </a:ext>
             </a:extLst>
           </p:cNvPr>
@@ -29287,7 +32326,11 @@
           <a:p>
             <a:r>
               <a:rPr lang="ru-RU" dirty="0"/>
-              <a:t>Доступ к элементам</a:t>
+              <a:t>Инструкция </a:t>
+            </a:r>
+            <a:r>
+              <a:rPr lang="en-US" dirty="0" err="1"/>
+              <a:t>goto</a:t>
             </a:r>
             <a:endParaRPr lang="en-US" dirty="0"/>
           </a:p>
@@ -29295,10 +32338,10 @@
       </p:sp>
       <p:sp>
         <p:nvSpPr>
-          <p:cNvPr id="3" name="Content Placeholder 2">
+          <p:cNvPr id="8" name="Content Placeholder 7">
             <a:extLst>
               <a:ext uri="{FF2B5EF4-FFF2-40B4-BE49-F238E27FC236}">
-                <a16:creationId xmlns:a16="http://schemas.microsoft.com/office/drawing/2014/main" id="{F861A3D8-27DC-B1A6-51BD-468BFCABE448}"/>
+                <a16:creationId xmlns:a16="http://schemas.microsoft.com/office/drawing/2014/main" id="{E8B232CA-E4F6-B196-0CA1-CDE20B3BD60A}"/>
               </a:ext>
             </a:extLst>
           </p:cNvPr>
@@ -29309,134 +32352,1312 @@
             <p:ph idx="1"/>
           </p:nvPr>
         </p:nvSpPr>
-        <p:spPr/>
+        <p:spPr>
+          <a:xfrm>
+            <a:off x="838200" y="1825625"/>
+            <a:ext cx="4600074" cy="4351338"/>
+          </a:xfrm>
+        </p:spPr>
         <p:txBody>
-          <a:bodyPr/>
+          <a:bodyPr>
+            <a:normAutofit/>
+          </a:bodyPr>
           <a:lstStyle/>
           <a:p>
             <a:r>
-              <a:rPr lang="ru-RU" dirty="0"/>
-              <a:t>Обращение по индексу:</a:t>
+              <a:rPr lang="ru-RU" dirty="0" err="1"/>
+              <a:t>goto</a:t>
+            </a:r>
+            <a:r>
+              <a:rPr lang="ru-RU" dirty="0"/>
+              <a:t> выполняет безусловный переход к метке внутри текущей функции</a:t>
+            </a:r>
+            <a:endParaRPr lang="en-US" dirty="0"/>
+          </a:p>
+          <a:p>
+            <a:r>
+              <a:rPr lang="ru-RU" dirty="0"/>
+              <a:t>Синтаксис:</a:t>
             </a:r>
           </a:p>
           <a:p>
             <a:pPr lvl="1">
+              <a:lnSpc>
+                <a:spcPct val="100000"/>
+              </a:lnSpc>
               <a:buNone/>
             </a:pPr>
             <a:r>
-              <a:rPr lang="pt-BR" b="0" dirty="0">
-                <a:solidFill>
-                  <a:srgbClr val="000000"/>
-                </a:solidFill>
-                <a:effectLst/>
-                <a:latin typeface="Consolas" panose="020B0609020204030204" pitchFamily="49" charset="0"/>
-              </a:rPr>
-              <a:t>a[</a:t>
-            </a:r>
-            <a:r>
-              <a:rPr lang="pt-BR" b="0" dirty="0">
-                <a:solidFill>
-                  <a:srgbClr val="098658"/>
-                </a:solidFill>
-                <a:effectLst/>
-                <a:latin typeface="Consolas" panose="020B0609020204030204" pitchFamily="49" charset="0"/>
-              </a:rPr>
-              <a:t>0</a:t>
-            </a:r>
-            <a:r>
-              <a:rPr lang="pt-BR" b="0" dirty="0">
-                <a:solidFill>
-                  <a:srgbClr val="000000"/>
-                </a:solidFill>
-                <a:effectLst/>
-                <a:latin typeface="Consolas" panose="020B0609020204030204" pitchFamily="49" charset="0"/>
-              </a:rPr>
-              <a:t>] = </a:t>
-            </a:r>
-            <a:r>
-              <a:rPr lang="pt-BR" b="0" dirty="0">
-                <a:solidFill>
-                  <a:srgbClr val="098658"/>
-                </a:solidFill>
-                <a:effectLst/>
-                <a:latin typeface="Consolas" panose="020B0609020204030204" pitchFamily="49" charset="0"/>
-              </a:rPr>
-              <a:t>10</a:t>
-            </a:r>
-            <a:r>
-              <a:rPr lang="pt-BR" b="0" dirty="0">
-                <a:solidFill>
-                  <a:srgbClr val="000000"/>
-                </a:solidFill>
-                <a:effectLst/>
-                <a:latin typeface="Consolas" panose="020B0609020204030204" pitchFamily="49" charset="0"/>
-              </a:rPr>
-              <a:t>;</a:t>
+              <a:rPr lang="en-US" dirty="0" err="1">
+                <a:solidFill>
+                  <a:srgbClr val="0000FF"/>
+                </a:solidFill>
+                <a:latin typeface="Consolas" panose="020B0609020204030204" pitchFamily="49" charset="0"/>
+              </a:rPr>
+              <a:t>goto</a:t>
+            </a:r>
+            <a:r>
+              <a:rPr lang="en-US" dirty="0">
+                <a:solidFill>
+                  <a:srgbClr val="000000"/>
+                </a:solidFill>
+                <a:latin typeface="Consolas" panose="020B0609020204030204" pitchFamily="49" charset="0"/>
+              </a:rPr>
+              <a:t> label;</a:t>
             </a:r>
           </a:p>
           <a:p>
             <a:pPr lvl="1">
+              <a:lnSpc>
+                <a:spcPct val="100000"/>
+              </a:lnSpc>
               <a:buNone/>
             </a:pPr>
             <a:r>
-              <a:rPr lang="pt-BR" b="0" dirty="0">
-                <a:solidFill>
-                  <a:srgbClr val="000000"/>
-                </a:solidFill>
-                <a:effectLst/>
-                <a:latin typeface="Consolas" panose="020B0609020204030204" pitchFamily="49" charset="0"/>
-              </a:rPr>
-              <a:t>a[</a:t>
-            </a:r>
-            <a:r>
-              <a:rPr lang="pt-BR" b="0" dirty="0">
-                <a:solidFill>
-                  <a:srgbClr val="098658"/>
-                </a:solidFill>
-                <a:effectLst/>
-                <a:latin typeface="Consolas" panose="020B0609020204030204" pitchFamily="49" charset="0"/>
-              </a:rPr>
-              <a:t>1</a:t>
-            </a:r>
-            <a:r>
-              <a:rPr lang="pt-BR" b="0" dirty="0">
-                <a:solidFill>
-                  <a:srgbClr val="000000"/>
-                </a:solidFill>
-                <a:effectLst/>
-                <a:latin typeface="Consolas" panose="020B0609020204030204" pitchFamily="49" charset="0"/>
-              </a:rPr>
-              <a:t>] = </a:t>
-            </a:r>
-            <a:r>
-              <a:rPr lang="pt-BR" b="0" dirty="0">
-                <a:solidFill>
-                  <a:srgbClr val="098658"/>
-                </a:solidFill>
-                <a:effectLst/>
-                <a:latin typeface="Consolas" panose="020B0609020204030204" pitchFamily="49" charset="0"/>
-              </a:rPr>
-              <a:t>20</a:t>
-            </a:r>
-            <a:r>
-              <a:rPr lang="pt-BR" b="0" dirty="0">
-                <a:solidFill>
-                  <a:srgbClr val="000000"/>
-                </a:solidFill>
-                <a:effectLst/>
-                <a:latin typeface="Consolas" panose="020B0609020204030204" pitchFamily="49" charset="0"/>
-              </a:rPr>
-              <a:t>;</a:t>
-            </a:r>
+              <a:rPr lang="en-US" dirty="0">
+                <a:solidFill>
+                  <a:srgbClr val="008000"/>
+                </a:solidFill>
+                <a:latin typeface="Consolas" panose="020B0609020204030204" pitchFamily="49" charset="0"/>
+              </a:rPr>
+              <a:t>/* ... */</a:t>
+            </a:r>
+            <a:endParaRPr lang="en-US" dirty="0">
+              <a:solidFill>
+                <a:srgbClr val="000000"/>
+              </a:solidFill>
+              <a:latin typeface="Consolas" panose="020B0609020204030204" pitchFamily="49" charset="0"/>
+            </a:endParaRPr>
           </a:p>
           <a:p>
             <a:pPr lvl="1">
+              <a:lnSpc>
+                <a:spcPct val="100000"/>
+              </a:lnSpc>
               <a:buNone/>
             </a:pPr>
             <a:r>
-              <a:rPr lang="pt-BR" b="0" dirty="0">
-                <a:solidFill>
-                  <a:srgbClr val="74531F"/>
+              <a:rPr lang="en-US" dirty="0">
+                <a:solidFill>
+                  <a:srgbClr val="000000"/>
+                </a:solidFill>
+                <a:latin typeface="Consolas" panose="020B0609020204030204" pitchFamily="49" charset="0"/>
+              </a:rPr>
+              <a:t>label:</a:t>
+            </a:r>
+          </a:p>
+          <a:p>
+            <a:pPr lvl="1">
+              <a:lnSpc>
+                <a:spcPct val="100000"/>
+              </a:lnSpc>
+              <a:buNone/>
+            </a:pPr>
+            <a:r>
+              <a:rPr lang="en-US" dirty="0">
+                <a:solidFill>
+                  <a:srgbClr val="000000"/>
+                </a:solidFill>
+                <a:latin typeface="Consolas" panose="020B0609020204030204" pitchFamily="49" charset="0"/>
+              </a:rPr>
+              <a:t>    </a:t>
+            </a:r>
+            <a:r>
+              <a:rPr lang="en-US" dirty="0">
+                <a:solidFill>
+                  <a:srgbClr val="008000"/>
+                </a:solidFill>
+                <a:latin typeface="Consolas" panose="020B0609020204030204" pitchFamily="49" charset="0"/>
+              </a:rPr>
+              <a:t>// </a:t>
+            </a:r>
+            <a:r>
+              <a:rPr lang="ru-RU" dirty="0">
+                <a:solidFill>
+                  <a:srgbClr val="008000"/>
+                </a:solidFill>
+                <a:latin typeface="Consolas" panose="020B0609020204030204" pitchFamily="49" charset="0"/>
+              </a:rPr>
+              <a:t>код</a:t>
+            </a:r>
+            <a:endParaRPr lang="ru-RU" dirty="0"/>
+          </a:p>
+        </p:txBody>
+      </p:sp>
+      <p:sp>
+        <p:nvSpPr>
+          <p:cNvPr id="6" name="TextBox 5">
+            <a:extLst>
+              <a:ext uri="{FF2B5EF4-FFF2-40B4-BE49-F238E27FC236}">
+                <a16:creationId xmlns:a16="http://schemas.microsoft.com/office/drawing/2014/main" id="{888B141C-484A-F29E-116F-5DA3418E9E01}"/>
+              </a:ext>
+            </a:extLst>
+          </p:cNvPr>
+          <p:cNvSpPr txBox="1"/>
+          <p:nvPr/>
+        </p:nvSpPr>
+        <p:spPr>
+          <a:xfrm>
+            <a:off x="6557211" y="1764298"/>
+            <a:ext cx="4796589" cy="5093702"/>
+          </a:xfrm>
+          <a:prstGeom prst="rect">
+            <a:avLst/>
+          </a:prstGeom>
+          <a:noFill/>
+        </p:spPr>
+        <p:txBody>
+          <a:bodyPr wrap="square">
+            <a:spAutoFit/>
+          </a:bodyPr>
+          <a:lstStyle/>
+          <a:p>
+            <a:pPr>
+              <a:buNone/>
+            </a:pPr>
+            <a:r>
+              <a:rPr lang="en-US" sz="1300" b="0" dirty="0">
+                <a:solidFill>
+                  <a:srgbClr val="0000FF"/>
+                </a:solidFill>
+                <a:effectLst/>
+                <a:latin typeface="Consolas" panose="020B0609020204030204" pitchFamily="49" charset="0"/>
+              </a:rPr>
+              <a:t>#include</a:t>
+            </a:r>
+            <a:r>
+              <a:rPr lang="en-US" sz="1300" b="0" dirty="0">
+                <a:solidFill>
+                  <a:srgbClr val="000000"/>
+                </a:solidFill>
+                <a:effectLst/>
+                <a:latin typeface="Consolas" panose="020B0609020204030204" pitchFamily="49" charset="0"/>
+              </a:rPr>
+              <a:t> </a:t>
+            </a:r>
+            <a:r>
+              <a:rPr lang="en-US" sz="1300" b="0" dirty="0">
+                <a:solidFill>
+                  <a:srgbClr val="0000FF"/>
+                </a:solidFill>
+                <a:effectLst/>
+                <a:latin typeface="Consolas" panose="020B0609020204030204" pitchFamily="49" charset="0"/>
+              </a:rPr>
+              <a:t>&lt;</a:t>
+            </a:r>
+            <a:r>
+              <a:rPr lang="en-US" sz="1300" b="0" dirty="0" err="1">
+                <a:solidFill>
+                  <a:srgbClr val="A31515"/>
+                </a:solidFill>
+                <a:effectLst/>
+                <a:latin typeface="Consolas" panose="020B0609020204030204" pitchFamily="49" charset="0"/>
+              </a:rPr>
+              <a:t>stdio.h</a:t>
+            </a:r>
+            <a:r>
+              <a:rPr lang="en-US" sz="1300" b="0" dirty="0">
+                <a:solidFill>
+                  <a:srgbClr val="0000FF"/>
+                </a:solidFill>
+                <a:effectLst/>
+                <a:latin typeface="Consolas" panose="020B0609020204030204" pitchFamily="49" charset="0"/>
+              </a:rPr>
+              <a:t>&gt;</a:t>
+            </a:r>
+            <a:endParaRPr lang="en-US" sz="1300" b="0" dirty="0">
+              <a:solidFill>
+                <a:srgbClr val="000000"/>
+              </a:solidFill>
+              <a:effectLst/>
+              <a:latin typeface="Consolas" panose="020B0609020204030204" pitchFamily="49" charset="0"/>
+            </a:endParaRPr>
+          </a:p>
+          <a:p>
+            <a:pPr>
+              <a:buNone/>
+            </a:pPr>
+            <a:endParaRPr lang="en-US" sz="1300" b="0" dirty="0">
+              <a:solidFill>
+                <a:srgbClr val="000000"/>
+              </a:solidFill>
+              <a:effectLst/>
+              <a:latin typeface="Consolas" panose="020B0609020204030204" pitchFamily="49" charset="0"/>
+            </a:endParaRPr>
+          </a:p>
+          <a:p>
+            <a:pPr>
+              <a:buNone/>
+            </a:pPr>
+            <a:r>
+              <a:rPr lang="en-US" sz="1300" b="0" dirty="0">
+                <a:solidFill>
+                  <a:srgbClr val="0000FF"/>
+                </a:solidFill>
+                <a:effectLst/>
+                <a:latin typeface="Consolas" panose="020B0609020204030204" pitchFamily="49" charset="0"/>
+              </a:rPr>
+              <a:t>int</a:t>
+            </a:r>
+            <a:r>
+              <a:rPr lang="en-US" sz="1300" b="0" dirty="0">
+                <a:solidFill>
+                  <a:srgbClr val="000000"/>
+                </a:solidFill>
+                <a:effectLst/>
+                <a:latin typeface="Consolas" panose="020B0609020204030204" pitchFamily="49" charset="0"/>
+              </a:rPr>
+              <a:t> main()</a:t>
+            </a:r>
+            <a:r>
+              <a:rPr lang="ru-RU" sz="1300" b="0" dirty="0">
+                <a:solidFill>
+                  <a:srgbClr val="000000"/>
+                </a:solidFill>
+                <a:effectLst/>
+                <a:latin typeface="Consolas" panose="020B0609020204030204" pitchFamily="49" charset="0"/>
+              </a:rPr>
+              <a:t> </a:t>
+            </a:r>
+            <a:r>
+              <a:rPr lang="en-US" sz="1300" b="0" dirty="0">
+                <a:solidFill>
+                  <a:srgbClr val="000000"/>
+                </a:solidFill>
+                <a:effectLst/>
+                <a:latin typeface="Consolas" panose="020B0609020204030204" pitchFamily="49" charset="0"/>
+              </a:rPr>
+              <a:t>{</a:t>
+            </a:r>
+          </a:p>
+          <a:p>
+            <a:pPr>
+              <a:buNone/>
+            </a:pPr>
+            <a:r>
+              <a:rPr lang="en-US" sz="1300" b="0" dirty="0">
+                <a:solidFill>
+                  <a:srgbClr val="000000"/>
+                </a:solidFill>
+                <a:effectLst/>
+                <a:latin typeface="Consolas" panose="020B0609020204030204" pitchFamily="49" charset="0"/>
+              </a:rPr>
+              <a:t>    </a:t>
+            </a:r>
+            <a:r>
+              <a:rPr lang="en-US" sz="1300" b="0" dirty="0">
+                <a:solidFill>
+                  <a:srgbClr val="0000FF"/>
+                </a:solidFill>
+                <a:effectLst/>
+                <a:latin typeface="Consolas" panose="020B0609020204030204" pitchFamily="49" charset="0"/>
+              </a:rPr>
+              <a:t>int</a:t>
+            </a:r>
+            <a:r>
+              <a:rPr lang="en-US" sz="1300" b="0" dirty="0">
+                <a:solidFill>
+                  <a:srgbClr val="000000"/>
+                </a:solidFill>
+                <a:effectLst/>
+                <a:latin typeface="Consolas" panose="020B0609020204030204" pitchFamily="49" charset="0"/>
+              </a:rPr>
+              <a:t> a[</a:t>
+            </a:r>
+            <a:r>
+              <a:rPr lang="en-US" sz="1300" b="0" dirty="0">
+                <a:solidFill>
+                  <a:srgbClr val="098658"/>
+                </a:solidFill>
+                <a:effectLst/>
+                <a:latin typeface="Consolas" panose="020B0609020204030204" pitchFamily="49" charset="0"/>
+              </a:rPr>
+              <a:t>3</a:t>
+            </a:r>
+            <a:r>
+              <a:rPr lang="en-US" sz="1300" b="0" dirty="0">
+                <a:solidFill>
+                  <a:srgbClr val="000000"/>
+                </a:solidFill>
+                <a:effectLst/>
+                <a:latin typeface="Consolas" panose="020B0609020204030204" pitchFamily="49" charset="0"/>
+              </a:rPr>
+              <a:t>][</a:t>
+            </a:r>
+            <a:r>
+              <a:rPr lang="en-US" sz="1300" b="0" dirty="0">
+                <a:solidFill>
+                  <a:srgbClr val="098658"/>
+                </a:solidFill>
+                <a:effectLst/>
+                <a:latin typeface="Consolas" panose="020B0609020204030204" pitchFamily="49" charset="0"/>
+              </a:rPr>
+              <a:t>4</a:t>
+            </a:r>
+            <a:r>
+              <a:rPr lang="en-US" sz="1300" b="0" dirty="0">
+                <a:solidFill>
+                  <a:srgbClr val="000000"/>
+                </a:solidFill>
+                <a:effectLst/>
+                <a:latin typeface="Consolas" panose="020B0609020204030204" pitchFamily="49" charset="0"/>
+              </a:rPr>
+              <a:t>] = {</a:t>
+            </a:r>
+          </a:p>
+          <a:p>
+            <a:pPr>
+              <a:buNone/>
+            </a:pPr>
+            <a:r>
+              <a:rPr lang="en-US" sz="1300" b="0" dirty="0">
+                <a:solidFill>
+                  <a:srgbClr val="000000"/>
+                </a:solidFill>
+                <a:effectLst/>
+                <a:latin typeface="Consolas" panose="020B0609020204030204" pitchFamily="49" charset="0"/>
+              </a:rPr>
+              <a:t>        {</a:t>
+            </a:r>
+            <a:r>
+              <a:rPr lang="en-US" sz="1300" b="0" dirty="0">
+                <a:solidFill>
+                  <a:srgbClr val="098658"/>
+                </a:solidFill>
+                <a:effectLst/>
+                <a:latin typeface="Consolas" panose="020B0609020204030204" pitchFamily="49" charset="0"/>
+              </a:rPr>
+              <a:t>1</a:t>
+            </a:r>
+            <a:r>
+              <a:rPr lang="en-US" sz="1300" b="0" dirty="0">
+                <a:solidFill>
+                  <a:srgbClr val="000000"/>
+                </a:solidFill>
+                <a:effectLst/>
+                <a:latin typeface="Consolas" panose="020B0609020204030204" pitchFamily="49" charset="0"/>
+              </a:rPr>
+              <a:t>, </a:t>
+            </a:r>
+            <a:r>
+              <a:rPr lang="en-US" sz="1300" b="0" dirty="0">
+                <a:solidFill>
+                  <a:srgbClr val="098658"/>
+                </a:solidFill>
+                <a:effectLst/>
+                <a:latin typeface="Consolas" panose="020B0609020204030204" pitchFamily="49" charset="0"/>
+              </a:rPr>
+              <a:t>2</a:t>
+            </a:r>
+            <a:r>
+              <a:rPr lang="en-US" sz="1300" b="0" dirty="0">
+                <a:solidFill>
+                  <a:srgbClr val="000000"/>
+                </a:solidFill>
+                <a:effectLst/>
+                <a:latin typeface="Consolas" panose="020B0609020204030204" pitchFamily="49" charset="0"/>
+              </a:rPr>
+              <a:t>, </a:t>
+            </a:r>
+            <a:r>
+              <a:rPr lang="en-US" sz="1300" b="0" dirty="0">
+                <a:solidFill>
+                  <a:srgbClr val="098658"/>
+                </a:solidFill>
+                <a:effectLst/>
+                <a:latin typeface="Consolas" panose="020B0609020204030204" pitchFamily="49" charset="0"/>
+              </a:rPr>
+              <a:t>3</a:t>
+            </a:r>
+            <a:r>
+              <a:rPr lang="en-US" sz="1300" b="0" dirty="0">
+                <a:solidFill>
+                  <a:srgbClr val="000000"/>
+                </a:solidFill>
+                <a:effectLst/>
+                <a:latin typeface="Consolas" panose="020B0609020204030204" pitchFamily="49" charset="0"/>
+              </a:rPr>
+              <a:t>, </a:t>
+            </a:r>
+            <a:r>
+              <a:rPr lang="en-US" sz="1300" b="0" dirty="0">
+                <a:solidFill>
+                  <a:srgbClr val="098658"/>
+                </a:solidFill>
+                <a:effectLst/>
+                <a:latin typeface="Consolas" panose="020B0609020204030204" pitchFamily="49" charset="0"/>
+              </a:rPr>
+              <a:t>4</a:t>
+            </a:r>
+            <a:r>
+              <a:rPr lang="en-US" sz="1300" b="0" dirty="0">
+                <a:solidFill>
+                  <a:srgbClr val="000000"/>
+                </a:solidFill>
+                <a:effectLst/>
+                <a:latin typeface="Consolas" panose="020B0609020204030204" pitchFamily="49" charset="0"/>
+              </a:rPr>
+              <a:t>},</a:t>
+            </a:r>
+          </a:p>
+          <a:p>
+            <a:pPr>
+              <a:buNone/>
+            </a:pPr>
+            <a:r>
+              <a:rPr lang="en-US" sz="1300" b="0" dirty="0">
+                <a:solidFill>
+                  <a:srgbClr val="000000"/>
+                </a:solidFill>
+                <a:effectLst/>
+                <a:latin typeface="Consolas" panose="020B0609020204030204" pitchFamily="49" charset="0"/>
+              </a:rPr>
+              <a:t>        {</a:t>
+            </a:r>
+            <a:r>
+              <a:rPr lang="en-US" sz="1300" b="0" dirty="0">
+                <a:solidFill>
+                  <a:srgbClr val="098658"/>
+                </a:solidFill>
+                <a:effectLst/>
+                <a:latin typeface="Consolas" panose="020B0609020204030204" pitchFamily="49" charset="0"/>
+              </a:rPr>
+              <a:t>5</a:t>
+            </a:r>
+            <a:r>
+              <a:rPr lang="en-US" sz="1300" b="0" dirty="0">
+                <a:solidFill>
+                  <a:srgbClr val="000000"/>
+                </a:solidFill>
+                <a:effectLst/>
+                <a:latin typeface="Consolas" panose="020B0609020204030204" pitchFamily="49" charset="0"/>
+              </a:rPr>
+              <a:t>, </a:t>
+            </a:r>
+            <a:r>
+              <a:rPr lang="en-US" sz="1300" b="0" dirty="0">
+                <a:solidFill>
+                  <a:srgbClr val="098658"/>
+                </a:solidFill>
+                <a:effectLst/>
+                <a:latin typeface="Consolas" panose="020B0609020204030204" pitchFamily="49" charset="0"/>
+              </a:rPr>
+              <a:t>6</a:t>
+            </a:r>
+            <a:r>
+              <a:rPr lang="en-US" sz="1300" b="0" dirty="0">
+                <a:solidFill>
+                  <a:srgbClr val="000000"/>
+                </a:solidFill>
+                <a:effectLst/>
+                <a:latin typeface="Consolas" panose="020B0609020204030204" pitchFamily="49" charset="0"/>
+              </a:rPr>
+              <a:t>, </a:t>
+            </a:r>
+            <a:r>
+              <a:rPr lang="en-US" sz="1300" b="0" dirty="0">
+                <a:solidFill>
+                  <a:srgbClr val="098658"/>
+                </a:solidFill>
+                <a:effectLst/>
+                <a:latin typeface="Consolas" panose="020B0609020204030204" pitchFamily="49" charset="0"/>
+              </a:rPr>
+              <a:t>7</a:t>
+            </a:r>
+            <a:r>
+              <a:rPr lang="en-US" sz="1300" b="0" dirty="0">
+                <a:solidFill>
+                  <a:srgbClr val="000000"/>
+                </a:solidFill>
+                <a:effectLst/>
+                <a:latin typeface="Consolas" panose="020B0609020204030204" pitchFamily="49" charset="0"/>
+              </a:rPr>
+              <a:t>, </a:t>
+            </a:r>
+            <a:r>
+              <a:rPr lang="en-US" sz="1300" b="0" dirty="0">
+                <a:solidFill>
+                  <a:srgbClr val="098658"/>
+                </a:solidFill>
+                <a:effectLst/>
+                <a:latin typeface="Consolas" panose="020B0609020204030204" pitchFamily="49" charset="0"/>
+              </a:rPr>
+              <a:t>8</a:t>
+            </a:r>
+            <a:r>
+              <a:rPr lang="en-US" sz="1300" b="0" dirty="0">
+                <a:solidFill>
+                  <a:srgbClr val="000000"/>
+                </a:solidFill>
+                <a:effectLst/>
+                <a:latin typeface="Consolas" panose="020B0609020204030204" pitchFamily="49" charset="0"/>
+              </a:rPr>
+              <a:t>},</a:t>
+            </a:r>
+          </a:p>
+          <a:p>
+            <a:pPr>
+              <a:buNone/>
+            </a:pPr>
+            <a:r>
+              <a:rPr lang="en-US" sz="1300" b="0" dirty="0">
+                <a:solidFill>
+                  <a:srgbClr val="000000"/>
+                </a:solidFill>
+                <a:effectLst/>
+                <a:latin typeface="Consolas" panose="020B0609020204030204" pitchFamily="49" charset="0"/>
+              </a:rPr>
+              <a:t>        {</a:t>
+            </a:r>
+            <a:r>
+              <a:rPr lang="en-US" sz="1300" b="0" dirty="0">
+                <a:solidFill>
+                  <a:srgbClr val="098658"/>
+                </a:solidFill>
+                <a:effectLst/>
+                <a:latin typeface="Consolas" panose="020B0609020204030204" pitchFamily="49" charset="0"/>
+              </a:rPr>
+              <a:t>9</a:t>
+            </a:r>
+            <a:r>
+              <a:rPr lang="en-US" sz="1300" b="0" dirty="0">
+                <a:solidFill>
+                  <a:srgbClr val="000000"/>
+                </a:solidFill>
+                <a:effectLst/>
+                <a:latin typeface="Consolas" panose="020B0609020204030204" pitchFamily="49" charset="0"/>
+              </a:rPr>
+              <a:t>, </a:t>
+            </a:r>
+            <a:r>
+              <a:rPr lang="en-US" sz="1300" b="0" dirty="0">
+                <a:solidFill>
+                  <a:srgbClr val="098658"/>
+                </a:solidFill>
+                <a:effectLst/>
+                <a:latin typeface="Consolas" panose="020B0609020204030204" pitchFamily="49" charset="0"/>
+              </a:rPr>
+              <a:t>10</a:t>
+            </a:r>
+            <a:r>
+              <a:rPr lang="en-US" sz="1300" b="0" dirty="0">
+                <a:solidFill>
+                  <a:srgbClr val="000000"/>
+                </a:solidFill>
+                <a:effectLst/>
+                <a:latin typeface="Consolas" panose="020B0609020204030204" pitchFamily="49" charset="0"/>
+              </a:rPr>
+              <a:t>, </a:t>
+            </a:r>
+            <a:r>
+              <a:rPr lang="en-US" sz="1300" b="0" dirty="0">
+                <a:solidFill>
+                  <a:srgbClr val="098658"/>
+                </a:solidFill>
+                <a:effectLst/>
+                <a:latin typeface="Consolas" panose="020B0609020204030204" pitchFamily="49" charset="0"/>
+              </a:rPr>
+              <a:t>11</a:t>
+            </a:r>
+            <a:r>
+              <a:rPr lang="en-US" sz="1300" b="0" dirty="0">
+                <a:solidFill>
+                  <a:srgbClr val="000000"/>
+                </a:solidFill>
+                <a:effectLst/>
+                <a:latin typeface="Consolas" panose="020B0609020204030204" pitchFamily="49" charset="0"/>
+              </a:rPr>
+              <a:t>, </a:t>
+            </a:r>
+            <a:r>
+              <a:rPr lang="en-US" sz="1300" b="0" dirty="0">
+                <a:solidFill>
+                  <a:srgbClr val="098658"/>
+                </a:solidFill>
+                <a:effectLst/>
+                <a:latin typeface="Consolas" panose="020B0609020204030204" pitchFamily="49" charset="0"/>
+              </a:rPr>
+              <a:t>12</a:t>
+            </a:r>
+            <a:r>
+              <a:rPr lang="en-US" sz="1300" b="0" dirty="0">
+                <a:solidFill>
+                  <a:srgbClr val="000000"/>
+                </a:solidFill>
+                <a:effectLst/>
+                <a:latin typeface="Consolas" panose="020B0609020204030204" pitchFamily="49" charset="0"/>
+              </a:rPr>
+              <a:t>}</a:t>
+            </a:r>
+          </a:p>
+          <a:p>
+            <a:pPr>
+              <a:buNone/>
+            </a:pPr>
+            <a:r>
+              <a:rPr lang="en-US" sz="1300" b="0" dirty="0">
+                <a:solidFill>
+                  <a:srgbClr val="000000"/>
+                </a:solidFill>
+                <a:effectLst/>
+                <a:latin typeface="Consolas" panose="020B0609020204030204" pitchFamily="49" charset="0"/>
+              </a:rPr>
+              <a:t>    };</a:t>
+            </a:r>
+          </a:p>
+          <a:p>
+            <a:pPr>
+              <a:buNone/>
+            </a:pPr>
+            <a:endParaRPr lang="en-US" sz="1300" b="0" dirty="0">
+              <a:solidFill>
+                <a:srgbClr val="000000"/>
+              </a:solidFill>
+              <a:effectLst/>
+              <a:latin typeface="Consolas" panose="020B0609020204030204" pitchFamily="49" charset="0"/>
+            </a:endParaRPr>
+          </a:p>
+          <a:p>
+            <a:pPr>
+              <a:buNone/>
+            </a:pPr>
+            <a:r>
+              <a:rPr lang="en-US" sz="1300" b="0" dirty="0">
+                <a:solidFill>
+                  <a:srgbClr val="000000"/>
+                </a:solidFill>
+                <a:effectLst/>
+                <a:latin typeface="Consolas" panose="020B0609020204030204" pitchFamily="49" charset="0"/>
+              </a:rPr>
+              <a:t>    </a:t>
+            </a:r>
+            <a:r>
+              <a:rPr lang="en-US" sz="1300" b="0" dirty="0">
+                <a:solidFill>
+                  <a:srgbClr val="0000FF"/>
+                </a:solidFill>
+                <a:effectLst/>
+                <a:latin typeface="Consolas" panose="020B0609020204030204" pitchFamily="49" charset="0"/>
+              </a:rPr>
+              <a:t>int</a:t>
+            </a:r>
+            <a:r>
+              <a:rPr lang="en-US" sz="1300" b="0" dirty="0">
+                <a:solidFill>
+                  <a:srgbClr val="000000"/>
+                </a:solidFill>
+                <a:effectLst/>
+                <a:latin typeface="Consolas" panose="020B0609020204030204" pitchFamily="49" charset="0"/>
+              </a:rPr>
+              <a:t> target = </a:t>
+            </a:r>
+            <a:r>
+              <a:rPr lang="en-US" sz="1300" b="0" dirty="0">
+                <a:solidFill>
+                  <a:srgbClr val="098658"/>
+                </a:solidFill>
+                <a:effectLst/>
+                <a:latin typeface="Consolas" panose="020B0609020204030204" pitchFamily="49" charset="0"/>
+              </a:rPr>
+              <a:t>7</a:t>
+            </a:r>
+            <a:r>
+              <a:rPr lang="en-US" sz="1300" b="0" dirty="0">
+                <a:solidFill>
+                  <a:srgbClr val="000000"/>
+                </a:solidFill>
+                <a:effectLst/>
+                <a:latin typeface="Consolas" panose="020B0609020204030204" pitchFamily="49" charset="0"/>
+              </a:rPr>
+              <a:t>;</a:t>
+            </a:r>
+          </a:p>
+          <a:p>
+            <a:pPr>
+              <a:buNone/>
+            </a:pPr>
+            <a:r>
+              <a:rPr lang="en-US" sz="1300" b="0" dirty="0">
+                <a:solidFill>
+                  <a:srgbClr val="000000"/>
+                </a:solidFill>
+                <a:effectLst/>
+                <a:latin typeface="Consolas" panose="020B0609020204030204" pitchFamily="49" charset="0"/>
+              </a:rPr>
+              <a:t>    </a:t>
+            </a:r>
+            <a:r>
+              <a:rPr lang="en-US" sz="1300" b="0" dirty="0">
+                <a:solidFill>
+                  <a:srgbClr val="0000FF"/>
+                </a:solidFill>
+                <a:effectLst/>
+                <a:latin typeface="Consolas" panose="020B0609020204030204" pitchFamily="49" charset="0"/>
+              </a:rPr>
+              <a:t>int</a:t>
+            </a:r>
+            <a:r>
+              <a:rPr lang="en-US" sz="1300" b="0" dirty="0">
+                <a:solidFill>
+                  <a:srgbClr val="000000"/>
+                </a:solidFill>
+                <a:effectLst/>
+                <a:latin typeface="Consolas" panose="020B0609020204030204" pitchFamily="49" charset="0"/>
+              </a:rPr>
+              <a:t> found = </a:t>
+            </a:r>
+            <a:r>
+              <a:rPr lang="en-US" sz="1300" b="0" dirty="0">
+                <a:solidFill>
+                  <a:srgbClr val="098658"/>
+                </a:solidFill>
+                <a:effectLst/>
+                <a:latin typeface="Consolas" panose="020B0609020204030204" pitchFamily="49" charset="0"/>
+              </a:rPr>
+              <a:t>0</a:t>
+            </a:r>
+            <a:r>
+              <a:rPr lang="en-US" sz="1300" b="0" dirty="0">
+                <a:solidFill>
+                  <a:srgbClr val="000000"/>
+                </a:solidFill>
+                <a:effectLst/>
+                <a:latin typeface="Consolas" panose="020B0609020204030204" pitchFamily="49" charset="0"/>
+              </a:rPr>
+              <a:t>;</a:t>
+            </a:r>
+            <a:br>
+              <a:rPr lang="en-US" sz="1300" b="0" dirty="0">
+                <a:solidFill>
+                  <a:srgbClr val="000000"/>
+                </a:solidFill>
+                <a:effectLst/>
+                <a:latin typeface="Consolas" panose="020B0609020204030204" pitchFamily="49" charset="0"/>
+              </a:rPr>
+            </a:br>
+            <a:endParaRPr lang="en-US" sz="1300" b="0" dirty="0">
+              <a:solidFill>
+                <a:srgbClr val="000000"/>
+              </a:solidFill>
+              <a:effectLst/>
+              <a:latin typeface="Consolas" panose="020B0609020204030204" pitchFamily="49" charset="0"/>
+            </a:endParaRPr>
+          </a:p>
+          <a:p>
+            <a:pPr>
+              <a:buNone/>
+            </a:pPr>
+            <a:r>
+              <a:rPr lang="en-US" sz="1300" b="0" dirty="0">
+                <a:solidFill>
+                  <a:srgbClr val="000000"/>
+                </a:solidFill>
+                <a:effectLst/>
+                <a:latin typeface="Consolas" panose="020B0609020204030204" pitchFamily="49" charset="0"/>
+              </a:rPr>
+              <a:t>    </a:t>
+            </a:r>
+            <a:r>
+              <a:rPr lang="en-US" sz="1300" b="0" dirty="0">
+                <a:solidFill>
+                  <a:srgbClr val="0000FF"/>
+                </a:solidFill>
+                <a:effectLst/>
+                <a:latin typeface="Consolas" panose="020B0609020204030204" pitchFamily="49" charset="0"/>
+              </a:rPr>
+              <a:t>for</a:t>
+            </a:r>
+            <a:r>
+              <a:rPr lang="en-US" sz="1300" b="0" dirty="0">
+                <a:solidFill>
+                  <a:srgbClr val="000000"/>
+                </a:solidFill>
+                <a:effectLst/>
+                <a:latin typeface="Consolas" panose="020B0609020204030204" pitchFamily="49" charset="0"/>
+              </a:rPr>
+              <a:t> (</a:t>
+            </a:r>
+            <a:r>
+              <a:rPr lang="en-US" sz="1300" b="0" dirty="0">
+                <a:solidFill>
+                  <a:srgbClr val="0000FF"/>
+                </a:solidFill>
+                <a:effectLst/>
+                <a:latin typeface="Consolas" panose="020B0609020204030204" pitchFamily="49" charset="0"/>
+              </a:rPr>
+              <a:t>int</a:t>
+            </a:r>
+            <a:r>
+              <a:rPr lang="en-US" sz="1300" b="0" dirty="0">
+                <a:solidFill>
+                  <a:srgbClr val="000000"/>
+                </a:solidFill>
+                <a:effectLst/>
+                <a:latin typeface="Consolas" panose="020B0609020204030204" pitchFamily="49" charset="0"/>
+              </a:rPr>
+              <a:t> </a:t>
+            </a:r>
+            <a:r>
+              <a:rPr lang="en-US" sz="1300" b="0" dirty="0" err="1">
+                <a:solidFill>
+                  <a:srgbClr val="000000"/>
+                </a:solidFill>
+                <a:effectLst/>
+                <a:latin typeface="Consolas" panose="020B0609020204030204" pitchFamily="49" charset="0"/>
+              </a:rPr>
+              <a:t>i</a:t>
+            </a:r>
+            <a:r>
+              <a:rPr lang="en-US" sz="1300" b="0" dirty="0">
+                <a:solidFill>
+                  <a:srgbClr val="000000"/>
+                </a:solidFill>
+                <a:effectLst/>
+                <a:latin typeface="Consolas" panose="020B0609020204030204" pitchFamily="49" charset="0"/>
+              </a:rPr>
+              <a:t> = </a:t>
+            </a:r>
+            <a:r>
+              <a:rPr lang="en-US" sz="1300" b="0" dirty="0">
+                <a:solidFill>
+                  <a:srgbClr val="098658"/>
+                </a:solidFill>
+                <a:effectLst/>
+                <a:latin typeface="Consolas" panose="020B0609020204030204" pitchFamily="49" charset="0"/>
+              </a:rPr>
+              <a:t>0</a:t>
+            </a:r>
+            <a:r>
+              <a:rPr lang="en-US" sz="1300" b="0" dirty="0">
+                <a:solidFill>
+                  <a:srgbClr val="000000"/>
+                </a:solidFill>
+                <a:effectLst/>
+                <a:latin typeface="Consolas" panose="020B0609020204030204" pitchFamily="49" charset="0"/>
+              </a:rPr>
+              <a:t>; </a:t>
+            </a:r>
+            <a:r>
+              <a:rPr lang="en-US" sz="1300" b="0" dirty="0" err="1">
+                <a:solidFill>
+                  <a:srgbClr val="000000"/>
+                </a:solidFill>
+                <a:effectLst/>
+                <a:latin typeface="Consolas" panose="020B0609020204030204" pitchFamily="49" charset="0"/>
+              </a:rPr>
+              <a:t>i</a:t>
+            </a:r>
+            <a:r>
+              <a:rPr lang="en-US" sz="1300" b="0" dirty="0">
+                <a:solidFill>
+                  <a:srgbClr val="000000"/>
+                </a:solidFill>
+                <a:effectLst/>
+                <a:latin typeface="Consolas" panose="020B0609020204030204" pitchFamily="49" charset="0"/>
+              </a:rPr>
+              <a:t> &lt; </a:t>
+            </a:r>
+            <a:r>
+              <a:rPr lang="en-US" sz="1300" b="0" dirty="0">
+                <a:solidFill>
+                  <a:srgbClr val="098658"/>
+                </a:solidFill>
+                <a:effectLst/>
+                <a:latin typeface="Consolas" panose="020B0609020204030204" pitchFamily="49" charset="0"/>
+              </a:rPr>
+              <a:t>3</a:t>
+            </a:r>
+            <a:r>
+              <a:rPr lang="en-US" sz="1300" b="0" dirty="0">
+                <a:solidFill>
+                  <a:srgbClr val="000000"/>
+                </a:solidFill>
+                <a:effectLst/>
+                <a:latin typeface="Consolas" panose="020B0609020204030204" pitchFamily="49" charset="0"/>
+              </a:rPr>
+              <a:t>; </a:t>
+            </a:r>
+            <a:r>
+              <a:rPr lang="en-US" sz="1300" b="0" dirty="0" err="1">
+                <a:solidFill>
+                  <a:srgbClr val="000000"/>
+                </a:solidFill>
+                <a:effectLst/>
+                <a:latin typeface="Consolas" panose="020B0609020204030204" pitchFamily="49" charset="0"/>
+              </a:rPr>
+              <a:t>i</a:t>
+            </a:r>
+            <a:r>
+              <a:rPr lang="en-US" sz="1300" b="0" dirty="0">
+                <a:solidFill>
+                  <a:srgbClr val="000000"/>
+                </a:solidFill>
+                <a:effectLst/>
+                <a:latin typeface="Consolas" panose="020B0609020204030204" pitchFamily="49" charset="0"/>
+              </a:rPr>
+              <a:t>++) {</a:t>
+            </a:r>
+          </a:p>
+          <a:p>
+            <a:pPr>
+              <a:buNone/>
+            </a:pPr>
+            <a:r>
+              <a:rPr lang="en-US" sz="1300" b="0" dirty="0">
+                <a:solidFill>
+                  <a:srgbClr val="000000"/>
+                </a:solidFill>
+                <a:effectLst/>
+                <a:latin typeface="Consolas" panose="020B0609020204030204" pitchFamily="49" charset="0"/>
+              </a:rPr>
+              <a:t>        </a:t>
+            </a:r>
+            <a:r>
+              <a:rPr lang="en-US" sz="1300" b="0" dirty="0">
+                <a:solidFill>
+                  <a:srgbClr val="0000FF"/>
+                </a:solidFill>
+                <a:effectLst/>
+                <a:latin typeface="Consolas" panose="020B0609020204030204" pitchFamily="49" charset="0"/>
+              </a:rPr>
+              <a:t>for</a:t>
+            </a:r>
+            <a:r>
+              <a:rPr lang="en-US" sz="1300" b="0" dirty="0">
+                <a:solidFill>
+                  <a:srgbClr val="000000"/>
+                </a:solidFill>
+                <a:effectLst/>
+                <a:latin typeface="Consolas" panose="020B0609020204030204" pitchFamily="49" charset="0"/>
+              </a:rPr>
+              <a:t> (</a:t>
+            </a:r>
+            <a:r>
+              <a:rPr lang="en-US" sz="1300" b="0" dirty="0">
+                <a:solidFill>
+                  <a:srgbClr val="0000FF"/>
+                </a:solidFill>
+                <a:effectLst/>
+                <a:latin typeface="Consolas" panose="020B0609020204030204" pitchFamily="49" charset="0"/>
+              </a:rPr>
+              <a:t>int</a:t>
+            </a:r>
+            <a:r>
+              <a:rPr lang="en-US" sz="1300" b="0" dirty="0">
+                <a:solidFill>
+                  <a:srgbClr val="000000"/>
+                </a:solidFill>
+                <a:effectLst/>
+                <a:latin typeface="Consolas" panose="020B0609020204030204" pitchFamily="49" charset="0"/>
+              </a:rPr>
+              <a:t> j = </a:t>
+            </a:r>
+            <a:r>
+              <a:rPr lang="en-US" sz="1300" b="0" dirty="0">
+                <a:solidFill>
+                  <a:srgbClr val="098658"/>
+                </a:solidFill>
+                <a:effectLst/>
+                <a:latin typeface="Consolas" panose="020B0609020204030204" pitchFamily="49" charset="0"/>
+              </a:rPr>
+              <a:t>0</a:t>
+            </a:r>
+            <a:r>
+              <a:rPr lang="en-US" sz="1300" b="0" dirty="0">
+                <a:solidFill>
+                  <a:srgbClr val="000000"/>
+                </a:solidFill>
+                <a:effectLst/>
+                <a:latin typeface="Consolas" panose="020B0609020204030204" pitchFamily="49" charset="0"/>
+              </a:rPr>
+              <a:t>; j &lt; </a:t>
+            </a:r>
+            <a:r>
+              <a:rPr lang="en-US" sz="1300" b="0" dirty="0">
+                <a:solidFill>
+                  <a:srgbClr val="098658"/>
+                </a:solidFill>
+                <a:effectLst/>
+                <a:latin typeface="Consolas" panose="020B0609020204030204" pitchFamily="49" charset="0"/>
+              </a:rPr>
+              <a:t>4</a:t>
+            </a:r>
+            <a:r>
+              <a:rPr lang="en-US" sz="1300" b="0" dirty="0">
+                <a:solidFill>
+                  <a:srgbClr val="000000"/>
+                </a:solidFill>
+                <a:effectLst/>
+                <a:latin typeface="Consolas" panose="020B0609020204030204" pitchFamily="49" charset="0"/>
+              </a:rPr>
+              <a:t>; </a:t>
+            </a:r>
+            <a:r>
+              <a:rPr lang="en-US" sz="1300" b="0" dirty="0" err="1">
+                <a:solidFill>
+                  <a:srgbClr val="000000"/>
+                </a:solidFill>
+                <a:effectLst/>
+                <a:latin typeface="Consolas" panose="020B0609020204030204" pitchFamily="49" charset="0"/>
+              </a:rPr>
+              <a:t>j++</a:t>
+            </a:r>
+            <a:r>
+              <a:rPr lang="en-US" sz="1300" b="0" dirty="0">
+                <a:solidFill>
+                  <a:srgbClr val="000000"/>
+                </a:solidFill>
+                <a:effectLst/>
+                <a:latin typeface="Consolas" panose="020B0609020204030204" pitchFamily="49" charset="0"/>
+              </a:rPr>
+              <a:t>) {</a:t>
+            </a:r>
+          </a:p>
+          <a:p>
+            <a:pPr>
+              <a:buNone/>
+            </a:pPr>
+            <a:r>
+              <a:rPr lang="en-US" sz="1300" b="0" dirty="0">
+                <a:solidFill>
+                  <a:srgbClr val="000000"/>
+                </a:solidFill>
+                <a:effectLst/>
+                <a:latin typeface="Consolas" panose="020B0609020204030204" pitchFamily="49" charset="0"/>
+              </a:rPr>
+              <a:t>            </a:t>
+            </a:r>
+            <a:r>
+              <a:rPr lang="en-US" sz="1300" b="0" dirty="0">
+                <a:solidFill>
+                  <a:srgbClr val="0000FF"/>
+                </a:solidFill>
+                <a:effectLst/>
+                <a:latin typeface="Consolas" panose="020B0609020204030204" pitchFamily="49" charset="0"/>
+              </a:rPr>
+              <a:t>if</a:t>
+            </a:r>
+            <a:r>
+              <a:rPr lang="en-US" sz="1300" b="0" dirty="0">
+                <a:solidFill>
+                  <a:srgbClr val="000000"/>
+                </a:solidFill>
+                <a:effectLst/>
+                <a:latin typeface="Consolas" panose="020B0609020204030204" pitchFamily="49" charset="0"/>
+              </a:rPr>
+              <a:t> (a[</a:t>
+            </a:r>
+            <a:r>
+              <a:rPr lang="en-US" sz="1300" b="0" dirty="0" err="1">
+                <a:solidFill>
+                  <a:srgbClr val="000000"/>
+                </a:solidFill>
+                <a:effectLst/>
+                <a:latin typeface="Consolas" panose="020B0609020204030204" pitchFamily="49" charset="0"/>
+              </a:rPr>
+              <a:t>i</a:t>
+            </a:r>
+            <a:r>
+              <a:rPr lang="en-US" sz="1300" b="0" dirty="0">
+                <a:solidFill>
+                  <a:srgbClr val="000000"/>
+                </a:solidFill>
+                <a:effectLst/>
+                <a:latin typeface="Consolas" panose="020B0609020204030204" pitchFamily="49" charset="0"/>
+              </a:rPr>
+              <a:t>][j] == target) {</a:t>
+            </a:r>
+          </a:p>
+          <a:p>
+            <a:pPr>
+              <a:buNone/>
+            </a:pPr>
+            <a:r>
+              <a:rPr lang="en-US" sz="1300" b="0" dirty="0">
+                <a:solidFill>
+                  <a:srgbClr val="000000"/>
+                </a:solidFill>
+                <a:effectLst/>
+                <a:latin typeface="Consolas" panose="020B0609020204030204" pitchFamily="49" charset="0"/>
+              </a:rPr>
+              <a:t>                found = </a:t>
+            </a:r>
+            <a:r>
+              <a:rPr lang="en-US" sz="1300" b="0" dirty="0">
+                <a:solidFill>
+                  <a:srgbClr val="098658"/>
+                </a:solidFill>
+                <a:effectLst/>
+                <a:latin typeface="Consolas" panose="020B0609020204030204" pitchFamily="49" charset="0"/>
+              </a:rPr>
+              <a:t>1</a:t>
+            </a:r>
+            <a:r>
+              <a:rPr lang="en-US" sz="1300" b="0" dirty="0">
+                <a:solidFill>
+                  <a:srgbClr val="000000"/>
+                </a:solidFill>
+                <a:effectLst/>
+                <a:latin typeface="Consolas" panose="020B0609020204030204" pitchFamily="49" charset="0"/>
+              </a:rPr>
+              <a:t>;</a:t>
+            </a:r>
+          </a:p>
+          <a:p>
+            <a:pPr>
+              <a:buNone/>
+            </a:pPr>
+            <a:r>
+              <a:rPr lang="en-US" sz="1300" b="0" dirty="0">
+                <a:solidFill>
+                  <a:srgbClr val="000000"/>
+                </a:solidFill>
+                <a:effectLst/>
+                <a:latin typeface="Consolas" panose="020B0609020204030204" pitchFamily="49" charset="0"/>
+              </a:rPr>
+              <a:t>                </a:t>
+            </a:r>
+            <a:r>
+              <a:rPr lang="en-US" sz="1300" b="1" dirty="0" err="1">
+                <a:solidFill>
+                  <a:srgbClr val="0000FF"/>
+                </a:solidFill>
+                <a:effectLst/>
+                <a:latin typeface="Consolas" panose="020B0609020204030204" pitchFamily="49" charset="0"/>
+              </a:rPr>
+              <a:t>goto</a:t>
+            </a:r>
+            <a:r>
+              <a:rPr lang="en-US" sz="1300" b="1" dirty="0">
+                <a:solidFill>
+                  <a:srgbClr val="000000"/>
+                </a:solidFill>
+                <a:effectLst/>
+                <a:latin typeface="Consolas" panose="020B0609020204030204" pitchFamily="49" charset="0"/>
+              </a:rPr>
+              <a:t> done;</a:t>
+            </a:r>
+          </a:p>
+          <a:p>
+            <a:pPr>
+              <a:buNone/>
+            </a:pPr>
+            <a:r>
+              <a:rPr lang="en-US" sz="1300" b="0" dirty="0">
+                <a:solidFill>
+                  <a:srgbClr val="000000"/>
+                </a:solidFill>
+                <a:effectLst/>
+                <a:latin typeface="Consolas" panose="020B0609020204030204" pitchFamily="49" charset="0"/>
+              </a:rPr>
+              <a:t>            }</a:t>
+            </a:r>
+          </a:p>
+          <a:p>
+            <a:pPr>
+              <a:buNone/>
+            </a:pPr>
+            <a:r>
+              <a:rPr lang="en-US" sz="1300" b="0" dirty="0">
+                <a:solidFill>
+                  <a:srgbClr val="000000"/>
+                </a:solidFill>
+                <a:effectLst/>
+                <a:latin typeface="Consolas" panose="020B0609020204030204" pitchFamily="49" charset="0"/>
+              </a:rPr>
+              <a:t>        }</a:t>
+            </a:r>
+          </a:p>
+          <a:p>
+            <a:pPr>
+              <a:buNone/>
+            </a:pPr>
+            <a:r>
+              <a:rPr lang="en-US" sz="1300" b="0" dirty="0">
+                <a:solidFill>
+                  <a:srgbClr val="000000"/>
+                </a:solidFill>
+                <a:effectLst/>
+                <a:latin typeface="Consolas" panose="020B0609020204030204" pitchFamily="49" charset="0"/>
+              </a:rPr>
+              <a:t>    }</a:t>
+            </a:r>
+          </a:p>
+          <a:p>
+            <a:pPr>
+              <a:buNone/>
+            </a:pPr>
+            <a:endParaRPr lang="en-US" sz="1300" b="0" dirty="0">
+              <a:solidFill>
+                <a:srgbClr val="000000"/>
+              </a:solidFill>
+              <a:effectLst/>
+              <a:latin typeface="Consolas" panose="020B0609020204030204" pitchFamily="49" charset="0"/>
+            </a:endParaRPr>
+          </a:p>
+          <a:p>
+            <a:pPr>
+              <a:buNone/>
+            </a:pPr>
+            <a:r>
+              <a:rPr lang="en-US" sz="1300" b="0" dirty="0">
+                <a:solidFill>
+                  <a:srgbClr val="000000"/>
+                </a:solidFill>
+                <a:effectLst/>
+                <a:latin typeface="Consolas" panose="020B0609020204030204" pitchFamily="49" charset="0"/>
+              </a:rPr>
+              <a:t>done:</a:t>
+            </a:r>
+          </a:p>
+          <a:p>
+            <a:pPr>
+              <a:buNone/>
+            </a:pPr>
+            <a:r>
+              <a:rPr lang="en-US" sz="1300" b="0" dirty="0">
+                <a:solidFill>
+                  <a:srgbClr val="000000"/>
+                </a:solidFill>
+                <a:effectLst/>
+                <a:latin typeface="Consolas" panose="020B0609020204030204" pitchFamily="49" charset="0"/>
+              </a:rPr>
+              <a:t>    </a:t>
+            </a:r>
+            <a:r>
+              <a:rPr lang="en-US" sz="1300" b="0" dirty="0">
+                <a:solidFill>
+                  <a:srgbClr val="0000FF"/>
+                </a:solidFill>
+                <a:effectLst/>
+                <a:latin typeface="Consolas" panose="020B0609020204030204" pitchFamily="49" charset="0"/>
+              </a:rPr>
+              <a:t>if</a:t>
+            </a:r>
+            <a:r>
+              <a:rPr lang="en-US" sz="1300" b="0" dirty="0">
+                <a:solidFill>
+                  <a:srgbClr val="000000"/>
+                </a:solidFill>
+                <a:effectLst/>
+                <a:latin typeface="Consolas" panose="020B0609020204030204" pitchFamily="49" charset="0"/>
+              </a:rPr>
+              <a:t> (found)</a:t>
+            </a:r>
+            <a:r>
+              <a:rPr lang="ru-RU" sz="1300" b="0" dirty="0">
+                <a:solidFill>
+                  <a:srgbClr val="000000"/>
+                </a:solidFill>
+                <a:effectLst/>
+                <a:latin typeface="Consolas" panose="020B0609020204030204" pitchFamily="49" charset="0"/>
+              </a:rPr>
+              <a:t> </a:t>
+            </a:r>
+            <a:r>
+              <a:rPr lang="en-US" sz="1300" b="0" dirty="0" err="1">
+                <a:solidFill>
+                  <a:srgbClr val="000000"/>
                 </a:solidFill>
                 <a:effectLst/>
                 <a:latin typeface="Consolas" panose="020B0609020204030204" pitchFamily="49" charset="0"/>
@@ -29444,7 +33665,7 @@
               <a:t>printf</a:t>
             </a:r>
             <a:r>
-              <a:rPr lang="pt-BR" b="0" dirty="0">
+              <a:rPr lang="en-US" sz="1300" b="0" dirty="0">
                 <a:solidFill>
                   <a:srgbClr val="000000"/>
                 </a:solidFill>
@@ -29454,96 +33675,212 @@
               <a:t>(</a:t>
             </a:r>
             <a:r>
-              <a:rPr lang="pt-BR" b="0" dirty="0">
-                <a:solidFill>
-                  <a:srgbClr val="E21F1F"/>
-                </a:solidFill>
-                <a:effectLst/>
-                <a:latin typeface="Consolas" panose="020B0609020204030204" pitchFamily="49" charset="0"/>
-              </a:rPr>
-              <a:t>"</a:t>
-            </a:r>
-            <a:r>
-              <a:rPr lang="pt-BR" b="0" dirty="0">
-                <a:solidFill>
-                  <a:srgbClr val="1F377F"/>
-                </a:solidFill>
-                <a:effectLst/>
-                <a:latin typeface="Consolas" panose="020B0609020204030204" pitchFamily="49" charset="0"/>
-              </a:rPr>
-              <a:t>%d</a:t>
-            </a:r>
-            <a:r>
-              <a:rPr lang="pt-BR" b="0" dirty="0">
-                <a:solidFill>
-                  <a:srgbClr val="B776FB"/>
-                </a:solidFill>
-                <a:effectLst/>
-                <a:latin typeface="Consolas" panose="020B0609020204030204" pitchFamily="49" charset="0"/>
-              </a:rPr>
-              <a:t>\n</a:t>
-            </a:r>
-            <a:r>
-              <a:rPr lang="pt-BR" b="0" dirty="0">
-                <a:solidFill>
-                  <a:srgbClr val="E21F1F"/>
-                </a:solidFill>
-                <a:effectLst/>
-                <a:latin typeface="Consolas" panose="020B0609020204030204" pitchFamily="49" charset="0"/>
-              </a:rPr>
-              <a:t>"</a:t>
-            </a:r>
-            <a:r>
-              <a:rPr lang="pt-BR" b="0" dirty="0">
-                <a:solidFill>
-                  <a:srgbClr val="000000"/>
-                </a:solidFill>
-                <a:effectLst/>
-                <a:latin typeface="Consolas" panose="020B0609020204030204" pitchFamily="49" charset="0"/>
-              </a:rPr>
-              <a:t>, a[</a:t>
-            </a:r>
-            <a:r>
-              <a:rPr lang="pt-BR" b="0" dirty="0">
-                <a:solidFill>
-                  <a:srgbClr val="098658"/>
-                </a:solidFill>
-                <a:effectLst/>
-                <a:latin typeface="Consolas" panose="020B0609020204030204" pitchFamily="49" charset="0"/>
-              </a:rPr>
-              <a:t>1</a:t>
-            </a:r>
-            <a:r>
-              <a:rPr lang="pt-BR" b="0" dirty="0">
-                <a:solidFill>
-                  <a:srgbClr val="000000"/>
-                </a:solidFill>
-                <a:effectLst/>
-                <a:latin typeface="Consolas" panose="020B0609020204030204" pitchFamily="49" charset="0"/>
-              </a:rPr>
-              <a:t>]);</a:t>
-            </a:r>
-            <a:endParaRPr lang="ru-RU" dirty="0"/>
-          </a:p>
-          <a:p>
-            <a:r>
-              <a:rPr lang="ru-RU" dirty="0"/>
-              <a:t>Индекс — это выражение целого типа:</a:t>
-            </a:r>
-          </a:p>
-          <a:p>
-            <a:pPr lvl="1"/>
-            <a:r>
-              <a:rPr lang="ru-RU" dirty="0"/>
-              <a:t>a[i]</a:t>
-            </a:r>
+              <a:rPr lang="en-US" sz="1300" b="0" dirty="0">
+                <a:solidFill>
+                  <a:srgbClr val="A31515"/>
+                </a:solidFill>
+                <a:effectLst/>
+                <a:latin typeface="Consolas" panose="020B0609020204030204" pitchFamily="49" charset="0"/>
+              </a:rPr>
+              <a:t>"Found\n"</a:t>
+            </a:r>
+            <a:r>
+              <a:rPr lang="en-US" sz="1300" b="0" dirty="0">
+                <a:solidFill>
+                  <a:srgbClr val="000000"/>
+                </a:solidFill>
+                <a:effectLst/>
+                <a:latin typeface="Consolas" panose="020B0609020204030204" pitchFamily="49" charset="0"/>
+              </a:rPr>
+              <a:t>);</a:t>
+            </a:r>
+          </a:p>
+          <a:p>
+            <a:pPr>
+              <a:buNone/>
+            </a:pPr>
+            <a:r>
+              <a:rPr lang="en-US" sz="1300" b="0" dirty="0">
+                <a:solidFill>
+                  <a:srgbClr val="000000"/>
+                </a:solidFill>
+                <a:effectLst/>
+                <a:latin typeface="Consolas" panose="020B0609020204030204" pitchFamily="49" charset="0"/>
+              </a:rPr>
+              <a:t>    </a:t>
+            </a:r>
+            <a:r>
+              <a:rPr lang="en-US" sz="1300" b="0" dirty="0">
+                <a:solidFill>
+                  <a:srgbClr val="0000FF"/>
+                </a:solidFill>
+                <a:effectLst/>
+                <a:latin typeface="Consolas" panose="020B0609020204030204" pitchFamily="49" charset="0"/>
+              </a:rPr>
+              <a:t>else</a:t>
+            </a:r>
+            <a:r>
+              <a:rPr lang="en-US" sz="1300" b="0" dirty="0">
+                <a:solidFill>
+                  <a:srgbClr val="000000"/>
+                </a:solidFill>
+                <a:effectLst/>
+                <a:latin typeface="Consolas" panose="020B0609020204030204" pitchFamily="49" charset="0"/>
+              </a:rPr>
+              <a:t> </a:t>
+            </a:r>
+            <a:r>
+              <a:rPr lang="en-US" sz="1300" b="0" dirty="0" err="1">
+                <a:solidFill>
+                  <a:srgbClr val="000000"/>
+                </a:solidFill>
+                <a:effectLst/>
+                <a:latin typeface="Consolas" panose="020B0609020204030204" pitchFamily="49" charset="0"/>
+              </a:rPr>
+              <a:t>printf</a:t>
+            </a:r>
+            <a:r>
+              <a:rPr lang="en-US" sz="1300" b="0" dirty="0">
+                <a:solidFill>
+                  <a:srgbClr val="000000"/>
+                </a:solidFill>
+                <a:effectLst/>
+                <a:latin typeface="Consolas" panose="020B0609020204030204" pitchFamily="49" charset="0"/>
+              </a:rPr>
+              <a:t>(</a:t>
+            </a:r>
+            <a:r>
+              <a:rPr lang="en-US" sz="1300" b="0" dirty="0">
+                <a:solidFill>
+                  <a:srgbClr val="A31515"/>
+                </a:solidFill>
+                <a:effectLst/>
+                <a:latin typeface="Consolas" panose="020B0609020204030204" pitchFamily="49" charset="0"/>
+              </a:rPr>
+              <a:t>"Not found\n"</a:t>
+            </a:r>
+            <a:r>
+              <a:rPr lang="en-US" sz="1300" b="0" dirty="0">
+                <a:solidFill>
+                  <a:srgbClr val="000000"/>
+                </a:solidFill>
+                <a:effectLst/>
+                <a:latin typeface="Consolas" panose="020B0609020204030204" pitchFamily="49" charset="0"/>
+              </a:rPr>
+              <a:t>);</a:t>
+            </a:r>
+          </a:p>
+          <a:p>
+            <a:pPr>
+              <a:buNone/>
+            </a:pPr>
+            <a:r>
+              <a:rPr lang="en-US" sz="1300" b="0" dirty="0">
+                <a:solidFill>
+                  <a:srgbClr val="000000"/>
+                </a:solidFill>
+                <a:effectLst/>
+                <a:latin typeface="Consolas" panose="020B0609020204030204" pitchFamily="49" charset="0"/>
+              </a:rPr>
+              <a:t>}</a:t>
+            </a:r>
+          </a:p>
+        </p:txBody>
+      </p:sp>
+      <p:sp>
+        <p:nvSpPr>
+          <p:cNvPr id="11" name="Freeform: Shape 10">
+            <a:extLst>
+              <a:ext uri="{FF2B5EF4-FFF2-40B4-BE49-F238E27FC236}">
+                <a16:creationId xmlns:a16="http://schemas.microsoft.com/office/drawing/2014/main" id="{474FFB17-0EC7-FB3C-54C9-FF58664BEB56}"/>
+              </a:ext>
+            </a:extLst>
+          </p:cNvPr>
+          <p:cNvSpPr/>
+          <p:nvPr/>
+        </p:nvSpPr>
+        <p:spPr>
+          <a:xfrm>
+            <a:off x="7327232" y="5077326"/>
+            <a:ext cx="2182704" cy="962527"/>
+          </a:xfrm>
+          <a:custGeom>
+            <a:avLst/>
+            <a:gdLst>
+              <a:gd name="csX0" fmla="*/ 1780674 w 2182704"/>
+              <a:gd name="csY0" fmla="*/ 0 h 962527"/>
+              <a:gd name="csX1" fmla="*/ 2057400 w 2182704"/>
+              <a:gd name="csY1" fmla="*/ 252663 h 962527"/>
+              <a:gd name="csX2" fmla="*/ 0 w 2182704"/>
+              <a:gd name="csY2" fmla="*/ 962527 h 962527"/>
+            </a:gdLst>
+            <a:ahLst/>
+            <a:cxnLst>
+              <a:cxn ang="0">
+                <a:pos x="csX0" y="csY0"/>
+              </a:cxn>
+              <a:cxn ang="0">
+                <a:pos x="csX1" y="csY1"/>
+              </a:cxn>
+              <a:cxn ang="0">
+                <a:pos x="csX2" y="csY2"/>
+              </a:cxn>
+            </a:cxnLst>
+            <a:rect l="l" t="t" r="r" b="b"/>
+            <a:pathLst>
+              <a:path w="2182704" h="962527">
+                <a:moveTo>
+                  <a:pt x="1780674" y="0"/>
+                </a:moveTo>
+                <a:cubicBezTo>
+                  <a:pt x="2067426" y="46121"/>
+                  <a:pt x="2354179" y="92242"/>
+                  <a:pt x="2057400" y="252663"/>
+                </a:cubicBezTo>
+                <a:cubicBezTo>
+                  <a:pt x="1760621" y="413084"/>
+                  <a:pt x="880310" y="687805"/>
+                  <a:pt x="0" y="962527"/>
+                </a:cubicBezTo>
+              </a:path>
+            </a:pathLst>
+          </a:custGeom>
+          <a:noFill/>
+          <a:ln>
+            <a:prstDash val="dash"/>
+            <a:headEnd type="none" w="med" len="med"/>
+            <a:tailEnd type="arrow" w="med" len="med"/>
+          </a:ln>
+        </p:spPr>
+        <p:style>
+          <a:lnRef idx="2">
+            <a:schemeClr val="accent1">
+              <a:shade val="15000"/>
+            </a:schemeClr>
+          </a:lnRef>
+          <a:fillRef idx="1">
+            <a:schemeClr val="accent1"/>
+          </a:fillRef>
+          <a:effectRef idx="0">
+            <a:schemeClr val="accent1"/>
+          </a:effectRef>
+          <a:fontRef idx="minor">
+            <a:schemeClr val="lt1"/>
+          </a:fontRef>
+        </p:style>
+        <p:txBody>
+          <a:bodyPr rtlCol="0" anchor="ctr"/>
+          <a:lstStyle/>
+          <a:p>
+            <a:pPr algn="ctr"/>
+            <a:endParaRPr lang="en-US"/>
           </a:p>
         </p:txBody>
       </p:sp>
     </p:spTree>
     <p:extLst>
       <p:ext uri="{BB962C8B-B14F-4D97-AF65-F5344CB8AC3E}">
-        <p14:creationId xmlns:p14="http://schemas.microsoft.com/office/powerpoint/2010/main" val="1912919021"/>
+        <p14:creationId xmlns:p14="http://schemas.microsoft.com/office/powerpoint/2010/main" val="3854668109"/>
       </p:ext>
     </p:extLst>
   </p:cSld>
@@ -29886,6 +34223,681 @@
       </p:grpSpPr>
       <p:sp>
         <p:nvSpPr>
+          <p:cNvPr id="4" name="Title 3">
+            <a:extLst>
+              <a:ext uri="{FF2B5EF4-FFF2-40B4-BE49-F238E27FC236}">
+                <a16:creationId xmlns:a16="http://schemas.microsoft.com/office/drawing/2014/main" id="{407664B8-DCDB-1E7F-7C54-E0B44F90AB49}"/>
+              </a:ext>
+            </a:extLst>
+          </p:cNvPr>
+          <p:cNvSpPr>
+            <a:spLocks noGrp="1"/>
+          </p:cNvSpPr>
+          <p:nvPr>
+            <p:ph type="title"/>
+          </p:nvPr>
+        </p:nvSpPr>
+        <p:spPr/>
+        <p:txBody>
+          <a:bodyPr/>
+          <a:lstStyle/>
+          <a:p>
+            <a:r>
+              <a:rPr lang="ru-RU" dirty="0"/>
+              <a:t>Массивы</a:t>
+            </a:r>
+            <a:endParaRPr lang="en-US" dirty="0"/>
+          </a:p>
+        </p:txBody>
+      </p:sp>
+      <p:sp>
+        <p:nvSpPr>
+          <p:cNvPr id="5" name="Text Placeholder 4">
+            <a:extLst>
+              <a:ext uri="{FF2B5EF4-FFF2-40B4-BE49-F238E27FC236}">
+                <a16:creationId xmlns:a16="http://schemas.microsoft.com/office/drawing/2014/main" id="{5A725672-6867-8E55-49D5-027659DC8F59}"/>
+              </a:ext>
+            </a:extLst>
+          </p:cNvPr>
+          <p:cNvSpPr>
+            <a:spLocks noGrp="1"/>
+          </p:cNvSpPr>
+          <p:nvPr>
+            <p:ph type="body" idx="1"/>
+          </p:nvPr>
+        </p:nvSpPr>
+        <p:spPr/>
+        <p:txBody>
+          <a:bodyPr/>
+          <a:lstStyle/>
+          <a:p>
+            <a:endParaRPr lang="en-US"/>
+          </a:p>
+        </p:txBody>
+      </p:sp>
+    </p:spTree>
+    <p:extLst>
+      <p:ext uri="{BB962C8B-B14F-4D97-AF65-F5344CB8AC3E}">
+        <p14:creationId xmlns:p14="http://schemas.microsoft.com/office/powerpoint/2010/main" val="1854538543"/>
+      </p:ext>
+    </p:extLst>
+  </p:cSld>
+  <p:clrMapOvr>
+    <a:masterClrMapping/>
+  </p:clrMapOvr>
+</p:sld>
+</file>
+
+<file path=ppt/slides/slide41.xml><?xml version="1.0" encoding="utf-8"?>
+<p:sld xmlns:a="http://schemas.openxmlformats.org/drawingml/2006/main" xmlns:r="http://schemas.openxmlformats.org/officeDocument/2006/relationships" xmlns:p="http://schemas.openxmlformats.org/presentationml/2006/main">
+  <p:cSld>
+    <p:spTree>
+      <p:nvGrpSpPr>
+        <p:cNvPr id="1" name=""/>
+        <p:cNvGrpSpPr/>
+        <p:nvPr/>
+      </p:nvGrpSpPr>
+      <p:grpSpPr>
+        <a:xfrm>
+          <a:off x="0" y="0"/>
+          <a:ext cx="0" cy="0"/>
+          <a:chOff x="0" y="0"/>
+          <a:chExt cx="0" cy="0"/>
+        </a:xfrm>
+      </p:grpSpPr>
+      <p:sp>
+        <p:nvSpPr>
+          <p:cNvPr id="4" name="Title 3">
+            <a:extLst>
+              <a:ext uri="{FF2B5EF4-FFF2-40B4-BE49-F238E27FC236}">
+                <a16:creationId xmlns:a16="http://schemas.microsoft.com/office/drawing/2014/main" id="{1C295AF7-85AC-BC82-F2A7-386642DD04B7}"/>
+              </a:ext>
+            </a:extLst>
+          </p:cNvPr>
+          <p:cNvSpPr>
+            <a:spLocks noGrp="1"/>
+          </p:cNvSpPr>
+          <p:nvPr>
+            <p:ph type="title"/>
+          </p:nvPr>
+        </p:nvSpPr>
+        <p:spPr/>
+        <p:txBody>
+          <a:bodyPr/>
+          <a:lstStyle/>
+          <a:p>
+            <a:r>
+              <a:rPr lang="ru-RU" dirty="0"/>
+              <a:t>Зачем нужны массивы</a:t>
+            </a:r>
+            <a:endParaRPr lang="en-US" dirty="0"/>
+          </a:p>
+        </p:txBody>
+      </p:sp>
+      <p:sp>
+        <p:nvSpPr>
+          <p:cNvPr id="5" name="Content Placeholder 4">
+            <a:extLst>
+              <a:ext uri="{FF2B5EF4-FFF2-40B4-BE49-F238E27FC236}">
+                <a16:creationId xmlns:a16="http://schemas.microsoft.com/office/drawing/2014/main" id="{86C3FA05-28D1-194E-C00E-C7B8E3A310ED}"/>
+              </a:ext>
+            </a:extLst>
+          </p:cNvPr>
+          <p:cNvSpPr>
+            <a:spLocks noGrp="1"/>
+          </p:cNvSpPr>
+          <p:nvPr>
+            <p:ph idx="1"/>
+          </p:nvPr>
+        </p:nvSpPr>
+        <p:spPr/>
+        <p:txBody>
+          <a:bodyPr/>
+          <a:lstStyle/>
+          <a:p>
+            <a:r>
+              <a:rPr lang="ru-RU" dirty="0"/>
+              <a:t>Иногда нужно хранить много значений одного типа.</a:t>
+            </a:r>
+          </a:p>
+          <a:p>
+            <a:r>
+              <a:rPr lang="ru-RU" dirty="0"/>
+              <a:t>Без массива:</a:t>
+            </a:r>
+          </a:p>
+          <a:p>
+            <a:pPr lvl="1"/>
+            <a:r>
+              <a:rPr lang="ru-RU" dirty="0" err="1"/>
+              <a:t>int</a:t>
+            </a:r>
+            <a:r>
+              <a:rPr lang="ru-RU" dirty="0"/>
+              <a:t> a0, a1, a2, a3, a4;</a:t>
+            </a:r>
+          </a:p>
+          <a:p>
+            <a:r>
+              <a:rPr lang="ru-RU" dirty="0"/>
+              <a:t>С массивом:</a:t>
+            </a:r>
+          </a:p>
+          <a:p>
+            <a:pPr lvl="1"/>
+            <a:r>
+              <a:rPr lang="ru-RU" dirty="0" err="1"/>
+              <a:t>int</a:t>
+            </a:r>
+            <a:r>
+              <a:rPr lang="ru-RU" dirty="0"/>
+              <a:t> a[5];</a:t>
+            </a:r>
+          </a:p>
+          <a:p>
+            <a:r>
+              <a:rPr lang="ru-RU" dirty="0"/>
+              <a:t>Массив — это набор элементов одного типа, расположенных подряд в памяти.</a:t>
+            </a:r>
+          </a:p>
+        </p:txBody>
+      </p:sp>
+    </p:spTree>
+    <p:extLst>
+      <p:ext uri="{BB962C8B-B14F-4D97-AF65-F5344CB8AC3E}">
+        <p14:creationId xmlns:p14="http://schemas.microsoft.com/office/powerpoint/2010/main" val="2157300560"/>
+      </p:ext>
+    </p:extLst>
+  </p:cSld>
+  <p:clrMapOvr>
+    <a:masterClrMapping/>
+  </p:clrMapOvr>
+</p:sld>
+</file>
+
+<file path=ppt/slides/slide42.xml><?xml version="1.0" encoding="utf-8"?>
+<p:sld xmlns:a="http://schemas.openxmlformats.org/drawingml/2006/main" xmlns:r="http://schemas.openxmlformats.org/officeDocument/2006/relationships" xmlns:p="http://schemas.openxmlformats.org/presentationml/2006/main">
+  <p:cSld>
+    <p:spTree>
+      <p:nvGrpSpPr>
+        <p:cNvPr id="1" name=""/>
+        <p:cNvGrpSpPr/>
+        <p:nvPr/>
+      </p:nvGrpSpPr>
+      <p:grpSpPr>
+        <a:xfrm>
+          <a:off x="0" y="0"/>
+          <a:ext cx="0" cy="0"/>
+          <a:chOff x="0" y="0"/>
+          <a:chExt cx="0" cy="0"/>
+        </a:xfrm>
+      </p:grpSpPr>
+      <p:sp>
+        <p:nvSpPr>
+          <p:cNvPr id="2" name="Title 1">
+            <a:extLst>
+              <a:ext uri="{FF2B5EF4-FFF2-40B4-BE49-F238E27FC236}">
+                <a16:creationId xmlns:a16="http://schemas.microsoft.com/office/drawing/2014/main" id="{0858A3AC-067E-59A8-D960-D9AE15D63448}"/>
+              </a:ext>
+            </a:extLst>
+          </p:cNvPr>
+          <p:cNvSpPr>
+            <a:spLocks noGrp="1"/>
+          </p:cNvSpPr>
+          <p:nvPr>
+            <p:ph type="title"/>
+          </p:nvPr>
+        </p:nvSpPr>
+        <p:spPr/>
+        <p:txBody>
+          <a:bodyPr/>
+          <a:lstStyle/>
+          <a:p>
+            <a:r>
+              <a:rPr lang="ru-RU" dirty="0"/>
+              <a:t>Объявление массива</a:t>
+            </a:r>
+            <a:endParaRPr lang="en-US" dirty="0"/>
+          </a:p>
+        </p:txBody>
+      </p:sp>
+      <p:sp>
+        <p:nvSpPr>
+          <p:cNvPr id="3" name="Content Placeholder 2">
+            <a:extLst>
+              <a:ext uri="{FF2B5EF4-FFF2-40B4-BE49-F238E27FC236}">
+                <a16:creationId xmlns:a16="http://schemas.microsoft.com/office/drawing/2014/main" id="{0BC2E1D1-97ED-54BE-AF86-AE4AC33BF199}"/>
+              </a:ext>
+            </a:extLst>
+          </p:cNvPr>
+          <p:cNvSpPr>
+            <a:spLocks noGrp="1"/>
+          </p:cNvSpPr>
+          <p:nvPr>
+            <p:ph idx="1"/>
+          </p:nvPr>
+        </p:nvSpPr>
+        <p:spPr/>
+        <p:txBody>
+          <a:bodyPr/>
+          <a:lstStyle/>
+          <a:p>
+            <a:r>
+              <a:rPr lang="ru-RU" dirty="0"/>
+              <a:t>Общая форма:</a:t>
+            </a:r>
+          </a:p>
+          <a:p>
+            <a:pPr lvl="1"/>
+            <a:r>
+              <a:rPr lang="ru-RU" dirty="0" err="1"/>
+              <a:t>type</a:t>
+            </a:r>
+            <a:r>
+              <a:rPr lang="ru-RU" dirty="0"/>
+              <a:t> </a:t>
+            </a:r>
+            <a:r>
+              <a:rPr lang="ru-RU" dirty="0" err="1"/>
+              <a:t>name</a:t>
+            </a:r>
+            <a:r>
+              <a:rPr lang="ru-RU" dirty="0"/>
+              <a:t>[</a:t>
+            </a:r>
+            <a:r>
+              <a:rPr lang="ru-RU" dirty="0" err="1"/>
+              <a:t>size</a:t>
+            </a:r>
+            <a:r>
+              <a:rPr lang="ru-RU" dirty="0"/>
+              <a:t>];</a:t>
+            </a:r>
+          </a:p>
+          <a:p>
+            <a:r>
+              <a:rPr lang="ru-RU" dirty="0"/>
+              <a:t>Пример:</a:t>
+            </a:r>
+          </a:p>
+          <a:p>
+            <a:pPr lvl="1"/>
+            <a:r>
+              <a:rPr lang="ru-RU" dirty="0" err="1"/>
+              <a:t>int</a:t>
+            </a:r>
+            <a:r>
+              <a:rPr lang="ru-RU" dirty="0"/>
+              <a:t> a[10];</a:t>
+            </a:r>
+          </a:p>
+          <a:p>
+            <a:r>
+              <a:rPr lang="ru-RU" dirty="0" err="1"/>
+              <a:t>size</a:t>
+            </a:r>
+            <a:r>
+              <a:rPr lang="ru-RU" dirty="0"/>
+              <a:t> — количество элементов</a:t>
+            </a:r>
+          </a:p>
+          <a:p>
+            <a:r>
+              <a:rPr lang="ru-RU" dirty="0"/>
+              <a:t>индексы: от 0 до </a:t>
+            </a:r>
+            <a:r>
+              <a:rPr lang="ru-RU" dirty="0" err="1"/>
+              <a:t>size</a:t>
+            </a:r>
+            <a:r>
+              <a:rPr lang="ru-RU" dirty="0"/>
+              <a:t> - 1</a:t>
+            </a:r>
+          </a:p>
+          <a:p>
+            <a:endParaRPr lang="en-US" dirty="0"/>
+          </a:p>
+        </p:txBody>
+      </p:sp>
+    </p:spTree>
+    <p:extLst>
+      <p:ext uri="{BB962C8B-B14F-4D97-AF65-F5344CB8AC3E}">
+        <p14:creationId xmlns:p14="http://schemas.microsoft.com/office/powerpoint/2010/main" val="4159347011"/>
+      </p:ext>
+    </p:extLst>
+  </p:cSld>
+  <p:clrMapOvr>
+    <a:masterClrMapping/>
+  </p:clrMapOvr>
+</p:sld>
+</file>
+
+<file path=ppt/slides/slide43.xml><?xml version="1.0" encoding="utf-8"?>
+<p:sld xmlns:a="http://schemas.openxmlformats.org/drawingml/2006/main" xmlns:r="http://schemas.openxmlformats.org/officeDocument/2006/relationships" xmlns:p="http://schemas.openxmlformats.org/presentationml/2006/main">
+  <p:cSld>
+    <p:spTree>
+      <p:nvGrpSpPr>
+        <p:cNvPr id="1" name=""/>
+        <p:cNvGrpSpPr/>
+        <p:nvPr/>
+      </p:nvGrpSpPr>
+      <p:grpSpPr>
+        <a:xfrm>
+          <a:off x="0" y="0"/>
+          <a:ext cx="0" cy="0"/>
+          <a:chOff x="0" y="0"/>
+          <a:chExt cx="0" cy="0"/>
+        </a:xfrm>
+      </p:grpSpPr>
+      <p:sp>
+        <p:nvSpPr>
+          <p:cNvPr id="2" name="Title 1">
+            <a:extLst>
+              <a:ext uri="{FF2B5EF4-FFF2-40B4-BE49-F238E27FC236}">
+                <a16:creationId xmlns:a16="http://schemas.microsoft.com/office/drawing/2014/main" id="{E880A21F-7F52-DF23-7B48-F496BAD9DAA9}"/>
+              </a:ext>
+            </a:extLst>
+          </p:cNvPr>
+          <p:cNvSpPr>
+            <a:spLocks noGrp="1"/>
+          </p:cNvSpPr>
+          <p:nvPr>
+            <p:ph type="title"/>
+          </p:nvPr>
+        </p:nvSpPr>
+        <p:spPr/>
+        <p:txBody>
+          <a:bodyPr/>
+          <a:lstStyle/>
+          <a:p>
+            <a:r>
+              <a:rPr lang="ru-RU" dirty="0"/>
+              <a:t>Доступ к элементам</a:t>
+            </a:r>
+            <a:endParaRPr lang="en-US" dirty="0"/>
+          </a:p>
+        </p:txBody>
+      </p:sp>
+      <p:sp>
+        <p:nvSpPr>
+          <p:cNvPr id="3" name="Content Placeholder 2">
+            <a:extLst>
+              <a:ext uri="{FF2B5EF4-FFF2-40B4-BE49-F238E27FC236}">
+                <a16:creationId xmlns:a16="http://schemas.microsoft.com/office/drawing/2014/main" id="{F861A3D8-27DC-B1A6-51BD-468BFCABE448}"/>
+              </a:ext>
+            </a:extLst>
+          </p:cNvPr>
+          <p:cNvSpPr>
+            <a:spLocks noGrp="1"/>
+          </p:cNvSpPr>
+          <p:nvPr>
+            <p:ph idx="1"/>
+          </p:nvPr>
+        </p:nvSpPr>
+        <p:spPr/>
+        <p:txBody>
+          <a:bodyPr/>
+          <a:lstStyle/>
+          <a:p>
+            <a:r>
+              <a:rPr lang="ru-RU" dirty="0"/>
+              <a:t>Обращение по индексу:</a:t>
+            </a:r>
+          </a:p>
+          <a:p>
+            <a:pPr lvl="1">
+              <a:buNone/>
+            </a:pPr>
+            <a:r>
+              <a:rPr lang="pt-BR" b="0" dirty="0">
+                <a:solidFill>
+                  <a:srgbClr val="000000"/>
+                </a:solidFill>
+                <a:effectLst/>
+                <a:latin typeface="Consolas" panose="020B0609020204030204" pitchFamily="49" charset="0"/>
+              </a:rPr>
+              <a:t>a[</a:t>
+            </a:r>
+            <a:r>
+              <a:rPr lang="pt-BR" b="0" dirty="0">
+                <a:solidFill>
+                  <a:srgbClr val="098658"/>
+                </a:solidFill>
+                <a:effectLst/>
+                <a:latin typeface="Consolas" panose="020B0609020204030204" pitchFamily="49" charset="0"/>
+              </a:rPr>
+              <a:t>0</a:t>
+            </a:r>
+            <a:r>
+              <a:rPr lang="pt-BR" b="0" dirty="0">
+                <a:solidFill>
+                  <a:srgbClr val="000000"/>
+                </a:solidFill>
+                <a:effectLst/>
+                <a:latin typeface="Consolas" panose="020B0609020204030204" pitchFamily="49" charset="0"/>
+              </a:rPr>
+              <a:t>] = </a:t>
+            </a:r>
+            <a:r>
+              <a:rPr lang="pt-BR" b="0" dirty="0">
+                <a:solidFill>
+                  <a:srgbClr val="098658"/>
+                </a:solidFill>
+                <a:effectLst/>
+                <a:latin typeface="Consolas" panose="020B0609020204030204" pitchFamily="49" charset="0"/>
+              </a:rPr>
+              <a:t>10</a:t>
+            </a:r>
+            <a:r>
+              <a:rPr lang="pt-BR" b="0" dirty="0">
+                <a:solidFill>
+                  <a:srgbClr val="000000"/>
+                </a:solidFill>
+                <a:effectLst/>
+                <a:latin typeface="Consolas" panose="020B0609020204030204" pitchFamily="49" charset="0"/>
+              </a:rPr>
+              <a:t>;</a:t>
+            </a:r>
+          </a:p>
+          <a:p>
+            <a:pPr lvl="1">
+              <a:buNone/>
+            </a:pPr>
+            <a:r>
+              <a:rPr lang="pt-BR" b="0" dirty="0">
+                <a:solidFill>
+                  <a:srgbClr val="000000"/>
+                </a:solidFill>
+                <a:effectLst/>
+                <a:latin typeface="Consolas" panose="020B0609020204030204" pitchFamily="49" charset="0"/>
+              </a:rPr>
+              <a:t>a[</a:t>
+            </a:r>
+            <a:r>
+              <a:rPr lang="pt-BR" b="0" dirty="0">
+                <a:solidFill>
+                  <a:srgbClr val="098658"/>
+                </a:solidFill>
+                <a:effectLst/>
+                <a:latin typeface="Consolas" panose="020B0609020204030204" pitchFamily="49" charset="0"/>
+              </a:rPr>
+              <a:t>1</a:t>
+            </a:r>
+            <a:r>
+              <a:rPr lang="pt-BR" b="0" dirty="0">
+                <a:solidFill>
+                  <a:srgbClr val="000000"/>
+                </a:solidFill>
+                <a:effectLst/>
+                <a:latin typeface="Consolas" panose="020B0609020204030204" pitchFamily="49" charset="0"/>
+              </a:rPr>
+              <a:t>] = </a:t>
+            </a:r>
+            <a:r>
+              <a:rPr lang="pt-BR" b="0" dirty="0">
+                <a:solidFill>
+                  <a:srgbClr val="098658"/>
+                </a:solidFill>
+                <a:effectLst/>
+                <a:latin typeface="Consolas" panose="020B0609020204030204" pitchFamily="49" charset="0"/>
+              </a:rPr>
+              <a:t>20</a:t>
+            </a:r>
+            <a:r>
+              <a:rPr lang="pt-BR" b="0" dirty="0">
+                <a:solidFill>
+                  <a:srgbClr val="000000"/>
+                </a:solidFill>
+                <a:effectLst/>
+                <a:latin typeface="Consolas" panose="020B0609020204030204" pitchFamily="49" charset="0"/>
+              </a:rPr>
+              <a:t>;</a:t>
+            </a:r>
+          </a:p>
+          <a:p>
+            <a:pPr lvl="1">
+              <a:buNone/>
+            </a:pPr>
+            <a:r>
+              <a:rPr lang="pt-BR" b="0" dirty="0">
+                <a:solidFill>
+                  <a:srgbClr val="74531F"/>
+                </a:solidFill>
+                <a:effectLst/>
+                <a:latin typeface="Consolas" panose="020B0609020204030204" pitchFamily="49" charset="0"/>
+              </a:rPr>
+              <a:t>printf</a:t>
+            </a:r>
+            <a:r>
+              <a:rPr lang="pt-BR" b="0" dirty="0">
+                <a:solidFill>
+                  <a:srgbClr val="000000"/>
+                </a:solidFill>
+                <a:effectLst/>
+                <a:latin typeface="Consolas" panose="020B0609020204030204" pitchFamily="49" charset="0"/>
+              </a:rPr>
+              <a:t>(</a:t>
+            </a:r>
+            <a:r>
+              <a:rPr lang="pt-BR" b="0" dirty="0">
+                <a:solidFill>
+                  <a:srgbClr val="E21F1F"/>
+                </a:solidFill>
+                <a:effectLst/>
+                <a:latin typeface="Consolas" panose="020B0609020204030204" pitchFamily="49" charset="0"/>
+              </a:rPr>
+              <a:t>"</a:t>
+            </a:r>
+            <a:r>
+              <a:rPr lang="pt-BR" b="0" dirty="0">
+                <a:solidFill>
+                  <a:srgbClr val="1F377F"/>
+                </a:solidFill>
+                <a:effectLst/>
+                <a:latin typeface="Consolas" panose="020B0609020204030204" pitchFamily="49" charset="0"/>
+              </a:rPr>
+              <a:t>%d</a:t>
+            </a:r>
+            <a:r>
+              <a:rPr lang="pt-BR" b="0" dirty="0">
+                <a:solidFill>
+                  <a:srgbClr val="B776FB"/>
+                </a:solidFill>
+                <a:effectLst/>
+                <a:latin typeface="Consolas" panose="020B0609020204030204" pitchFamily="49" charset="0"/>
+              </a:rPr>
+              <a:t>\n</a:t>
+            </a:r>
+            <a:r>
+              <a:rPr lang="pt-BR" b="0" dirty="0">
+                <a:solidFill>
+                  <a:srgbClr val="E21F1F"/>
+                </a:solidFill>
+                <a:effectLst/>
+                <a:latin typeface="Consolas" panose="020B0609020204030204" pitchFamily="49" charset="0"/>
+              </a:rPr>
+              <a:t>"</a:t>
+            </a:r>
+            <a:r>
+              <a:rPr lang="pt-BR" b="0" dirty="0">
+                <a:solidFill>
+                  <a:srgbClr val="000000"/>
+                </a:solidFill>
+                <a:effectLst/>
+                <a:latin typeface="Consolas" panose="020B0609020204030204" pitchFamily="49" charset="0"/>
+              </a:rPr>
+              <a:t>, a[</a:t>
+            </a:r>
+            <a:r>
+              <a:rPr lang="pt-BR" b="0" dirty="0">
+                <a:solidFill>
+                  <a:srgbClr val="098658"/>
+                </a:solidFill>
+                <a:effectLst/>
+                <a:latin typeface="Consolas" panose="020B0609020204030204" pitchFamily="49" charset="0"/>
+              </a:rPr>
+              <a:t>1</a:t>
+            </a:r>
+            <a:r>
+              <a:rPr lang="pt-BR" b="0" dirty="0">
+                <a:solidFill>
+                  <a:srgbClr val="000000"/>
+                </a:solidFill>
+                <a:effectLst/>
+                <a:latin typeface="Consolas" panose="020B0609020204030204" pitchFamily="49" charset="0"/>
+              </a:rPr>
+              <a:t>]);</a:t>
+            </a:r>
+            <a:endParaRPr lang="ru-RU" dirty="0"/>
+          </a:p>
+          <a:p>
+            <a:r>
+              <a:rPr lang="ru-RU" dirty="0"/>
+              <a:t>Индекс — это выражение целого типа:</a:t>
+            </a:r>
+          </a:p>
+          <a:p>
+            <a:pPr lvl="1"/>
+            <a:r>
+              <a:rPr lang="ru-RU" dirty="0"/>
+              <a:t>a[i]</a:t>
+            </a:r>
+          </a:p>
+        </p:txBody>
+      </p:sp>
+    </p:spTree>
+    <p:extLst>
+      <p:ext uri="{BB962C8B-B14F-4D97-AF65-F5344CB8AC3E}">
+        <p14:creationId xmlns:p14="http://schemas.microsoft.com/office/powerpoint/2010/main" val="1912919021"/>
+      </p:ext>
+    </p:extLst>
+  </p:cSld>
+  <p:clrMapOvr>
+    <a:masterClrMapping/>
+  </p:clrMapOvr>
+</p:sld>
+</file>
+
+<file path=ppt/slides/slide44.xml><?xml version="1.0" encoding="utf-8"?>
+<p:sld xmlns:a="http://schemas.openxmlformats.org/drawingml/2006/main" xmlns:r="http://schemas.openxmlformats.org/officeDocument/2006/relationships" xmlns:p="http://schemas.openxmlformats.org/presentationml/2006/main">
+  <p:cSld>
+    <p:spTree>
+      <p:nvGrpSpPr>
+        <p:cNvPr id="1" name=""/>
+        <p:cNvGrpSpPr/>
+        <p:nvPr/>
+      </p:nvGrpSpPr>
+      <p:grpSpPr>
+        <a:xfrm>
+          <a:off x="0" y="0"/>
+          <a:ext cx="0" cy="0"/>
+          <a:chOff x="0" y="0"/>
+          <a:chExt cx="0" cy="0"/>
+        </a:xfrm>
+      </p:grpSpPr>
+      <p:sp>
+        <p:nvSpPr>
           <p:cNvPr id="2" name="Title 1">
             <a:extLst>
               <a:ext uri="{FF2B5EF4-FFF2-40B4-BE49-F238E27FC236}">
@@ -29990,7 +35002,7 @@
 </p:sld>
 </file>
 
-<file path=ppt/slides/slide41.xml><?xml version="1.0" encoding="utf-8"?>
+<file path=ppt/slides/slide45.xml><?xml version="1.0" encoding="utf-8"?>
 <p:sld xmlns:a="http://schemas.openxmlformats.org/drawingml/2006/main" xmlns:r="http://schemas.openxmlformats.org/officeDocument/2006/relationships" xmlns:p="http://schemas.openxmlformats.org/presentationml/2006/main">
   <p:cSld>
     <p:spTree>
@@ -30279,7 +35291,7 @@
 </p:sld>
 </file>
 
-<file path=ppt/slides/slide42.xml><?xml version="1.0" encoding="utf-8"?>
+<file path=ppt/slides/slide46.xml><?xml version="1.0" encoding="utf-8"?>
 <p:sld xmlns:a="http://schemas.openxmlformats.org/drawingml/2006/main" xmlns:r="http://schemas.openxmlformats.org/officeDocument/2006/relationships" xmlns:p="http://schemas.openxmlformats.org/presentationml/2006/main">
   <p:cSld>
     <p:spTree>
@@ -30393,7 +35405,7 @@
 </p:sld>
 </file>
 
-<file path=ppt/slides/slide43.xml><?xml version="1.0" encoding="utf-8"?>
+<file path=ppt/slides/slide47.xml><?xml version="1.0" encoding="utf-8"?>
 <p:sld xmlns:a="http://schemas.openxmlformats.org/drawingml/2006/main" xmlns:r="http://schemas.openxmlformats.org/officeDocument/2006/relationships" xmlns:p="http://schemas.openxmlformats.org/presentationml/2006/main">
   <p:cSld>
     <p:spTree>
@@ -30522,7 +35534,7 @@
 </p:sld>
 </file>
 
-<file path=ppt/slides/slide44.xml><?xml version="1.0" encoding="utf-8"?>
+<file path=ppt/slides/slide48.xml><?xml version="1.0" encoding="utf-8"?>
 <p:sld xmlns:a="http://schemas.openxmlformats.org/drawingml/2006/main" xmlns:r="http://schemas.openxmlformats.org/officeDocument/2006/relationships" xmlns:p="http://schemas.openxmlformats.org/presentationml/2006/main">
   <p:cSld>
     <p:spTree>
@@ -32476,7 +37488,7 @@
 </p:sld>
 </file>
 
-<file path=ppt/slides/slide45.xml><?xml version="1.0" encoding="utf-8"?>
+<file path=ppt/slides/slide49.xml><?xml version="1.0" encoding="utf-8"?>
 <p:sld xmlns:a="http://schemas.openxmlformats.org/drawingml/2006/main" xmlns:r="http://schemas.openxmlformats.org/officeDocument/2006/relationships" xmlns:p="http://schemas.openxmlformats.org/presentationml/2006/main">
   <p:cSld>
     <p:spTree>
@@ -33011,7 +38023,579 @@
 </p:sld>
 </file>
 
-<file path=ppt/slides/slide46.xml><?xml version="1.0" encoding="utf-8"?>
+<file path=ppt/slides/slide5.xml><?xml version="1.0" encoding="utf-8"?>
+<p:sld xmlns:a="http://schemas.openxmlformats.org/drawingml/2006/main" xmlns:r="http://schemas.openxmlformats.org/officeDocument/2006/relationships" xmlns:p="http://schemas.openxmlformats.org/presentationml/2006/main">
+  <p:cSld>
+    <p:spTree>
+      <p:nvGrpSpPr>
+        <p:cNvPr id="1" name=""/>
+        <p:cNvGrpSpPr/>
+        <p:nvPr/>
+      </p:nvGrpSpPr>
+      <p:grpSpPr>
+        <a:xfrm>
+          <a:off x="0" y="0"/>
+          <a:ext cx="0" cy="0"/>
+          <a:chOff x="0" y="0"/>
+          <a:chExt cx="0" cy="0"/>
+        </a:xfrm>
+      </p:grpSpPr>
+      <p:sp>
+        <p:nvSpPr>
+          <p:cNvPr id="2" name="Title 1">
+            <a:extLst>
+              <a:ext uri="{FF2B5EF4-FFF2-40B4-BE49-F238E27FC236}">
+                <a16:creationId xmlns:a16="http://schemas.microsoft.com/office/drawing/2014/main" id="{AC0A6E1A-27C1-D6CE-12A2-D413A354AAFD}"/>
+              </a:ext>
+            </a:extLst>
+          </p:cNvPr>
+          <p:cNvSpPr>
+            <a:spLocks noGrp="1"/>
+          </p:cNvSpPr>
+          <p:nvPr>
+            <p:ph type="title"/>
+          </p:nvPr>
+        </p:nvSpPr>
+        <p:spPr/>
+        <p:txBody>
+          <a:bodyPr/>
+          <a:lstStyle/>
+          <a:p>
+            <a:r>
+              <a:rPr lang="en-US"/>
+              <a:t>if – else</a:t>
+            </a:r>
+            <a:endParaRPr lang="en-US" dirty="0"/>
+          </a:p>
+        </p:txBody>
+      </p:sp>
+      <p:sp>
+        <p:nvSpPr>
+          <p:cNvPr id="3" name="Content Placeholder 2">
+            <a:extLst>
+              <a:ext uri="{FF2B5EF4-FFF2-40B4-BE49-F238E27FC236}">
+                <a16:creationId xmlns:a16="http://schemas.microsoft.com/office/drawing/2014/main" id="{D3955811-BE05-C014-66A2-CF57872216B2}"/>
+              </a:ext>
+            </a:extLst>
+          </p:cNvPr>
+          <p:cNvSpPr>
+            <a:spLocks noGrp="1"/>
+          </p:cNvSpPr>
+          <p:nvPr>
+            <p:ph idx="1"/>
+          </p:nvPr>
+        </p:nvSpPr>
+        <p:spPr/>
+        <p:txBody>
+          <a:bodyPr>
+            <a:normAutofit fontScale="92500" lnSpcReduction="20000"/>
+          </a:bodyPr>
+          <a:lstStyle/>
+          <a:p>
+            <a:r>
+              <a:rPr lang="ru-RU" dirty="0"/>
+              <a:t>Форма инструкции </a:t>
+            </a:r>
+            <a:r>
+              <a:rPr lang="en-US" dirty="0"/>
+              <a:t>if</a:t>
+            </a:r>
+            <a:r>
+              <a:rPr lang="ru-RU" dirty="0"/>
+              <a:t>, в которой нужно выполнить альтернативный код (если условие ложно)</a:t>
+            </a:r>
+          </a:p>
+          <a:p>
+            <a:pPr lvl="1">
+              <a:buNone/>
+            </a:pPr>
+            <a:r>
+              <a:rPr lang="en-US" b="0" dirty="0">
+                <a:solidFill>
+                  <a:srgbClr val="8F08C4"/>
+                </a:solidFill>
+                <a:effectLst/>
+                <a:latin typeface="Consolas" panose="020B0609020204030204" pitchFamily="49" charset="0"/>
+              </a:rPr>
+              <a:t>if</a:t>
+            </a:r>
+            <a:r>
+              <a:rPr lang="en-US" b="0" dirty="0">
+                <a:solidFill>
+                  <a:srgbClr val="000000"/>
+                </a:solidFill>
+                <a:effectLst/>
+                <a:latin typeface="Consolas" panose="020B0609020204030204" pitchFamily="49" charset="0"/>
+              </a:rPr>
+              <a:t> (condition) {</a:t>
+            </a:r>
+          </a:p>
+          <a:p>
+            <a:pPr lvl="1">
+              <a:buNone/>
+            </a:pPr>
+            <a:r>
+              <a:rPr lang="en-US" b="0" dirty="0">
+                <a:solidFill>
+                  <a:srgbClr val="000000"/>
+                </a:solidFill>
+                <a:effectLst/>
+                <a:latin typeface="Consolas" panose="020B0609020204030204" pitchFamily="49" charset="0"/>
+              </a:rPr>
+              <a:t>    </a:t>
+            </a:r>
+            <a:r>
+              <a:rPr lang="en-US" b="0" dirty="0">
+                <a:solidFill>
+                  <a:srgbClr val="008000"/>
+                </a:solidFill>
+                <a:effectLst/>
+                <a:latin typeface="Consolas" panose="020B0609020204030204" pitchFamily="49" charset="0"/>
+              </a:rPr>
+              <a:t>// </a:t>
+            </a:r>
+            <a:r>
+              <a:rPr lang="ru-RU" b="0" dirty="0">
+                <a:solidFill>
+                  <a:srgbClr val="008000"/>
+                </a:solidFill>
+                <a:effectLst/>
+                <a:latin typeface="Consolas" panose="020B0609020204030204" pitchFamily="49" charset="0"/>
+              </a:rPr>
+              <a:t>если истина</a:t>
+            </a:r>
+            <a:endParaRPr lang="ru-RU" b="0" dirty="0">
+              <a:solidFill>
+                <a:srgbClr val="000000"/>
+              </a:solidFill>
+              <a:effectLst/>
+              <a:latin typeface="Consolas" panose="020B0609020204030204" pitchFamily="49" charset="0"/>
+            </a:endParaRPr>
+          </a:p>
+          <a:p>
+            <a:pPr lvl="1">
+              <a:buNone/>
+            </a:pPr>
+            <a:r>
+              <a:rPr lang="ru-RU" b="0" dirty="0">
+                <a:solidFill>
+                  <a:srgbClr val="000000"/>
+                </a:solidFill>
+                <a:effectLst/>
+                <a:latin typeface="Consolas" panose="020B0609020204030204" pitchFamily="49" charset="0"/>
+              </a:rPr>
+              <a:t>} </a:t>
+            </a:r>
+            <a:r>
+              <a:rPr lang="en-US" b="0" dirty="0">
+                <a:solidFill>
+                  <a:srgbClr val="8F08C4"/>
+                </a:solidFill>
+                <a:effectLst/>
+                <a:latin typeface="Consolas" panose="020B0609020204030204" pitchFamily="49" charset="0"/>
+              </a:rPr>
+              <a:t>else</a:t>
+            </a:r>
+            <a:r>
+              <a:rPr lang="en-US" b="0" dirty="0">
+                <a:solidFill>
+                  <a:srgbClr val="000000"/>
+                </a:solidFill>
+                <a:effectLst/>
+                <a:latin typeface="Consolas" panose="020B0609020204030204" pitchFamily="49" charset="0"/>
+              </a:rPr>
+              <a:t> {</a:t>
+            </a:r>
+          </a:p>
+          <a:p>
+            <a:pPr lvl="1">
+              <a:buNone/>
+            </a:pPr>
+            <a:r>
+              <a:rPr lang="en-US" b="0" dirty="0">
+                <a:solidFill>
+                  <a:srgbClr val="000000"/>
+                </a:solidFill>
+                <a:effectLst/>
+                <a:latin typeface="Consolas" panose="020B0609020204030204" pitchFamily="49" charset="0"/>
+              </a:rPr>
+              <a:t>    </a:t>
+            </a:r>
+            <a:r>
+              <a:rPr lang="en-US" b="0" dirty="0">
+                <a:solidFill>
+                  <a:srgbClr val="008000"/>
+                </a:solidFill>
+                <a:effectLst/>
+                <a:latin typeface="Consolas" panose="020B0609020204030204" pitchFamily="49" charset="0"/>
+              </a:rPr>
+              <a:t>// </a:t>
+            </a:r>
+            <a:r>
+              <a:rPr lang="ru-RU" b="0" dirty="0">
+                <a:solidFill>
+                  <a:srgbClr val="008000"/>
+                </a:solidFill>
+                <a:effectLst/>
+                <a:latin typeface="Consolas" panose="020B0609020204030204" pitchFamily="49" charset="0"/>
+              </a:rPr>
+              <a:t>если ложь</a:t>
+            </a:r>
+            <a:endParaRPr lang="ru-RU" b="0" dirty="0">
+              <a:solidFill>
+                <a:srgbClr val="000000"/>
+              </a:solidFill>
+              <a:effectLst/>
+              <a:latin typeface="Consolas" panose="020B0609020204030204" pitchFamily="49" charset="0"/>
+            </a:endParaRPr>
+          </a:p>
+          <a:p>
+            <a:pPr lvl="1">
+              <a:buNone/>
+            </a:pPr>
+            <a:r>
+              <a:rPr lang="ru-RU" b="0" dirty="0">
+                <a:solidFill>
+                  <a:srgbClr val="000000"/>
+                </a:solidFill>
+                <a:effectLst/>
+                <a:latin typeface="Consolas" panose="020B0609020204030204" pitchFamily="49" charset="0"/>
+              </a:rPr>
+              <a:t>}</a:t>
+            </a:r>
+          </a:p>
+          <a:p>
+            <a:pPr>
+              <a:lnSpc>
+                <a:spcPct val="120000"/>
+              </a:lnSpc>
+            </a:pPr>
+            <a:r>
+              <a:rPr lang="ru-RU" dirty="0"/>
+              <a:t>Пример:</a:t>
+            </a:r>
+          </a:p>
+          <a:p>
+            <a:pPr lvl="1">
+              <a:buNone/>
+            </a:pPr>
+            <a:r>
+              <a:rPr lang="en-US" b="0" dirty="0">
+                <a:solidFill>
+                  <a:srgbClr val="8F08C4"/>
+                </a:solidFill>
+                <a:effectLst/>
+                <a:latin typeface="Consolas" panose="020B0609020204030204" pitchFamily="49" charset="0"/>
+              </a:rPr>
+              <a:t>if</a:t>
+            </a:r>
+            <a:r>
+              <a:rPr lang="en-US" b="0" dirty="0">
+                <a:solidFill>
+                  <a:srgbClr val="000000"/>
+                </a:solidFill>
+                <a:effectLst/>
+                <a:latin typeface="Consolas" panose="020B0609020204030204" pitchFamily="49" charset="0"/>
+              </a:rPr>
+              <a:t> (x % </a:t>
+            </a:r>
+            <a:r>
+              <a:rPr lang="en-US" b="0" dirty="0">
+                <a:solidFill>
+                  <a:srgbClr val="098658"/>
+                </a:solidFill>
+                <a:effectLst/>
+                <a:latin typeface="Consolas" panose="020B0609020204030204" pitchFamily="49" charset="0"/>
+              </a:rPr>
+              <a:t>2</a:t>
+            </a:r>
+            <a:r>
+              <a:rPr lang="en-US" b="0" dirty="0">
+                <a:solidFill>
+                  <a:srgbClr val="000000"/>
+                </a:solidFill>
+                <a:effectLst/>
+                <a:latin typeface="Consolas" panose="020B0609020204030204" pitchFamily="49" charset="0"/>
+              </a:rPr>
+              <a:t> == </a:t>
+            </a:r>
+            <a:r>
+              <a:rPr lang="en-US" b="0" dirty="0">
+                <a:solidFill>
+                  <a:srgbClr val="098658"/>
+                </a:solidFill>
+                <a:effectLst/>
+                <a:latin typeface="Consolas" panose="020B0609020204030204" pitchFamily="49" charset="0"/>
+              </a:rPr>
+              <a:t>0</a:t>
+            </a:r>
+            <a:r>
+              <a:rPr lang="en-US" b="0" dirty="0">
+                <a:solidFill>
+                  <a:srgbClr val="000000"/>
+                </a:solidFill>
+                <a:effectLst/>
+                <a:latin typeface="Consolas" panose="020B0609020204030204" pitchFamily="49" charset="0"/>
+              </a:rPr>
+              <a:t>) {</a:t>
+            </a:r>
+          </a:p>
+          <a:p>
+            <a:pPr lvl="1">
+              <a:buNone/>
+            </a:pPr>
+            <a:r>
+              <a:rPr lang="en-US" b="0" dirty="0">
+                <a:solidFill>
+                  <a:srgbClr val="000000"/>
+                </a:solidFill>
+                <a:effectLst/>
+                <a:latin typeface="Consolas" panose="020B0609020204030204" pitchFamily="49" charset="0"/>
+              </a:rPr>
+              <a:t>    </a:t>
+            </a:r>
+            <a:r>
+              <a:rPr lang="en-US" b="0" dirty="0" err="1">
+                <a:solidFill>
+                  <a:srgbClr val="74531F"/>
+                </a:solidFill>
+                <a:effectLst/>
+                <a:latin typeface="Consolas" panose="020B0609020204030204" pitchFamily="49" charset="0"/>
+              </a:rPr>
+              <a:t>printf</a:t>
+            </a:r>
+            <a:r>
+              <a:rPr lang="en-US" b="0" dirty="0">
+                <a:solidFill>
+                  <a:srgbClr val="000000"/>
+                </a:solidFill>
+                <a:effectLst/>
+                <a:latin typeface="Consolas" panose="020B0609020204030204" pitchFamily="49" charset="0"/>
+              </a:rPr>
+              <a:t>(</a:t>
+            </a:r>
+            <a:r>
+              <a:rPr lang="en-US" b="0" dirty="0">
+                <a:solidFill>
+                  <a:srgbClr val="E21F1F"/>
+                </a:solidFill>
+                <a:effectLst/>
+                <a:latin typeface="Consolas" panose="020B0609020204030204" pitchFamily="49" charset="0"/>
+              </a:rPr>
+              <a:t>"</a:t>
+            </a:r>
+            <a:r>
+              <a:rPr lang="ru-RU" b="0" dirty="0">
+                <a:solidFill>
+                  <a:srgbClr val="A31515"/>
+                </a:solidFill>
+                <a:effectLst/>
+                <a:latin typeface="Consolas" panose="020B0609020204030204" pitchFamily="49" charset="0"/>
+              </a:rPr>
+              <a:t>Чётное</a:t>
+            </a:r>
+            <a:r>
+              <a:rPr lang="ru-RU" b="0" dirty="0">
+                <a:solidFill>
+                  <a:srgbClr val="B776FB"/>
+                </a:solidFill>
+                <a:effectLst/>
+                <a:latin typeface="Consolas" panose="020B0609020204030204" pitchFamily="49" charset="0"/>
+              </a:rPr>
+              <a:t>\</a:t>
+            </a:r>
+            <a:r>
+              <a:rPr lang="en-US" b="0" dirty="0">
+                <a:solidFill>
+                  <a:srgbClr val="B776FB"/>
+                </a:solidFill>
+                <a:effectLst/>
+                <a:latin typeface="Consolas" panose="020B0609020204030204" pitchFamily="49" charset="0"/>
+              </a:rPr>
+              <a:t>n</a:t>
+            </a:r>
+            <a:r>
+              <a:rPr lang="en-US" b="0" dirty="0">
+                <a:solidFill>
+                  <a:srgbClr val="E21F1F"/>
+                </a:solidFill>
+                <a:effectLst/>
+                <a:latin typeface="Consolas" panose="020B0609020204030204" pitchFamily="49" charset="0"/>
+              </a:rPr>
+              <a:t>"</a:t>
+            </a:r>
+            <a:r>
+              <a:rPr lang="en-US" b="0" dirty="0">
+                <a:solidFill>
+                  <a:srgbClr val="000000"/>
+                </a:solidFill>
+                <a:effectLst/>
+                <a:latin typeface="Consolas" panose="020B0609020204030204" pitchFamily="49" charset="0"/>
+              </a:rPr>
+              <a:t>);</a:t>
+            </a:r>
+          </a:p>
+          <a:p>
+            <a:pPr lvl="1">
+              <a:buNone/>
+            </a:pPr>
+            <a:r>
+              <a:rPr lang="en-US" b="0" dirty="0">
+                <a:solidFill>
+                  <a:srgbClr val="000000"/>
+                </a:solidFill>
+                <a:effectLst/>
+                <a:latin typeface="Consolas" panose="020B0609020204030204" pitchFamily="49" charset="0"/>
+              </a:rPr>
+              <a:t>} </a:t>
+            </a:r>
+            <a:r>
+              <a:rPr lang="en-US" b="0" dirty="0">
+                <a:solidFill>
+                  <a:srgbClr val="8F08C4"/>
+                </a:solidFill>
+                <a:effectLst/>
+                <a:latin typeface="Consolas" panose="020B0609020204030204" pitchFamily="49" charset="0"/>
+              </a:rPr>
+              <a:t>else</a:t>
+            </a:r>
+            <a:r>
+              <a:rPr lang="en-US" b="0" dirty="0">
+                <a:solidFill>
+                  <a:srgbClr val="000000"/>
+                </a:solidFill>
+                <a:effectLst/>
+                <a:latin typeface="Consolas" panose="020B0609020204030204" pitchFamily="49" charset="0"/>
+              </a:rPr>
+              <a:t> {</a:t>
+            </a:r>
+          </a:p>
+          <a:p>
+            <a:pPr lvl="1">
+              <a:buNone/>
+            </a:pPr>
+            <a:r>
+              <a:rPr lang="en-US" b="0" dirty="0">
+                <a:solidFill>
+                  <a:srgbClr val="000000"/>
+                </a:solidFill>
+                <a:effectLst/>
+                <a:latin typeface="Consolas" panose="020B0609020204030204" pitchFamily="49" charset="0"/>
+              </a:rPr>
+              <a:t>    </a:t>
+            </a:r>
+            <a:r>
+              <a:rPr lang="en-US" b="0" dirty="0" err="1">
+                <a:solidFill>
+                  <a:srgbClr val="74531F"/>
+                </a:solidFill>
+                <a:effectLst/>
+                <a:latin typeface="Consolas" panose="020B0609020204030204" pitchFamily="49" charset="0"/>
+              </a:rPr>
+              <a:t>printf</a:t>
+            </a:r>
+            <a:r>
+              <a:rPr lang="en-US" b="0" dirty="0">
+                <a:solidFill>
+                  <a:srgbClr val="000000"/>
+                </a:solidFill>
+                <a:effectLst/>
+                <a:latin typeface="Consolas" panose="020B0609020204030204" pitchFamily="49" charset="0"/>
+              </a:rPr>
+              <a:t>(</a:t>
+            </a:r>
+            <a:r>
+              <a:rPr lang="en-US" b="0" dirty="0">
+                <a:solidFill>
+                  <a:srgbClr val="E21F1F"/>
+                </a:solidFill>
+                <a:effectLst/>
+                <a:latin typeface="Consolas" panose="020B0609020204030204" pitchFamily="49" charset="0"/>
+              </a:rPr>
+              <a:t>"</a:t>
+            </a:r>
+            <a:r>
+              <a:rPr lang="ru-RU" b="0" dirty="0">
+                <a:solidFill>
+                  <a:srgbClr val="A31515"/>
+                </a:solidFill>
+                <a:effectLst/>
+                <a:latin typeface="Consolas" panose="020B0609020204030204" pitchFamily="49" charset="0"/>
+              </a:rPr>
+              <a:t>Нечётное</a:t>
+            </a:r>
+            <a:r>
+              <a:rPr lang="ru-RU" b="0" dirty="0">
+                <a:solidFill>
+                  <a:srgbClr val="B776FB"/>
+                </a:solidFill>
+                <a:effectLst/>
+                <a:latin typeface="Consolas" panose="020B0609020204030204" pitchFamily="49" charset="0"/>
+              </a:rPr>
+              <a:t>\</a:t>
+            </a:r>
+            <a:r>
+              <a:rPr lang="en-US" b="0" dirty="0">
+                <a:solidFill>
+                  <a:srgbClr val="B776FB"/>
+                </a:solidFill>
+                <a:effectLst/>
+                <a:latin typeface="Consolas" panose="020B0609020204030204" pitchFamily="49" charset="0"/>
+              </a:rPr>
+              <a:t>n</a:t>
+            </a:r>
+            <a:r>
+              <a:rPr lang="en-US" b="0" dirty="0">
+                <a:solidFill>
+                  <a:srgbClr val="E21F1F"/>
+                </a:solidFill>
+                <a:effectLst/>
+                <a:latin typeface="Consolas" panose="020B0609020204030204" pitchFamily="49" charset="0"/>
+              </a:rPr>
+              <a:t>"</a:t>
+            </a:r>
+            <a:r>
+              <a:rPr lang="en-US" b="0" dirty="0">
+                <a:solidFill>
+                  <a:srgbClr val="000000"/>
+                </a:solidFill>
+                <a:effectLst/>
+                <a:latin typeface="Consolas" panose="020B0609020204030204" pitchFamily="49" charset="0"/>
+              </a:rPr>
+              <a:t>);</a:t>
+            </a:r>
+          </a:p>
+          <a:p>
+            <a:pPr lvl="1">
+              <a:buNone/>
+            </a:pPr>
+            <a:r>
+              <a:rPr lang="en-US" b="0" dirty="0">
+                <a:solidFill>
+                  <a:srgbClr val="000000"/>
+                </a:solidFill>
+                <a:effectLst/>
+                <a:latin typeface="Consolas" panose="020B0609020204030204" pitchFamily="49" charset="0"/>
+              </a:rPr>
+              <a:t>}</a:t>
+            </a:r>
+          </a:p>
+        </p:txBody>
+      </p:sp>
+    </p:spTree>
+    <p:extLst>
+      <p:ext uri="{BB962C8B-B14F-4D97-AF65-F5344CB8AC3E}">
+        <p14:creationId xmlns:p14="http://schemas.microsoft.com/office/powerpoint/2010/main" val="211475979"/>
+      </p:ext>
+    </p:extLst>
+  </p:cSld>
+  <p:clrMapOvr>
+    <a:masterClrMapping/>
+  </p:clrMapOvr>
+</p:sld>
+</file>
+
+<file path=ppt/slides/slide50.xml><?xml version="1.0" encoding="utf-8"?>
 <p:sld xmlns:a="http://schemas.openxmlformats.org/drawingml/2006/main" xmlns:r="http://schemas.openxmlformats.org/officeDocument/2006/relationships" xmlns:p="http://schemas.openxmlformats.org/presentationml/2006/main">
   <p:cSld>
     <p:spTree>
@@ -33666,7 +39250,7 @@
 </p:sld>
 </file>
 
-<file path=ppt/slides/slide47.xml><?xml version="1.0" encoding="utf-8"?>
+<file path=ppt/slides/slide51.xml><?xml version="1.0" encoding="utf-8"?>
 <p:sld xmlns:a="http://schemas.openxmlformats.org/drawingml/2006/main" xmlns:r="http://schemas.openxmlformats.org/officeDocument/2006/relationships" xmlns:p="http://schemas.openxmlformats.org/presentationml/2006/main">
   <p:cSld>
     <p:spTree>
@@ -34712,7 +40296,7 @@
 </p:sld>
 </file>
 
-<file path=ppt/slides/slide48.xml><?xml version="1.0" encoding="utf-8"?>
+<file path=ppt/slides/slide52.xml><?xml version="1.0" encoding="utf-8"?>
 <p:sld xmlns:a="http://schemas.openxmlformats.org/drawingml/2006/main" xmlns:r="http://schemas.openxmlformats.org/officeDocument/2006/relationships" xmlns:p="http://schemas.openxmlformats.org/presentationml/2006/main">
   <p:cSld>
     <p:spTree>
@@ -36758,7 +42342,7 @@
 </p:sld>
 </file>
 
-<file path=ppt/slides/slide49.xml><?xml version="1.0" encoding="utf-8"?>
+<file path=ppt/slides/slide53.xml><?xml version="1.0" encoding="utf-8"?>
 <p:sld xmlns:a="http://schemas.openxmlformats.org/drawingml/2006/main" xmlns:r="http://schemas.openxmlformats.org/officeDocument/2006/relationships" xmlns:p="http://schemas.openxmlformats.org/presentationml/2006/main">
   <p:cSld>
     <p:spTree>
@@ -36875,579 +42459,7 @@
 </p:sld>
 </file>
 
-<file path=ppt/slides/slide5.xml><?xml version="1.0" encoding="utf-8"?>
-<p:sld xmlns:a="http://schemas.openxmlformats.org/drawingml/2006/main" xmlns:r="http://schemas.openxmlformats.org/officeDocument/2006/relationships" xmlns:p="http://schemas.openxmlformats.org/presentationml/2006/main">
-  <p:cSld>
-    <p:spTree>
-      <p:nvGrpSpPr>
-        <p:cNvPr id="1" name=""/>
-        <p:cNvGrpSpPr/>
-        <p:nvPr/>
-      </p:nvGrpSpPr>
-      <p:grpSpPr>
-        <a:xfrm>
-          <a:off x="0" y="0"/>
-          <a:ext cx="0" cy="0"/>
-          <a:chOff x="0" y="0"/>
-          <a:chExt cx="0" cy="0"/>
-        </a:xfrm>
-      </p:grpSpPr>
-      <p:sp>
-        <p:nvSpPr>
-          <p:cNvPr id="2" name="Title 1">
-            <a:extLst>
-              <a:ext uri="{FF2B5EF4-FFF2-40B4-BE49-F238E27FC236}">
-                <a16:creationId xmlns:a16="http://schemas.microsoft.com/office/drawing/2014/main" id="{AC0A6E1A-27C1-D6CE-12A2-D413A354AAFD}"/>
-              </a:ext>
-            </a:extLst>
-          </p:cNvPr>
-          <p:cNvSpPr>
-            <a:spLocks noGrp="1"/>
-          </p:cNvSpPr>
-          <p:nvPr>
-            <p:ph type="title"/>
-          </p:nvPr>
-        </p:nvSpPr>
-        <p:spPr/>
-        <p:txBody>
-          <a:bodyPr/>
-          <a:lstStyle/>
-          <a:p>
-            <a:r>
-              <a:rPr lang="en-US"/>
-              <a:t>if – else</a:t>
-            </a:r>
-            <a:endParaRPr lang="en-US" dirty="0"/>
-          </a:p>
-        </p:txBody>
-      </p:sp>
-      <p:sp>
-        <p:nvSpPr>
-          <p:cNvPr id="3" name="Content Placeholder 2">
-            <a:extLst>
-              <a:ext uri="{FF2B5EF4-FFF2-40B4-BE49-F238E27FC236}">
-                <a16:creationId xmlns:a16="http://schemas.microsoft.com/office/drawing/2014/main" id="{D3955811-BE05-C014-66A2-CF57872216B2}"/>
-              </a:ext>
-            </a:extLst>
-          </p:cNvPr>
-          <p:cNvSpPr>
-            <a:spLocks noGrp="1"/>
-          </p:cNvSpPr>
-          <p:nvPr>
-            <p:ph idx="1"/>
-          </p:nvPr>
-        </p:nvSpPr>
-        <p:spPr/>
-        <p:txBody>
-          <a:bodyPr>
-            <a:normAutofit fontScale="92500" lnSpcReduction="20000"/>
-          </a:bodyPr>
-          <a:lstStyle/>
-          <a:p>
-            <a:r>
-              <a:rPr lang="ru-RU" dirty="0"/>
-              <a:t>Форма инструкции </a:t>
-            </a:r>
-            <a:r>
-              <a:rPr lang="en-US" dirty="0"/>
-              <a:t>if</a:t>
-            </a:r>
-            <a:r>
-              <a:rPr lang="ru-RU" dirty="0"/>
-              <a:t>, в которой нужно выполнить альтернативный код (если условие ложно)</a:t>
-            </a:r>
-          </a:p>
-          <a:p>
-            <a:pPr lvl="1">
-              <a:buNone/>
-            </a:pPr>
-            <a:r>
-              <a:rPr lang="en-US" b="0" dirty="0">
-                <a:solidFill>
-                  <a:srgbClr val="8F08C4"/>
-                </a:solidFill>
-                <a:effectLst/>
-                <a:latin typeface="Consolas" panose="020B0609020204030204" pitchFamily="49" charset="0"/>
-              </a:rPr>
-              <a:t>if</a:t>
-            </a:r>
-            <a:r>
-              <a:rPr lang="en-US" b="0" dirty="0">
-                <a:solidFill>
-                  <a:srgbClr val="000000"/>
-                </a:solidFill>
-                <a:effectLst/>
-                <a:latin typeface="Consolas" panose="020B0609020204030204" pitchFamily="49" charset="0"/>
-              </a:rPr>
-              <a:t> (condition) {</a:t>
-            </a:r>
-          </a:p>
-          <a:p>
-            <a:pPr lvl="1">
-              <a:buNone/>
-            </a:pPr>
-            <a:r>
-              <a:rPr lang="en-US" b="0" dirty="0">
-                <a:solidFill>
-                  <a:srgbClr val="000000"/>
-                </a:solidFill>
-                <a:effectLst/>
-                <a:latin typeface="Consolas" panose="020B0609020204030204" pitchFamily="49" charset="0"/>
-              </a:rPr>
-              <a:t>    </a:t>
-            </a:r>
-            <a:r>
-              <a:rPr lang="en-US" b="0" dirty="0">
-                <a:solidFill>
-                  <a:srgbClr val="008000"/>
-                </a:solidFill>
-                <a:effectLst/>
-                <a:latin typeface="Consolas" panose="020B0609020204030204" pitchFamily="49" charset="0"/>
-              </a:rPr>
-              <a:t>// </a:t>
-            </a:r>
-            <a:r>
-              <a:rPr lang="ru-RU" b="0" dirty="0">
-                <a:solidFill>
-                  <a:srgbClr val="008000"/>
-                </a:solidFill>
-                <a:effectLst/>
-                <a:latin typeface="Consolas" panose="020B0609020204030204" pitchFamily="49" charset="0"/>
-              </a:rPr>
-              <a:t>если истина</a:t>
-            </a:r>
-            <a:endParaRPr lang="ru-RU" b="0" dirty="0">
-              <a:solidFill>
-                <a:srgbClr val="000000"/>
-              </a:solidFill>
-              <a:effectLst/>
-              <a:latin typeface="Consolas" panose="020B0609020204030204" pitchFamily="49" charset="0"/>
-            </a:endParaRPr>
-          </a:p>
-          <a:p>
-            <a:pPr lvl="1">
-              <a:buNone/>
-            </a:pPr>
-            <a:r>
-              <a:rPr lang="ru-RU" b="0" dirty="0">
-                <a:solidFill>
-                  <a:srgbClr val="000000"/>
-                </a:solidFill>
-                <a:effectLst/>
-                <a:latin typeface="Consolas" panose="020B0609020204030204" pitchFamily="49" charset="0"/>
-              </a:rPr>
-              <a:t>} </a:t>
-            </a:r>
-            <a:r>
-              <a:rPr lang="en-US" b="0" dirty="0">
-                <a:solidFill>
-                  <a:srgbClr val="8F08C4"/>
-                </a:solidFill>
-                <a:effectLst/>
-                <a:latin typeface="Consolas" panose="020B0609020204030204" pitchFamily="49" charset="0"/>
-              </a:rPr>
-              <a:t>else</a:t>
-            </a:r>
-            <a:r>
-              <a:rPr lang="en-US" b="0" dirty="0">
-                <a:solidFill>
-                  <a:srgbClr val="000000"/>
-                </a:solidFill>
-                <a:effectLst/>
-                <a:latin typeface="Consolas" panose="020B0609020204030204" pitchFamily="49" charset="0"/>
-              </a:rPr>
-              <a:t> {</a:t>
-            </a:r>
-          </a:p>
-          <a:p>
-            <a:pPr lvl="1">
-              <a:buNone/>
-            </a:pPr>
-            <a:r>
-              <a:rPr lang="en-US" b="0" dirty="0">
-                <a:solidFill>
-                  <a:srgbClr val="000000"/>
-                </a:solidFill>
-                <a:effectLst/>
-                <a:latin typeface="Consolas" panose="020B0609020204030204" pitchFamily="49" charset="0"/>
-              </a:rPr>
-              <a:t>    </a:t>
-            </a:r>
-            <a:r>
-              <a:rPr lang="en-US" b="0" dirty="0">
-                <a:solidFill>
-                  <a:srgbClr val="008000"/>
-                </a:solidFill>
-                <a:effectLst/>
-                <a:latin typeface="Consolas" panose="020B0609020204030204" pitchFamily="49" charset="0"/>
-              </a:rPr>
-              <a:t>// </a:t>
-            </a:r>
-            <a:r>
-              <a:rPr lang="ru-RU" b="0" dirty="0">
-                <a:solidFill>
-                  <a:srgbClr val="008000"/>
-                </a:solidFill>
-                <a:effectLst/>
-                <a:latin typeface="Consolas" panose="020B0609020204030204" pitchFamily="49" charset="0"/>
-              </a:rPr>
-              <a:t>если ложь</a:t>
-            </a:r>
-            <a:endParaRPr lang="ru-RU" b="0" dirty="0">
-              <a:solidFill>
-                <a:srgbClr val="000000"/>
-              </a:solidFill>
-              <a:effectLst/>
-              <a:latin typeface="Consolas" panose="020B0609020204030204" pitchFamily="49" charset="0"/>
-            </a:endParaRPr>
-          </a:p>
-          <a:p>
-            <a:pPr lvl="1">
-              <a:buNone/>
-            </a:pPr>
-            <a:r>
-              <a:rPr lang="ru-RU" b="0" dirty="0">
-                <a:solidFill>
-                  <a:srgbClr val="000000"/>
-                </a:solidFill>
-                <a:effectLst/>
-                <a:latin typeface="Consolas" panose="020B0609020204030204" pitchFamily="49" charset="0"/>
-              </a:rPr>
-              <a:t>}</a:t>
-            </a:r>
-          </a:p>
-          <a:p>
-            <a:pPr>
-              <a:lnSpc>
-                <a:spcPct val="120000"/>
-              </a:lnSpc>
-            </a:pPr>
-            <a:r>
-              <a:rPr lang="ru-RU" dirty="0"/>
-              <a:t>Пример:</a:t>
-            </a:r>
-          </a:p>
-          <a:p>
-            <a:pPr lvl="1">
-              <a:buNone/>
-            </a:pPr>
-            <a:r>
-              <a:rPr lang="en-US" b="0" dirty="0">
-                <a:solidFill>
-                  <a:srgbClr val="8F08C4"/>
-                </a:solidFill>
-                <a:effectLst/>
-                <a:latin typeface="Consolas" panose="020B0609020204030204" pitchFamily="49" charset="0"/>
-              </a:rPr>
-              <a:t>if</a:t>
-            </a:r>
-            <a:r>
-              <a:rPr lang="en-US" b="0" dirty="0">
-                <a:solidFill>
-                  <a:srgbClr val="000000"/>
-                </a:solidFill>
-                <a:effectLst/>
-                <a:latin typeface="Consolas" panose="020B0609020204030204" pitchFamily="49" charset="0"/>
-              </a:rPr>
-              <a:t> (x % </a:t>
-            </a:r>
-            <a:r>
-              <a:rPr lang="en-US" b="0" dirty="0">
-                <a:solidFill>
-                  <a:srgbClr val="098658"/>
-                </a:solidFill>
-                <a:effectLst/>
-                <a:latin typeface="Consolas" panose="020B0609020204030204" pitchFamily="49" charset="0"/>
-              </a:rPr>
-              <a:t>2</a:t>
-            </a:r>
-            <a:r>
-              <a:rPr lang="en-US" b="0" dirty="0">
-                <a:solidFill>
-                  <a:srgbClr val="000000"/>
-                </a:solidFill>
-                <a:effectLst/>
-                <a:latin typeface="Consolas" panose="020B0609020204030204" pitchFamily="49" charset="0"/>
-              </a:rPr>
-              <a:t> == </a:t>
-            </a:r>
-            <a:r>
-              <a:rPr lang="en-US" b="0" dirty="0">
-                <a:solidFill>
-                  <a:srgbClr val="098658"/>
-                </a:solidFill>
-                <a:effectLst/>
-                <a:latin typeface="Consolas" panose="020B0609020204030204" pitchFamily="49" charset="0"/>
-              </a:rPr>
-              <a:t>0</a:t>
-            </a:r>
-            <a:r>
-              <a:rPr lang="en-US" b="0" dirty="0">
-                <a:solidFill>
-                  <a:srgbClr val="000000"/>
-                </a:solidFill>
-                <a:effectLst/>
-                <a:latin typeface="Consolas" panose="020B0609020204030204" pitchFamily="49" charset="0"/>
-              </a:rPr>
-              <a:t>) {</a:t>
-            </a:r>
-          </a:p>
-          <a:p>
-            <a:pPr lvl="1">
-              <a:buNone/>
-            </a:pPr>
-            <a:r>
-              <a:rPr lang="en-US" b="0" dirty="0">
-                <a:solidFill>
-                  <a:srgbClr val="000000"/>
-                </a:solidFill>
-                <a:effectLst/>
-                <a:latin typeface="Consolas" panose="020B0609020204030204" pitchFamily="49" charset="0"/>
-              </a:rPr>
-              <a:t>    </a:t>
-            </a:r>
-            <a:r>
-              <a:rPr lang="en-US" b="0" dirty="0" err="1">
-                <a:solidFill>
-                  <a:srgbClr val="74531F"/>
-                </a:solidFill>
-                <a:effectLst/>
-                <a:latin typeface="Consolas" panose="020B0609020204030204" pitchFamily="49" charset="0"/>
-              </a:rPr>
-              <a:t>printf</a:t>
-            </a:r>
-            <a:r>
-              <a:rPr lang="en-US" b="0" dirty="0">
-                <a:solidFill>
-                  <a:srgbClr val="000000"/>
-                </a:solidFill>
-                <a:effectLst/>
-                <a:latin typeface="Consolas" panose="020B0609020204030204" pitchFamily="49" charset="0"/>
-              </a:rPr>
-              <a:t>(</a:t>
-            </a:r>
-            <a:r>
-              <a:rPr lang="en-US" b="0" dirty="0">
-                <a:solidFill>
-                  <a:srgbClr val="E21F1F"/>
-                </a:solidFill>
-                <a:effectLst/>
-                <a:latin typeface="Consolas" panose="020B0609020204030204" pitchFamily="49" charset="0"/>
-              </a:rPr>
-              <a:t>"</a:t>
-            </a:r>
-            <a:r>
-              <a:rPr lang="ru-RU" b="0" dirty="0">
-                <a:solidFill>
-                  <a:srgbClr val="A31515"/>
-                </a:solidFill>
-                <a:effectLst/>
-                <a:latin typeface="Consolas" panose="020B0609020204030204" pitchFamily="49" charset="0"/>
-              </a:rPr>
-              <a:t>Чётное</a:t>
-            </a:r>
-            <a:r>
-              <a:rPr lang="ru-RU" b="0" dirty="0">
-                <a:solidFill>
-                  <a:srgbClr val="B776FB"/>
-                </a:solidFill>
-                <a:effectLst/>
-                <a:latin typeface="Consolas" panose="020B0609020204030204" pitchFamily="49" charset="0"/>
-              </a:rPr>
-              <a:t>\</a:t>
-            </a:r>
-            <a:r>
-              <a:rPr lang="en-US" b="0" dirty="0">
-                <a:solidFill>
-                  <a:srgbClr val="B776FB"/>
-                </a:solidFill>
-                <a:effectLst/>
-                <a:latin typeface="Consolas" panose="020B0609020204030204" pitchFamily="49" charset="0"/>
-              </a:rPr>
-              <a:t>n</a:t>
-            </a:r>
-            <a:r>
-              <a:rPr lang="en-US" b="0" dirty="0">
-                <a:solidFill>
-                  <a:srgbClr val="E21F1F"/>
-                </a:solidFill>
-                <a:effectLst/>
-                <a:latin typeface="Consolas" panose="020B0609020204030204" pitchFamily="49" charset="0"/>
-              </a:rPr>
-              <a:t>"</a:t>
-            </a:r>
-            <a:r>
-              <a:rPr lang="en-US" b="0" dirty="0">
-                <a:solidFill>
-                  <a:srgbClr val="000000"/>
-                </a:solidFill>
-                <a:effectLst/>
-                <a:latin typeface="Consolas" panose="020B0609020204030204" pitchFamily="49" charset="0"/>
-              </a:rPr>
-              <a:t>);</a:t>
-            </a:r>
-          </a:p>
-          <a:p>
-            <a:pPr lvl="1">
-              <a:buNone/>
-            </a:pPr>
-            <a:r>
-              <a:rPr lang="en-US" b="0" dirty="0">
-                <a:solidFill>
-                  <a:srgbClr val="000000"/>
-                </a:solidFill>
-                <a:effectLst/>
-                <a:latin typeface="Consolas" panose="020B0609020204030204" pitchFamily="49" charset="0"/>
-              </a:rPr>
-              <a:t>} </a:t>
-            </a:r>
-            <a:r>
-              <a:rPr lang="en-US" b="0" dirty="0">
-                <a:solidFill>
-                  <a:srgbClr val="8F08C4"/>
-                </a:solidFill>
-                <a:effectLst/>
-                <a:latin typeface="Consolas" panose="020B0609020204030204" pitchFamily="49" charset="0"/>
-              </a:rPr>
-              <a:t>else</a:t>
-            </a:r>
-            <a:r>
-              <a:rPr lang="en-US" b="0" dirty="0">
-                <a:solidFill>
-                  <a:srgbClr val="000000"/>
-                </a:solidFill>
-                <a:effectLst/>
-                <a:latin typeface="Consolas" panose="020B0609020204030204" pitchFamily="49" charset="0"/>
-              </a:rPr>
-              <a:t> {</a:t>
-            </a:r>
-          </a:p>
-          <a:p>
-            <a:pPr lvl="1">
-              <a:buNone/>
-            </a:pPr>
-            <a:r>
-              <a:rPr lang="en-US" b="0" dirty="0">
-                <a:solidFill>
-                  <a:srgbClr val="000000"/>
-                </a:solidFill>
-                <a:effectLst/>
-                <a:latin typeface="Consolas" panose="020B0609020204030204" pitchFamily="49" charset="0"/>
-              </a:rPr>
-              <a:t>    </a:t>
-            </a:r>
-            <a:r>
-              <a:rPr lang="en-US" b="0" dirty="0" err="1">
-                <a:solidFill>
-                  <a:srgbClr val="74531F"/>
-                </a:solidFill>
-                <a:effectLst/>
-                <a:latin typeface="Consolas" panose="020B0609020204030204" pitchFamily="49" charset="0"/>
-              </a:rPr>
-              <a:t>printf</a:t>
-            </a:r>
-            <a:r>
-              <a:rPr lang="en-US" b="0" dirty="0">
-                <a:solidFill>
-                  <a:srgbClr val="000000"/>
-                </a:solidFill>
-                <a:effectLst/>
-                <a:latin typeface="Consolas" panose="020B0609020204030204" pitchFamily="49" charset="0"/>
-              </a:rPr>
-              <a:t>(</a:t>
-            </a:r>
-            <a:r>
-              <a:rPr lang="en-US" b="0" dirty="0">
-                <a:solidFill>
-                  <a:srgbClr val="E21F1F"/>
-                </a:solidFill>
-                <a:effectLst/>
-                <a:latin typeface="Consolas" panose="020B0609020204030204" pitchFamily="49" charset="0"/>
-              </a:rPr>
-              <a:t>"</a:t>
-            </a:r>
-            <a:r>
-              <a:rPr lang="ru-RU" b="0" dirty="0">
-                <a:solidFill>
-                  <a:srgbClr val="A31515"/>
-                </a:solidFill>
-                <a:effectLst/>
-                <a:latin typeface="Consolas" panose="020B0609020204030204" pitchFamily="49" charset="0"/>
-              </a:rPr>
-              <a:t>Нечётное</a:t>
-            </a:r>
-            <a:r>
-              <a:rPr lang="ru-RU" b="0" dirty="0">
-                <a:solidFill>
-                  <a:srgbClr val="B776FB"/>
-                </a:solidFill>
-                <a:effectLst/>
-                <a:latin typeface="Consolas" panose="020B0609020204030204" pitchFamily="49" charset="0"/>
-              </a:rPr>
-              <a:t>\</a:t>
-            </a:r>
-            <a:r>
-              <a:rPr lang="en-US" b="0" dirty="0">
-                <a:solidFill>
-                  <a:srgbClr val="B776FB"/>
-                </a:solidFill>
-                <a:effectLst/>
-                <a:latin typeface="Consolas" panose="020B0609020204030204" pitchFamily="49" charset="0"/>
-              </a:rPr>
-              <a:t>n</a:t>
-            </a:r>
-            <a:r>
-              <a:rPr lang="en-US" b="0" dirty="0">
-                <a:solidFill>
-                  <a:srgbClr val="E21F1F"/>
-                </a:solidFill>
-                <a:effectLst/>
-                <a:latin typeface="Consolas" panose="020B0609020204030204" pitchFamily="49" charset="0"/>
-              </a:rPr>
-              <a:t>"</a:t>
-            </a:r>
-            <a:r>
-              <a:rPr lang="en-US" b="0" dirty="0">
-                <a:solidFill>
-                  <a:srgbClr val="000000"/>
-                </a:solidFill>
-                <a:effectLst/>
-                <a:latin typeface="Consolas" panose="020B0609020204030204" pitchFamily="49" charset="0"/>
-              </a:rPr>
-              <a:t>);</a:t>
-            </a:r>
-          </a:p>
-          <a:p>
-            <a:pPr lvl="1">
-              <a:buNone/>
-            </a:pPr>
-            <a:r>
-              <a:rPr lang="en-US" b="0" dirty="0">
-                <a:solidFill>
-                  <a:srgbClr val="000000"/>
-                </a:solidFill>
-                <a:effectLst/>
-                <a:latin typeface="Consolas" panose="020B0609020204030204" pitchFamily="49" charset="0"/>
-              </a:rPr>
-              <a:t>}</a:t>
-            </a:r>
-          </a:p>
-        </p:txBody>
-      </p:sp>
-    </p:spTree>
-    <p:extLst>
-      <p:ext uri="{BB962C8B-B14F-4D97-AF65-F5344CB8AC3E}">
-        <p14:creationId xmlns:p14="http://schemas.microsoft.com/office/powerpoint/2010/main" val="211475979"/>
-      </p:ext>
-    </p:extLst>
-  </p:cSld>
-  <p:clrMapOvr>
-    <a:masterClrMapping/>
-  </p:clrMapOvr>
-</p:sld>
-</file>
-
-<file path=ppt/slides/slide50.xml><?xml version="1.0" encoding="utf-8"?>
+<file path=ppt/slides/slide54.xml><?xml version="1.0" encoding="utf-8"?>
 <p:sld xmlns:a="http://schemas.openxmlformats.org/drawingml/2006/main" xmlns:r="http://schemas.openxmlformats.org/officeDocument/2006/relationships" xmlns:p="http://schemas.openxmlformats.org/presentationml/2006/main">
   <p:cSld>
     <p:spTree>
@@ -37599,7 +42611,7 @@
 </p:sld>
 </file>
 
-<file path=ppt/slides/slide51.xml><?xml version="1.0" encoding="utf-8"?>
+<file path=ppt/slides/slide55.xml><?xml version="1.0" encoding="utf-8"?>
 <p:sld xmlns:a="http://schemas.openxmlformats.org/drawingml/2006/main" xmlns:r="http://schemas.openxmlformats.org/officeDocument/2006/relationships" xmlns:p="http://schemas.openxmlformats.org/presentationml/2006/main">
   <p:cSld>
     <p:spTree>

--- a/lectures/02/Control Flow and Arrays.pptx
+++ b/lectures/02/Control Flow and Arrays.pptx
@@ -262,7 +262,7 @@
           <a:p>
             <a:fld id="{6CDDDD3E-D2EC-48CC-AD37-0F76DAE963B3}" type="datetimeFigureOut">
               <a:rPr lang="en-US" smtClean="0"/>
-              <a:t>2/14/2026</a:t>
+              <a:t>2/16/2026</a:t>
             </a:fld>
             <a:endParaRPr lang="en-US"/>
           </a:p>
@@ -2209,7 +2209,7 @@
             </a:pPr>
             <a:r>
               <a:rPr lang="ru-RU" dirty="0"/>
-              <a:t>если введена согласная — выводится «Согласная»</a:t>
+              <a:t>если введена не гласная — выводится «Не гласная»</a:t>
             </a:r>
           </a:p>
           <a:p>
@@ -2323,6 +2323,25 @@
             </a:r>
           </a:p>
           <a:p>
+            <a:endParaRPr lang="ru-RU" dirty="0"/>
+          </a:p>
+          <a:p>
+            <a:r>
+              <a:rPr lang="en-US" dirty="0"/>
+              <a:t>default </a:t>
+            </a:r>
+            <a:r>
+              <a:rPr lang="ru-RU" dirty="0"/>
+              <a:t>– это метка, которая может стоять в любом месте внутри </a:t>
+            </a:r>
+            <a:r>
+              <a:rPr lang="en-US" dirty="0"/>
+              <a:t>switch</a:t>
+            </a:r>
+            <a:r>
+              <a:rPr lang="ru-RU" dirty="0"/>
+              <a:t>.</a:t>
+            </a:r>
             <a:endParaRPr lang="en-US" dirty="0"/>
           </a:p>
         </p:txBody>
@@ -7630,11 +7649,7 @@
             </a:r>
             <a:r>
               <a:rPr lang="ru-RU" dirty="0"/>
-              <a:t>, которая расположена после обоих циклов. Таким образом мы аккуратно выходим из всей вложенной </a:t>
-            </a:r>
-            <a:r>
-              <a:rPr lang="ru-RU"/>
-              <a:t>структуры.</a:t>
+              <a:t>, которая расположена после обоих циклов. Таким образом мы аккуратно выходим из всей вложенной структуры.</a:t>
             </a:r>
           </a:p>
           <a:p>
@@ -7660,6 +7675,19 @@
               <a:rPr lang="ru-RU" dirty="0"/>
               <a:t> следует использовать осторожно. Он может ухудшить читаемость программы, если применяется без необходимости. Однако в некоторых ситуациях, например при выходе из нескольких вложенных циклов или при централизованной обработке ошибок, он может сделать код проще и понятнее, чем сложные цепочки флагов и условий.</a:t>
             </a:r>
+            <a:r>
+              <a:rPr lang="en-US" dirty="0"/>
+              <a:t> </a:t>
+            </a:r>
+            <a:r>
+              <a:rPr lang="ru-RU" dirty="0"/>
+              <a:t>Это, пожалуй одно из немногих действительно </a:t>
+            </a:r>
+            <a:r>
+              <a:rPr lang="ru-RU"/>
+              <a:t>оправданных случаев.</a:t>
+            </a:r>
+            <a:endParaRPr lang="ru-RU" dirty="0"/>
           </a:p>
           <a:p>
             <a:endParaRPr lang="en-US" dirty="0"/>
@@ -11872,7 +11900,7 @@
           <a:p>
             <a:fld id="{EC1B5487-7B97-42AF-BBA7-CB26E3075E79}" type="datetimeFigureOut">
               <a:rPr lang="en-US" smtClean="0"/>
-              <a:t>2/14/2026</a:t>
+              <a:t>2/16/2026</a:t>
             </a:fld>
             <a:endParaRPr lang="en-US"/>
           </a:p>
@@ -12070,7 +12098,7 @@
           <a:p>
             <a:fld id="{EC1B5487-7B97-42AF-BBA7-CB26E3075E79}" type="datetimeFigureOut">
               <a:rPr lang="en-US" smtClean="0"/>
-              <a:t>2/14/2026</a:t>
+              <a:t>2/16/2026</a:t>
             </a:fld>
             <a:endParaRPr lang="en-US"/>
           </a:p>
@@ -12278,7 +12306,7 @@
           <a:p>
             <a:fld id="{EC1B5487-7B97-42AF-BBA7-CB26E3075E79}" type="datetimeFigureOut">
               <a:rPr lang="en-US" smtClean="0"/>
-              <a:t>2/14/2026</a:t>
+              <a:t>2/16/2026</a:t>
             </a:fld>
             <a:endParaRPr lang="en-US"/>
           </a:p>
@@ -12476,7 +12504,7 @@
           <a:p>
             <a:fld id="{EC1B5487-7B97-42AF-BBA7-CB26E3075E79}" type="datetimeFigureOut">
               <a:rPr lang="en-US" smtClean="0"/>
-              <a:t>2/14/2026</a:t>
+              <a:t>2/16/2026</a:t>
             </a:fld>
             <a:endParaRPr lang="en-US"/>
           </a:p>
@@ -12751,7 +12779,7 @@
           <a:p>
             <a:fld id="{EC1B5487-7B97-42AF-BBA7-CB26E3075E79}" type="datetimeFigureOut">
               <a:rPr lang="en-US" smtClean="0"/>
-              <a:t>2/14/2026</a:t>
+              <a:t>2/16/2026</a:t>
             </a:fld>
             <a:endParaRPr lang="en-US"/>
           </a:p>
@@ -13016,7 +13044,7 @@
           <a:p>
             <a:fld id="{EC1B5487-7B97-42AF-BBA7-CB26E3075E79}" type="datetimeFigureOut">
               <a:rPr lang="en-US" smtClean="0"/>
-              <a:t>2/14/2026</a:t>
+              <a:t>2/16/2026</a:t>
             </a:fld>
             <a:endParaRPr lang="en-US"/>
           </a:p>
@@ -13428,7 +13456,7 @@
           <a:p>
             <a:fld id="{EC1B5487-7B97-42AF-BBA7-CB26E3075E79}" type="datetimeFigureOut">
               <a:rPr lang="en-US" smtClean="0"/>
-              <a:t>2/14/2026</a:t>
+              <a:t>2/16/2026</a:t>
             </a:fld>
             <a:endParaRPr lang="en-US"/>
           </a:p>
@@ -13569,7 +13597,7 @@
           <a:p>
             <a:fld id="{EC1B5487-7B97-42AF-BBA7-CB26E3075E79}" type="datetimeFigureOut">
               <a:rPr lang="en-US" smtClean="0"/>
-              <a:t>2/14/2026</a:t>
+              <a:t>2/16/2026</a:t>
             </a:fld>
             <a:endParaRPr lang="en-US"/>
           </a:p>
@@ -13682,7 +13710,7 @@
           <a:p>
             <a:fld id="{EC1B5487-7B97-42AF-BBA7-CB26E3075E79}" type="datetimeFigureOut">
               <a:rPr lang="en-US" smtClean="0"/>
-              <a:t>2/14/2026</a:t>
+              <a:t>2/16/2026</a:t>
             </a:fld>
             <a:endParaRPr lang="en-US"/>
           </a:p>
@@ -13993,7 +14021,7 @@
           <a:p>
             <a:fld id="{EC1B5487-7B97-42AF-BBA7-CB26E3075E79}" type="datetimeFigureOut">
               <a:rPr lang="en-US" smtClean="0"/>
-              <a:t>2/14/2026</a:t>
+              <a:t>2/16/2026</a:t>
             </a:fld>
             <a:endParaRPr lang="en-US"/>
           </a:p>
@@ -14281,7 +14309,7 @@
           <a:p>
             <a:fld id="{EC1B5487-7B97-42AF-BBA7-CB26E3075E79}" type="datetimeFigureOut">
               <a:rPr lang="en-US" smtClean="0"/>
-              <a:t>2/14/2026</a:t>
+              <a:t>2/16/2026</a:t>
             </a:fld>
             <a:endParaRPr lang="en-US"/>
           </a:p>
@@ -14522,7 +14550,7 @@
           <a:p>
             <a:fld id="{EC1B5487-7B97-42AF-BBA7-CB26E3075E79}" type="datetimeFigureOut">
               <a:rPr lang="en-US" smtClean="0"/>
-              <a:t>2/14/2026</a:t>
+              <a:t>2/16/2026</a:t>
             </a:fld>
             <a:endParaRPr lang="en-US"/>
           </a:p>
@@ -19939,7 +19967,7 @@
                 <a:effectLst/>
                 <a:latin typeface="Consolas" panose="020B0609020204030204" pitchFamily="49" charset="0"/>
               </a:rPr>
-              <a:t>“not a vowel"</a:t>
+              <a:t>"not a vowel"</a:t>
             </a:r>
             <a:endParaRPr lang="en-US" sz="1300" b="0" dirty="0">
               <a:solidFill>
